--- a/docs/pitch/Mercor-Creators-Domain.pptx
+++ b/docs/pitch/Mercor-Creators-Domain.pptx
@@ -10,6 +10,7 @@
     <p:sldId id="258" r:id="rId9"/>
     <p:sldId id="259" r:id="rId10"/>
     <p:sldId id="260" r:id="rId11"/>
+    <p:sldId id="261" r:id="rId12"/>
   </p:sldIdLst>
   <p:sldSz cx="12191695" cy="6858000" type="screen4x3"/>
   <p:notesSz cx="6858000" cy="9144000"/>
@@ -3297,7 +3298,7 @@
                 </a:solidFill>
                 <a:latin typeface="Inter"/>
               </a:rPr>
-              <a:t>A 90-day pilot. A half-day integration.</a:t>
+              <a:t>Build over the summer. Ship at the start of Q4.</a:t>
             </a:r>
           </a:p>
         </p:txBody>
@@ -3419,7 +3420,7 @@
                 </a:solidFill>
                 <a:latin typeface="Inter"/>
               </a:rPr>
-              <a:t>creator experts   ·   internal proposal for aaron langerman   ·   1 / 5</a:t>
+              <a:t>creator experts   ·   internal proposal for aaron langerman   ·   1 / 6</a:t>
             </a:r>
           </a:p>
         </p:txBody>
@@ -3511,7 +3512,7 @@
                 </a:solidFill>
                 <a:latin typeface="Inter"/>
               </a:rPr>
-              <a:t>WHY THIS. WHY NOW.</a:t>
+              <a:t>THREE NUMBERS</a:t>
             </a:r>
           </a:p>
         </p:txBody>
@@ -3525,7 +3526,7 @@
         <p:spPr>
           <a:xfrm>
             <a:off x="640080" y="1417320"/>
-            <a:ext cx="10972800" cy="914400"/>
+            <a:ext cx="10972800" cy="1005840"/>
           </a:xfrm>
           <a:prstGeom prst="rect">
             <a:avLst/>
@@ -3550,27 +3551,74 @@
               </a:spcAft>
             </a:pPr>
             <a:r>
-              <a:rPr sz="3800" b="1">
+              <a:rPr sz="3400" b="1">
                 <a:solidFill>
                   <a:srgbClr val="0A0A0A"/>
                 </a:solidFill>
                 <a:latin typeface="Inter"/>
               </a:rPr>
-              <a:t>Three timers converging.</a:t>
-            </a:r>
-          </a:p>
-        </p:txBody>
-      </p:sp>
-      <p:sp>
-        <p:nvSpPr>
-          <p:cNvPr id="5" name="TextBox 4"/>
+              <a:t>The market is bigger than the model.</a:t>
+            </a:r>
+          </a:p>
+        </p:txBody>
+      </p:sp>
+      <p:sp>
+        <p:nvSpPr>
+          <p:cNvPr id="5" name="Rounded Rectangle 4"/>
+          <p:cNvSpPr/>
+          <p:nvPr/>
+        </p:nvSpPr>
+        <p:spPr>
+          <a:xfrm>
+            <a:off x="640080" y="3108960"/>
+            <a:ext cx="3657600" cy="2743200"/>
+          </a:xfrm>
+          <a:prstGeom prst="roundRect">
+            <a:avLst>
+              <a:gd name="adj" fmla="val 5000"/>
+            </a:avLst>
+          </a:prstGeom>
+          <a:solidFill>
+            <a:srgbClr val="FAFAFA"/>
+          </a:solidFill>
+          <a:ln w="9525">
+            <a:solidFill>
+              <a:srgbClr val="E5E7EB"/>
+            </a:solidFill>
+          </a:ln>
+        </p:spPr>
+        <p:style>
+          <a:lnRef idx="1">
+            <a:schemeClr val="accent1"/>
+          </a:lnRef>
+          <a:fillRef idx="3">
+            <a:schemeClr val="accent1"/>
+          </a:fillRef>
+          <a:effectRef idx="2">
+            <a:schemeClr val="accent1"/>
+          </a:effectRef>
+          <a:fontRef idx="minor">
+            <a:schemeClr val="lt1"/>
+          </a:fontRef>
+        </p:style>
+        <p:txBody>
+          <a:bodyPr rtlCol="0" anchor="ctr"/>
+          <a:lstStyle/>
+          <a:p>
+            <a:pPr algn="ctr"/>
+          </a:p>
+        </p:txBody>
+      </p:sp>
+      <p:sp>
+        <p:nvSpPr>
+          <p:cNvPr id="6" name="TextBox 5"/>
           <p:cNvSpPr txBox="1"/>
           <p:nvPr/>
         </p:nvSpPr>
         <p:spPr>
           <a:xfrm>
-            <a:off x="640080" y="3108960"/>
-            <a:ext cx="731520" cy="914400"/>
+            <a:off x="914400" y="3474720"/>
+            <a:ext cx="3108960" cy="2194560"/>
           </a:xfrm>
           <a:prstGeom prst="rect">
             <a:avLst/>
@@ -3582,6 +3630,44 @@
             <a:spAutoFit/>
           </a:bodyPr>
           <a:lstStyle/>
+          <a:p>
+            <a:pPr algn="l">
+              <a:spcBef>
+                <a:spcPts val="0"/>
+              </a:spcBef>
+              <a:spcAft>
+                <a:spcPts val="1000"/>
+              </a:spcAft>
+            </a:pPr>
+            <a:r>
+              <a:rPr sz="4400" b="1">
+                <a:solidFill>
+                  <a:srgbClr val="0A0A0A"/>
+                </a:solidFill>
+                <a:latin typeface="Inter"/>
+              </a:rPr>
+              <a:t>$480B</a:t>
+            </a:r>
+          </a:p>
+          <a:p>
+            <a:pPr algn="l">
+              <a:spcBef>
+                <a:spcPts val="0"/>
+              </a:spcBef>
+              <a:spcAft>
+                <a:spcPts val="1400"/>
+              </a:spcAft>
+            </a:pPr>
+            <a:r>
+              <a:rPr sz="1300" b="1">
+                <a:solidFill>
+                  <a:srgbClr val="0A0A0A"/>
+                </a:solidFill>
+                <a:latin typeface="Inter"/>
+              </a:rPr>
+              <a:t>Creator economy by 2027.</a:t>
+            </a:r>
+          </a:p>
           <a:p>
             <a:pPr algn="l">
               <a:spcBef>
@@ -3592,27 +3678,74 @@
               </a:spcAft>
             </a:pPr>
             <a:r>
-              <a:rPr sz="2200" b="1">
-                <a:solidFill>
-                  <a:srgbClr val="7857FF"/>
+              <a:rPr sz="1000" b="0">
+                <a:solidFill>
+                  <a:srgbClr val="9CA3AF"/>
                 </a:solidFill>
                 <a:latin typeface="Inter"/>
               </a:rPr>
-              <a:t>01</a:t>
-            </a:r>
-          </a:p>
-        </p:txBody>
-      </p:sp>
-      <p:sp>
-        <p:nvSpPr>
-          <p:cNvPr id="6" name="TextBox 5"/>
+              <a:t>Goldman Sachs.</a:t>
+            </a:r>
+          </a:p>
+        </p:txBody>
+      </p:sp>
+      <p:sp>
+        <p:nvSpPr>
+          <p:cNvPr id="7" name="Rounded Rectangle 6"/>
+          <p:cNvSpPr/>
+          <p:nvPr/>
+        </p:nvSpPr>
+        <p:spPr>
+          <a:xfrm>
+            <a:off x="4434840" y="3108960"/>
+            <a:ext cx="3657600" cy="2743200"/>
+          </a:xfrm>
+          <a:prstGeom prst="roundRect">
+            <a:avLst>
+              <a:gd name="adj" fmla="val 5000"/>
+            </a:avLst>
+          </a:prstGeom>
+          <a:solidFill>
+            <a:srgbClr val="EDE9FE"/>
+          </a:solidFill>
+          <a:ln w="12700">
+            <a:solidFill>
+              <a:srgbClr val="7857FF"/>
+            </a:solidFill>
+          </a:ln>
+        </p:spPr>
+        <p:style>
+          <a:lnRef idx="1">
+            <a:schemeClr val="accent1"/>
+          </a:lnRef>
+          <a:fillRef idx="3">
+            <a:schemeClr val="accent1"/>
+          </a:fillRef>
+          <a:effectRef idx="2">
+            <a:schemeClr val="accent1"/>
+          </a:effectRef>
+          <a:fontRef idx="minor">
+            <a:schemeClr val="lt1"/>
+          </a:fontRef>
+        </p:style>
+        <p:txBody>
+          <a:bodyPr rtlCol="0" anchor="ctr"/>
+          <a:lstStyle/>
+          <a:p>
+            <a:pPr algn="ctr"/>
+          </a:p>
+        </p:txBody>
+      </p:sp>
+      <p:sp>
+        <p:nvSpPr>
+          <p:cNvPr id="8" name="TextBox 7"/>
           <p:cNvSpPr txBox="1"/>
           <p:nvPr/>
         </p:nvSpPr>
         <p:spPr>
           <a:xfrm>
-            <a:off x="1554480" y="3108960"/>
-            <a:ext cx="10058400" cy="914400"/>
+            <a:off x="4709160" y="3474720"/>
+            <a:ext cx="3108960" cy="2194560"/>
           </a:xfrm>
           <a:prstGeom prst="rect">
             <a:avLst/>
@@ -3630,17 +3763,36 @@
                 <a:spcPts val="0"/>
               </a:spcBef>
               <a:spcAft>
-                <a:spcPts val="300"/>
+                <a:spcPts val="1000"/>
               </a:spcAft>
             </a:pPr>
             <a:r>
-              <a:rPr sz="1800" b="1">
-                <a:solidFill>
-                  <a:srgbClr val="0A0A0A"/>
+              <a:rPr sz="4400" b="1">
+                <a:solidFill>
+                  <a:srgbClr val="7857FF"/>
                 </a:solidFill>
                 <a:latin typeface="Inter"/>
               </a:rPr>
-              <a:t>Handshake AI takes Mercor's college funnel.</a:t>
+              <a:t>4×</a:t>
+            </a:r>
+          </a:p>
+          <a:p>
+            <a:pPr algn="l">
+              <a:spcBef>
+                <a:spcPts val="0"/>
+              </a:spcBef>
+              <a:spcAft>
+                <a:spcPts val="1400"/>
+              </a:spcAft>
+            </a:pPr>
+            <a:r>
+              <a:rPr sz="1300" b="1">
+                <a:solidFill>
+                  <a:srgbClr val="0A0A0A"/>
+                </a:solidFill>
+                <a:latin typeface="Inter"/>
+              </a:rPr>
+              <a:t>CTR lift on UGC vs. polished ads.</a:t>
             </a:r>
           </a:p>
           <a:p>
@@ -3653,27 +3805,74 @@
               </a:spcAft>
             </a:pPr>
             <a:r>
-              <a:rPr sz="1200" b="0">
-                <a:solidFill>
-                  <a:srgbClr val="6B7280"/>
+              <a:rPr sz="1000" b="0">
+                <a:solidFill>
+                  <a:srgbClr val="9CA3AF"/>
                 </a:solidFill>
                 <a:latin typeface="Inter"/>
               </a:rPr>
-              <a:t>18M students. Cheaper RLHF labor.</a:t>
-            </a:r>
-          </a:p>
-        </p:txBody>
-      </p:sp>
-      <p:sp>
-        <p:nvSpPr>
-          <p:cNvPr id="7" name="TextBox 6"/>
+              <a:t>Half the CPC, too. Impact, 2026.</a:t>
+            </a:r>
+          </a:p>
+        </p:txBody>
+      </p:sp>
+      <p:sp>
+        <p:nvSpPr>
+          <p:cNvPr id="9" name="Rounded Rectangle 8"/>
+          <p:cNvSpPr/>
+          <p:nvPr/>
+        </p:nvSpPr>
+        <p:spPr>
+          <a:xfrm>
+            <a:off x="8229600" y="3108960"/>
+            <a:ext cx="3657600" cy="2743200"/>
+          </a:xfrm>
+          <a:prstGeom prst="roundRect">
+            <a:avLst>
+              <a:gd name="adj" fmla="val 5000"/>
+            </a:avLst>
+          </a:prstGeom>
+          <a:solidFill>
+            <a:srgbClr val="FAFAFA"/>
+          </a:solidFill>
+          <a:ln w="9525">
+            <a:solidFill>
+              <a:srgbClr val="E5E7EB"/>
+            </a:solidFill>
+          </a:ln>
+        </p:spPr>
+        <p:style>
+          <a:lnRef idx="1">
+            <a:schemeClr val="accent1"/>
+          </a:lnRef>
+          <a:fillRef idx="3">
+            <a:schemeClr val="accent1"/>
+          </a:fillRef>
+          <a:effectRef idx="2">
+            <a:schemeClr val="accent1"/>
+          </a:effectRef>
+          <a:fontRef idx="minor">
+            <a:schemeClr val="lt1"/>
+          </a:fontRef>
+        </p:style>
+        <p:txBody>
+          <a:bodyPr rtlCol="0" anchor="ctr"/>
+          <a:lstStyle/>
+          <a:p>
+            <a:pPr algn="ctr"/>
+          </a:p>
+        </p:txBody>
+      </p:sp>
+      <p:sp>
+        <p:nvSpPr>
+          <p:cNvPr id="10" name="TextBox 9"/>
           <p:cNvSpPr txBox="1"/>
           <p:nvPr/>
         </p:nvSpPr>
         <p:spPr>
           <a:xfrm>
-            <a:off x="640080" y="4069080"/>
-            <a:ext cx="731520" cy="914400"/>
+            <a:off x="8503920" y="3474720"/>
+            <a:ext cx="3108960" cy="2194560"/>
           </a:xfrm>
           <a:prstGeom prst="rect">
             <a:avLst/>
@@ -3685,6 +3884,44 @@
             <a:spAutoFit/>
           </a:bodyPr>
           <a:lstStyle/>
+          <a:p>
+            <a:pPr algn="l">
+              <a:spcBef>
+                <a:spcPts val="0"/>
+              </a:spcBef>
+              <a:spcAft>
+                <a:spcPts val="1000"/>
+              </a:spcAft>
+            </a:pPr>
+            <a:r>
+              <a:rPr sz="4400" b="1">
+                <a:solidFill>
+                  <a:srgbClr val="0A0A0A"/>
+                </a:solidFill>
+                <a:latin typeface="Inter"/>
+              </a:rPr>
+              <a:t>74%</a:t>
+            </a:r>
+          </a:p>
+          <a:p>
+            <a:pPr algn="l">
+              <a:spcBef>
+                <a:spcPts val="0"/>
+              </a:spcBef>
+              <a:spcAft>
+                <a:spcPts val="1400"/>
+              </a:spcAft>
+            </a:pPr>
+            <a:r>
+              <a:rPr sz="1300" b="1">
+                <a:solidFill>
+                  <a:srgbClr val="0A0A0A"/>
+                </a:solidFill>
+                <a:latin typeface="Inter"/>
+              </a:rPr>
+              <a:t>of brands shifting budget into creator programs.</a:t>
+            </a:r>
+          </a:p>
           <a:p>
             <a:pPr algn="l">
               <a:spcBef>
@@ -3695,27 +3932,27 @@
               </a:spcAft>
             </a:pPr>
             <a:r>
-              <a:rPr sz="2200" b="1">
-                <a:solidFill>
-                  <a:srgbClr val="7857FF"/>
+              <a:rPr sz="1000" b="0">
+                <a:solidFill>
+                  <a:srgbClr val="9CA3AF"/>
                 </a:solidFill>
                 <a:latin typeface="Inter"/>
               </a:rPr>
-              <a:t>02</a:t>
-            </a:r>
-          </a:p>
-        </p:txBody>
-      </p:sp>
-      <p:sp>
-        <p:nvSpPr>
-          <p:cNvPr id="8" name="TextBox 7"/>
+              <a:t>Influencer Marketing Factory, 2026.</a:t>
+            </a:r>
+          </a:p>
+        </p:txBody>
+      </p:sp>
+      <p:sp>
+        <p:nvSpPr>
+          <p:cNvPr id="11" name="TextBox 10"/>
           <p:cNvSpPr txBox="1"/>
           <p:nvPr/>
         </p:nvSpPr>
         <p:spPr>
           <a:xfrm>
-            <a:off x="1554480" y="4069080"/>
-            <a:ext cx="10058400" cy="914400"/>
+            <a:off x="640080" y="5989320"/>
+            <a:ext cx="10972800" cy="457200"/>
           </a:xfrm>
           <a:prstGeom prst="rect">
             <a:avLst/>
@@ -3727,25 +3964,6 @@
             <a:spAutoFit/>
           </a:bodyPr>
           <a:lstStyle/>
-          <a:p>
-            <a:pPr algn="l">
-              <a:spcBef>
-                <a:spcPts val="0"/>
-              </a:spcBef>
-              <a:spcAft>
-                <a:spcPts val="300"/>
-              </a:spcAft>
-            </a:pPr>
-            <a:r>
-              <a:rPr sz="1800" b="1">
-                <a:solidFill>
-                  <a:srgbClr val="0A0A0A"/>
-                </a:solidFill>
-                <a:latin typeface="Inter"/>
-              </a:rPr>
-              <a:t>Brand-voice RLHF — nobody owns it yet.</a:t>
-            </a:r>
-          </a:p>
           <a:p>
             <a:pPr algn="l">
               <a:spcBef>
@@ -3762,21 +3980,21 @@
                 </a:solidFill>
                 <a:latin typeface="Inter"/>
               </a:rPr>
-              <a:t>Anthropic / OpenAI demand opens ~6 months out.</a:t>
-            </a:r>
-          </a:p>
-        </p:txBody>
-      </p:sp>
-      <p:sp>
-        <p:nvSpPr>
-          <p:cNvPr id="9" name="TextBox 8"/>
+              <a:t>Three external signals. All pointing the same way.</a:t>
+            </a:r>
+          </a:p>
+        </p:txBody>
+      </p:sp>
+      <p:sp>
+        <p:nvSpPr>
+          <p:cNvPr id="12" name="TextBox 11"/>
           <p:cNvSpPr txBox="1"/>
           <p:nvPr/>
         </p:nvSpPr>
         <p:spPr>
           <a:xfrm>
-            <a:off x="640080" y="5029200"/>
-            <a:ext cx="731520" cy="914400"/>
+            <a:off x="640080" y="6446520"/>
+            <a:ext cx="10972800" cy="274320"/>
           </a:xfrm>
           <a:prstGeom prst="rect">
             <a:avLst/>
@@ -3798,116 +4016,13 @@
               </a:spcAft>
             </a:pPr>
             <a:r>
-              <a:rPr sz="2200" b="1">
-                <a:solidFill>
-                  <a:srgbClr val="7857FF"/>
+              <a:rPr sz="900" b="0">
+                <a:solidFill>
+                  <a:srgbClr val="9CA3AF"/>
                 </a:solidFill>
                 <a:latin typeface="Inter"/>
               </a:rPr>
-              <a:t>03</a:t>
-            </a:r>
-          </a:p>
-        </p:txBody>
-      </p:sp>
-      <p:sp>
-        <p:nvSpPr>
-          <p:cNvPr id="10" name="TextBox 9"/>
-          <p:cNvSpPr txBox="1"/>
-          <p:nvPr/>
-        </p:nvSpPr>
-        <p:spPr>
-          <a:xfrm>
-            <a:off x="1554480" y="5029200"/>
-            <a:ext cx="10058400" cy="914400"/>
-          </a:xfrm>
-          <a:prstGeom prst="rect">
-            <a:avLst/>
-          </a:prstGeom>
-          <a:noFill/>
-        </p:spPr>
-        <p:txBody>
-          <a:bodyPr wrap="square" lIns="0" rIns="0" tIns="0" bIns="0" anchor="t">
-            <a:spAutoFit/>
-          </a:bodyPr>
-          <a:lstStyle/>
-          <a:p>
-            <a:pPr algn="l">
-              <a:spcBef>
-                <a:spcPts val="0"/>
-              </a:spcBef>
-              <a:spcAft>
-                <a:spcPts val="300"/>
-              </a:spcAft>
-            </a:pPr>
-            <a:r>
-              <a:rPr sz="1800" b="1">
-                <a:solidFill>
-                  <a:srgbClr val="0A0A0A"/>
-                </a:solidFill>
-                <a:latin typeface="Inter"/>
-              </a:rPr>
-              <a:t>Mercor's own UGC funnel leaks to Meta ads.</a:t>
-            </a:r>
-          </a:p>
-          <a:p>
-            <a:pPr algn="l">
-              <a:spcBef>
-                <a:spcPts val="0"/>
-              </a:spcBef>
-              <a:spcAft>
-                <a:spcPts val="400"/>
-              </a:spcAft>
-            </a:pPr>
-            <a:r>
-              <a:rPr sz="1200" b="0">
-                <a:solidFill>
-                  <a:srgbClr val="6B7280"/>
-                </a:solidFill>
-                <a:latin typeface="Inter"/>
-              </a:rPr>
-              <a:t>$1M+/yr in CAC that creators could absorb.</a:t>
-            </a:r>
-          </a:p>
-        </p:txBody>
-      </p:sp>
-      <p:sp>
-        <p:nvSpPr>
-          <p:cNvPr id="11" name="TextBox 10"/>
-          <p:cNvSpPr txBox="1"/>
-          <p:nvPr/>
-        </p:nvSpPr>
-        <p:spPr>
-          <a:xfrm>
-            <a:off x="640080" y="6446520"/>
-            <a:ext cx="10972800" cy="274320"/>
-          </a:xfrm>
-          <a:prstGeom prst="rect">
-            <a:avLst/>
-          </a:prstGeom>
-          <a:noFill/>
-        </p:spPr>
-        <p:txBody>
-          <a:bodyPr wrap="square" lIns="0" rIns="0" tIns="0" bIns="0" anchor="t">
-            <a:spAutoFit/>
-          </a:bodyPr>
-          <a:lstStyle/>
-          <a:p>
-            <a:pPr algn="l">
-              <a:spcBef>
-                <a:spcPts val="0"/>
-              </a:spcBef>
-              <a:spcAft>
-                <a:spcPts val="400"/>
-              </a:spcAft>
-            </a:pPr>
-            <a:r>
-              <a:rPr sz="900" b="0">
-                <a:solidFill>
-                  <a:srgbClr val="9CA3AF"/>
-                </a:solidFill>
-                <a:latin typeface="Inter"/>
-              </a:rPr>
-              <a:t>creator experts   ·   internal proposal for aaron langerman   ·   2 / 5</a:t>
+              <a:t>creator experts   ·   internal proposal for aaron langerman   ·   2 / 6</a:t>
             </a:r>
           </a:p>
         </p:txBody>
@@ -3999,7 +4114,7 @@
                 </a:solidFill>
                 <a:latin typeface="Inter"/>
               </a:rPr>
-              <a:t>PROOF + MOAT</a:t>
+              <a:t>WHY THIS. WHY NOW.</a:t>
             </a:r>
           </a:p>
         </p:txBody>
@@ -4013,7 +4128,7 @@
         <p:spPr>
           <a:xfrm>
             <a:off x="640080" y="1417320"/>
-            <a:ext cx="10972800" cy="1097280"/>
+            <a:ext cx="10972800" cy="914400"/>
           </a:xfrm>
           <a:prstGeom prst="rect">
             <a:avLst/>
@@ -4038,74 +4153,27 @@
               </a:spcAft>
             </a:pPr>
             <a:r>
-              <a:rPr sz="3200" b="1">
+              <a:rPr sz="3400" b="1">
                 <a:solidFill>
                   <a:srgbClr val="0A0A0A"/>
                 </a:solidFill>
                 <a:latin typeface="Inter"/>
               </a:rPr>
-              <a:t>The model is proven. Mercor has the moat.</a:t>
-            </a:r>
-          </a:p>
-        </p:txBody>
-      </p:sp>
-      <p:sp>
-        <p:nvSpPr>
-          <p:cNvPr id="5" name="Rounded Rectangle 4"/>
-          <p:cNvSpPr/>
-          <p:nvPr/>
-        </p:nvSpPr>
-        <p:spPr>
-          <a:xfrm>
-            <a:off x="640080" y="2697480"/>
-            <a:ext cx="5394960" cy="2286000"/>
-          </a:xfrm>
-          <a:prstGeom prst="roundRect">
-            <a:avLst>
-              <a:gd name="adj" fmla="val 5000"/>
-            </a:avLst>
-          </a:prstGeom>
-          <a:solidFill>
-            <a:srgbClr val="FAFAFA"/>
-          </a:solidFill>
-          <a:ln w="9525">
-            <a:solidFill>
-              <a:srgbClr val="E5E7EB"/>
-            </a:solidFill>
-          </a:ln>
-        </p:spPr>
-        <p:style>
-          <a:lnRef idx="1">
-            <a:schemeClr val="accent1"/>
-          </a:lnRef>
-          <a:fillRef idx="3">
-            <a:schemeClr val="accent1"/>
-          </a:fillRef>
-          <a:effectRef idx="2">
-            <a:schemeClr val="accent1"/>
-          </a:effectRef>
-          <a:fontRef idx="minor">
-            <a:schemeClr val="lt1"/>
-          </a:fontRef>
-        </p:style>
-        <p:txBody>
-          <a:bodyPr rtlCol="0" anchor="ctr"/>
-          <a:lstStyle/>
-          <a:p>
-            <a:pPr algn="ctr"/>
-          </a:p>
-        </p:txBody>
-      </p:sp>
-      <p:sp>
-        <p:nvSpPr>
-          <p:cNvPr id="6" name="TextBox 5"/>
+              <a:t>Three things changed in the last six months.</a:t>
+            </a:r>
+          </a:p>
+        </p:txBody>
+      </p:sp>
+      <p:sp>
+        <p:nvSpPr>
+          <p:cNvPr id="5" name="TextBox 4"/>
           <p:cNvSpPr txBox="1"/>
           <p:nvPr/>
         </p:nvSpPr>
         <p:spPr>
           <a:xfrm>
-            <a:off x="868680" y="2971800"/>
-            <a:ext cx="4937760" cy="1920240"/>
+            <a:off x="640080" y="3108960"/>
+            <a:ext cx="731520" cy="914400"/>
           </a:xfrm>
           <a:prstGeom prst="rect">
             <a:avLst/>
@@ -4117,25 +4185,6 @@
             <a:spAutoFit/>
           </a:bodyPr>
           <a:lstStyle/>
-          <a:p>
-            <a:pPr algn="l">
-              <a:spcBef>
-                <a:spcPts val="0"/>
-              </a:spcBef>
-              <a:spcAft>
-                <a:spcPts val="1000"/>
-              </a:spcAft>
-            </a:pPr>
-            <a:r>
-              <a:rPr sz="1000" b="1" spc="120">
-                <a:solidFill>
-                  <a:srgbClr val="6B7280"/>
-                </a:solidFill>
-                <a:latin typeface="Inter"/>
-              </a:rPr>
-              <a:t>CLUELY</a:t>
-            </a:r>
-          </a:p>
           <a:p>
             <a:pPr algn="l">
               <a:spcBef>
@@ -4146,13 +4195,55 @@
               </a:spcAft>
             </a:pPr>
             <a:r>
-              <a:rPr sz="5600" b="1">
-                <a:solidFill>
-                  <a:srgbClr val="0A0A0A"/>
+              <a:rPr sz="2200" b="1">
+                <a:solidFill>
+                  <a:srgbClr val="7857FF"/>
                 </a:solidFill>
                 <a:latin typeface="Inter"/>
               </a:rPr>
-              <a:t>$500K</a:t>
+              <a:t>01</a:t>
+            </a:r>
+          </a:p>
+        </p:txBody>
+      </p:sp>
+      <p:sp>
+        <p:nvSpPr>
+          <p:cNvPr id="6" name="TextBox 5"/>
+          <p:cNvSpPr txBox="1"/>
+          <p:nvPr/>
+        </p:nvSpPr>
+        <p:spPr>
+          <a:xfrm>
+            <a:off x="1554480" y="3108960"/>
+            <a:ext cx="10058400" cy="914400"/>
+          </a:xfrm>
+          <a:prstGeom prst="rect">
+            <a:avLst/>
+          </a:prstGeom>
+          <a:noFill/>
+        </p:spPr>
+        <p:txBody>
+          <a:bodyPr wrap="square" lIns="0" rIns="0" tIns="0" bIns="0" anchor="t">
+            <a:spAutoFit/>
+          </a:bodyPr>
+          <a:lstStyle/>
+          <a:p>
+            <a:pPr algn="l">
+              <a:spcBef>
+                <a:spcPts val="0"/>
+              </a:spcBef>
+              <a:spcAft>
+                <a:spcPts val="300"/>
+              </a:spcAft>
+            </a:pPr>
+            <a:r>
+              <a:rPr sz="1800" b="1">
+                <a:solidFill>
+                  <a:srgbClr val="0A0A0A"/>
+                </a:solidFill>
+                <a:latin typeface="Inter"/>
+              </a:rPr>
+              <a:t>Handshake AI is going for the college funnel.</a:t>
             </a:r>
           </a:p>
           <a:p>
@@ -4165,74 +4256,27 @@
               </a:spcAft>
             </a:pPr>
             <a:r>
-              <a:rPr sz="1300" b="0">
+              <a:rPr sz="1200" b="0">
                 <a:solidFill>
                   <a:srgbClr val="6B7280"/>
                 </a:solidFill>
                 <a:latin typeface="Inter"/>
               </a:rPr>
-              <a:t>creator bounty — all-time.</a:t>
-            </a:r>
-          </a:p>
-        </p:txBody>
-      </p:sp>
-      <p:sp>
-        <p:nvSpPr>
-          <p:cNvPr id="7" name="Rounded Rectangle 6"/>
-          <p:cNvSpPr/>
-          <p:nvPr/>
-        </p:nvSpPr>
-        <p:spPr>
-          <a:xfrm>
-            <a:off x="6263640" y="2697480"/>
-            <a:ext cx="5394960" cy="2286000"/>
-          </a:xfrm>
-          <a:prstGeom prst="roundRect">
-            <a:avLst>
-              <a:gd name="adj" fmla="val 5000"/>
-            </a:avLst>
-          </a:prstGeom>
-          <a:solidFill>
-            <a:srgbClr val="EDE9FE"/>
-          </a:solidFill>
-          <a:ln w="12700">
-            <a:solidFill>
-              <a:srgbClr val="7857FF"/>
-            </a:solidFill>
-          </a:ln>
-        </p:spPr>
-        <p:style>
-          <a:lnRef idx="1">
-            <a:schemeClr val="accent1"/>
-          </a:lnRef>
-          <a:fillRef idx="3">
-            <a:schemeClr val="accent1"/>
-          </a:fillRef>
-          <a:effectRef idx="2">
-            <a:schemeClr val="accent1"/>
-          </a:effectRef>
-          <a:fontRef idx="minor">
-            <a:schemeClr val="lt1"/>
-          </a:fontRef>
-        </p:style>
-        <p:txBody>
-          <a:bodyPr rtlCol="0" anchor="ctr"/>
-          <a:lstStyle/>
-          <a:p>
-            <a:pPr algn="ctr"/>
-          </a:p>
-        </p:txBody>
-      </p:sp>
-      <p:sp>
-        <p:nvSpPr>
-          <p:cNvPr id="8" name="TextBox 7"/>
+              <a:t>18M students priced as cheap RLHF labor.</a:t>
+            </a:r>
+          </a:p>
+        </p:txBody>
+      </p:sp>
+      <p:sp>
+        <p:nvSpPr>
+          <p:cNvPr id="7" name="TextBox 6"/>
           <p:cNvSpPr txBox="1"/>
           <p:nvPr/>
         </p:nvSpPr>
         <p:spPr>
           <a:xfrm>
-            <a:off x="6492240" y="2971800"/>
-            <a:ext cx="4937760" cy="1920240"/>
+            <a:off x="640080" y="4069080"/>
+            <a:ext cx="731520" cy="914400"/>
           </a:xfrm>
           <a:prstGeom prst="rect">
             <a:avLst/>
@@ -4244,25 +4288,6 @@
             <a:spAutoFit/>
           </a:bodyPr>
           <a:lstStyle/>
-          <a:p>
-            <a:pPr algn="l">
-              <a:spcBef>
-                <a:spcPts val="0"/>
-              </a:spcBef>
-              <a:spcAft>
-                <a:spcPts val="1000"/>
-              </a:spcAft>
-            </a:pPr>
-            <a:r>
-              <a:rPr sz="1000" b="1" spc="120">
-                <a:solidFill>
-                  <a:srgbClr val="7857FF"/>
-                </a:solidFill>
-                <a:latin typeface="Inter"/>
-              </a:rPr>
-              <a:t>MERCOR</a:t>
-            </a:r>
-          </a:p>
           <a:p>
             <a:pPr algn="l">
               <a:spcBef>
@@ -4273,13 +4298,55 @@
               </a:spcAft>
             </a:pPr>
             <a:r>
-              <a:rPr sz="5600" b="1">
+              <a:rPr sz="2200" b="1">
                 <a:solidFill>
                   <a:srgbClr val="7857FF"/>
                 </a:solidFill>
                 <a:latin typeface="Inter"/>
               </a:rPr>
-              <a:t>$1M / day</a:t>
+              <a:t>02</a:t>
+            </a:r>
+          </a:p>
+        </p:txBody>
+      </p:sp>
+      <p:sp>
+        <p:nvSpPr>
+          <p:cNvPr id="8" name="TextBox 7"/>
+          <p:cNvSpPr txBox="1"/>
+          <p:nvPr/>
+        </p:nvSpPr>
+        <p:spPr>
+          <a:xfrm>
+            <a:off x="1554480" y="4069080"/>
+            <a:ext cx="10058400" cy="914400"/>
+          </a:xfrm>
+          <a:prstGeom prst="rect">
+            <a:avLst/>
+          </a:prstGeom>
+          <a:noFill/>
+        </p:spPr>
+        <p:txBody>
+          <a:bodyPr wrap="square" lIns="0" rIns="0" tIns="0" bIns="0" anchor="t">
+            <a:spAutoFit/>
+          </a:bodyPr>
+          <a:lstStyle/>
+          <a:p>
+            <a:pPr algn="l">
+              <a:spcBef>
+                <a:spcPts val="0"/>
+              </a:spcBef>
+              <a:spcAft>
+                <a:spcPts val="300"/>
+              </a:spcAft>
+            </a:pPr>
+            <a:r>
+              <a:rPr sz="1800" b="1">
+                <a:solidFill>
+                  <a:srgbClr val="0A0A0A"/>
+                </a:solidFill>
+                <a:latin typeface="Inter"/>
+              </a:rPr>
+              <a:t>Brand-voice RLHF doesn't have a vendor.</a:t>
             </a:r>
           </a:p>
           <a:p>
@@ -4292,13 +4359,13 @@
               </a:spcAft>
             </a:pPr>
             <a:r>
-              <a:rPr sz="1300" b="0">
-                <a:solidFill>
-                  <a:srgbClr val="0A0A0A"/>
+              <a:rPr sz="1200" b="0">
+                <a:solidFill>
+                  <a:srgbClr val="6B7280"/>
                 </a:solidFill>
                 <a:latin typeface="Inter"/>
               </a:rPr>
-              <a:t>contractor wages — every day.</a:t>
+              <a:t>Anthropic and OpenAI will need it inside ~6 months.</a:t>
             </a:r>
           </a:p>
         </p:txBody>
@@ -4311,8 +4378,8 @@
         </p:nvSpPr>
         <p:spPr>
           <a:xfrm>
-            <a:off x="640080" y="5486400"/>
-            <a:ext cx="10972800" cy="640080"/>
+            <a:off x="640080" y="5029200"/>
+            <a:ext cx="731520" cy="914400"/>
           </a:xfrm>
           <a:prstGeom prst="rect">
             <a:avLst/>
@@ -4334,13 +4401,13 @@
               </a:spcAft>
             </a:pPr>
             <a:r>
-              <a:rPr sz="1200" b="0">
-                <a:solidFill>
-                  <a:srgbClr val="6B7280"/>
+              <a:rPr sz="2200" b="1">
+                <a:solidFill>
+                  <a:srgbClr val="7857FF"/>
                 </a:solidFill>
                 <a:latin typeface="Inter"/>
               </a:rPr>
-              <a:t>Proven on UCSB + fraternity networks for real revenue. Mercor scales it.</a:t>
+              <a:t>03</a:t>
             </a:r>
           </a:p>
         </p:txBody>
@@ -4353,8 +4420,8 @@
         </p:nvSpPr>
         <p:spPr>
           <a:xfrm>
-            <a:off x="640080" y="6446520"/>
-            <a:ext cx="10972800" cy="274320"/>
+            <a:off x="1554480" y="5029200"/>
+            <a:ext cx="10058400" cy="914400"/>
           </a:xfrm>
           <a:prstGeom prst="rect">
             <a:avLst/>
@@ -4366,6 +4433,25 @@
             <a:spAutoFit/>
           </a:bodyPr>
           <a:lstStyle/>
+          <a:p>
+            <a:pPr algn="l">
+              <a:spcBef>
+                <a:spcPts val="0"/>
+              </a:spcBef>
+              <a:spcAft>
+                <a:spcPts val="300"/>
+              </a:spcAft>
+            </a:pPr>
+            <a:r>
+              <a:rPr sz="1800" b="1">
+                <a:solidFill>
+                  <a:srgbClr val="0A0A0A"/>
+                </a:solidFill>
+                <a:latin typeface="Inter"/>
+              </a:rPr>
+              <a:t>Mercor's own UGC spend is going to Meta.</a:t>
+            </a:r>
+          </a:p>
           <a:p>
             <a:pPr algn="l">
               <a:spcBef>
@@ -4376,13 +4462,55 @@
               </a:spcAft>
             </a:pPr>
             <a:r>
-              <a:rPr sz="900" b="0">
-                <a:solidFill>
-                  <a:srgbClr val="9CA3AF"/>
+              <a:rPr sz="1200" b="0">
+                <a:solidFill>
+                  <a:srgbClr val="6B7280"/>
                 </a:solidFill>
                 <a:latin typeface="Inter"/>
               </a:rPr>
-              <a:t>creator experts   ·   internal proposal for aaron langerman   ·   3 / 5</a:t>
+              <a:t>Creators in the marketplace could replace that line.</a:t>
+            </a:r>
+          </a:p>
+        </p:txBody>
+      </p:sp>
+      <p:sp>
+        <p:nvSpPr>
+          <p:cNvPr id="11" name="TextBox 10"/>
+          <p:cNvSpPr txBox="1"/>
+          <p:nvPr/>
+        </p:nvSpPr>
+        <p:spPr>
+          <a:xfrm>
+            <a:off x="640080" y="6446520"/>
+            <a:ext cx="10972800" cy="274320"/>
+          </a:xfrm>
+          <a:prstGeom prst="rect">
+            <a:avLst/>
+          </a:prstGeom>
+          <a:noFill/>
+        </p:spPr>
+        <p:txBody>
+          <a:bodyPr wrap="square" lIns="0" rIns="0" tIns="0" bIns="0" anchor="t">
+            <a:spAutoFit/>
+          </a:bodyPr>
+          <a:lstStyle/>
+          <a:p>
+            <a:pPr algn="l">
+              <a:spcBef>
+                <a:spcPts val="0"/>
+              </a:spcBef>
+              <a:spcAft>
+                <a:spcPts val="400"/>
+              </a:spcAft>
+            </a:pPr>
+            <a:r>
+              <a:rPr sz="900" b="0">
+                <a:solidFill>
+                  <a:srgbClr val="9CA3AF"/>
+                </a:solidFill>
+                <a:latin typeface="Inter"/>
+              </a:rPr>
+              <a:t>creator experts   ·   internal proposal for aaron langerman   ·   3 / 6</a:t>
             </a:r>
           </a:p>
         </p:txBody>
@@ -4474,7 +4602,7 @@
                 </a:solidFill>
                 <a:latin typeface="Inter"/>
               </a:rPr>
-              <a:t>THE PLAN + THE ASKS</a:t>
+              <a:t>PROOF + MOAT</a:t>
             </a:r>
           </a:p>
         </p:txBody>
@@ -4488,7 +4616,7 @@
         <p:spPr>
           <a:xfrm>
             <a:off x="640080" y="1417320"/>
-            <a:ext cx="10972800" cy="914400"/>
+            <a:ext cx="10972800" cy="1097280"/>
           </a:xfrm>
           <a:prstGeom prst="rect">
             <a:avLst/>
@@ -4513,13 +4641,13 @@
               </a:spcAft>
             </a:pPr>
             <a:r>
-              <a:rPr sz="3000" b="1">
+              <a:rPr sz="3200" b="1">
                 <a:solidFill>
                   <a:srgbClr val="0A0A0A"/>
                 </a:solidFill>
                 <a:latin typeface="Inter"/>
               </a:rPr>
-              <a:t>Half a day to ship. 90 days to learn.</a:t>
+              <a:t>Cluely already paid creators to do this.</a:t>
             </a:r>
           </a:p>
         </p:txBody>
@@ -4532,18 +4660,18 @@
         </p:nvSpPr>
         <p:spPr>
           <a:xfrm>
-            <a:off x="640080" y="2606040"/>
-            <a:ext cx="2697480" cy="822960"/>
+            <a:off x="640080" y="2697480"/>
+            <a:ext cx="5394960" cy="2286000"/>
           </a:xfrm>
           <a:prstGeom prst="roundRect">
             <a:avLst>
-              <a:gd name="adj" fmla="val 8000"/>
+              <a:gd name="adj" fmla="val 5000"/>
             </a:avLst>
           </a:prstGeom>
           <a:solidFill>
             <a:srgbClr val="FAFAFA"/>
           </a:solidFill>
-          <a:ln w="7620">
+          <a:ln w="9525">
             <a:solidFill>
               <a:srgbClr val="E5E7EB"/>
             </a:solidFill>
@@ -4564,53 +4692,115 @@
           </a:fontRef>
         </p:style>
         <p:txBody>
-          <a:bodyPr rtlCol="0" anchor="ctr" lIns="0" rIns="0"/>
+          <a:bodyPr rtlCol="0" anchor="ctr"/>
           <a:lstStyle/>
           <a:p>
             <a:pPr algn="ctr"/>
-            <a:r>
-              <a:rPr sz="1100" b="1" spc="120">
-                <a:solidFill>
-                  <a:srgbClr val="7857FF"/>
+          </a:p>
+        </p:txBody>
+      </p:sp>
+      <p:sp>
+        <p:nvSpPr>
+          <p:cNvPr id="6" name="TextBox 5"/>
+          <p:cNvSpPr txBox="1"/>
+          <p:nvPr/>
+        </p:nvSpPr>
+        <p:spPr>
+          <a:xfrm>
+            <a:off x="868680" y="2971800"/>
+            <a:ext cx="4937760" cy="1920240"/>
+          </a:xfrm>
+          <a:prstGeom prst="rect">
+            <a:avLst/>
+          </a:prstGeom>
+          <a:noFill/>
+        </p:spPr>
+        <p:txBody>
+          <a:bodyPr wrap="square" lIns="0" rIns="0" tIns="0" bIns="0" anchor="t">
+            <a:spAutoFit/>
+          </a:bodyPr>
+          <a:lstStyle/>
+          <a:p>
+            <a:pPr algn="l">
+              <a:spcBef>
+                <a:spcPts val="0"/>
+              </a:spcBef>
+              <a:spcAft>
+                <a:spcPts val="1000"/>
+              </a:spcAft>
+            </a:pPr>
+            <a:r>
+              <a:rPr sz="1000" b="1" spc="120">
+                <a:solidFill>
+                  <a:srgbClr val="6B7280"/>
                 </a:solidFill>
                 <a:latin typeface="Inter"/>
               </a:rPr>
-              <a:t>01  </a:t>
-            </a:r>
-            <a:r>
-              <a:rPr sz="1600" b="1">
+              <a:t>CLUELY</a:t>
+            </a:r>
+          </a:p>
+          <a:p>
+            <a:pPr algn="l">
+              <a:spcBef>
+                <a:spcPts val="0"/>
+              </a:spcBef>
+              <a:spcAft>
+                <a:spcPts val="400"/>
+              </a:spcAft>
+            </a:pPr>
+            <a:r>
+              <a:rPr sz="5600" b="1">
                 <a:solidFill>
                   <a:srgbClr val="0A0A0A"/>
                 </a:solidFill>
                 <a:latin typeface="Inter"/>
               </a:rPr>
-              <a:t>Greenlight</a:t>
-            </a:r>
-          </a:p>
-        </p:txBody>
-      </p:sp>
-      <p:sp>
-        <p:nvSpPr>
-          <p:cNvPr id="6" name="Rounded Rectangle 5"/>
+              <a:t>$500K</a:t>
+            </a:r>
+          </a:p>
+          <a:p>
+            <a:pPr algn="l">
+              <a:spcBef>
+                <a:spcPts val="0"/>
+              </a:spcBef>
+              <a:spcAft>
+                <a:spcPts val="400"/>
+              </a:spcAft>
+            </a:pPr>
+            <a:r>
+              <a:rPr sz="1300" b="0">
+                <a:solidFill>
+                  <a:srgbClr val="6B7280"/>
+                </a:solidFill>
+                <a:latin typeface="Inter"/>
+              </a:rPr>
+              <a:t>creator bounty — all-time.</a:t>
+            </a:r>
+          </a:p>
+        </p:txBody>
+      </p:sp>
+      <p:sp>
+        <p:nvSpPr>
+          <p:cNvPr id="7" name="Rounded Rectangle 6"/>
           <p:cNvSpPr/>
           <p:nvPr/>
         </p:nvSpPr>
         <p:spPr>
           <a:xfrm>
-            <a:off x="3474720" y="2606040"/>
-            <a:ext cx="2697480" cy="822960"/>
+            <a:off x="6263640" y="2697480"/>
+            <a:ext cx="5394960" cy="2286000"/>
           </a:xfrm>
           <a:prstGeom prst="roundRect">
             <a:avLst>
-              <a:gd name="adj" fmla="val 8000"/>
+              <a:gd name="adj" fmla="val 5000"/>
             </a:avLst>
           </a:prstGeom>
           <a:solidFill>
-            <a:srgbClr val="FAFAFA"/>
+            <a:srgbClr val="EDE9FE"/>
           </a:solidFill>
-          <a:ln w="7620">
+          <a:ln w="12700">
             <a:solidFill>
-              <a:srgbClr val="E5E7EB"/>
+              <a:srgbClr val="7857FF"/>
             </a:solidFill>
           </a:ln>
         </p:spPr>
@@ -4629,171 +4819,23 @@
           </a:fontRef>
         </p:style>
         <p:txBody>
-          <a:bodyPr rtlCol="0" anchor="ctr" lIns="0" rIns="0"/>
+          <a:bodyPr rtlCol="0" anchor="ctr"/>
           <a:lstStyle/>
           <a:p>
             <a:pPr algn="ctr"/>
-            <a:r>
-              <a:rPr sz="1100" b="1" spc="120">
-                <a:solidFill>
-                  <a:srgbClr val="7857FF"/>
-                </a:solidFill>
-                <a:latin typeface="Inter"/>
-              </a:rPr>
-              <a:t>02  </a:t>
-            </a:r>
-            <a:r>
-              <a:rPr sz="1600" b="1">
-                <a:solidFill>
-                  <a:srgbClr val="0A0A0A"/>
-                </a:solidFill>
-                <a:latin typeface="Inter"/>
-              </a:rPr>
-              <a:t>Ship</a:t>
-            </a:r>
-          </a:p>
-        </p:txBody>
-      </p:sp>
-      <p:sp>
-        <p:nvSpPr>
-          <p:cNvPr id="7" name="Rounded Rectangle 6"/>
-          <p:cNvSpPr/>
-          <p:nvPr/>
-        </p:nvSpPr>
-        <p:spPr>
-          <a:xfrm>
-            <a:off x="6309360" y="2606040"/>
-            <a:ext cx="2697480" cy="822960"/>
-          </a:xfrm>
-          <a:prstGeom prst="roundRect">
-            <a:avLst>
-              <a:gd name="adj" fmla="val 8000"/>
-            </a:avLst>
-          </a:prstGeom>
-          <a:solidFill>
-            <a:srgbClr val="FAFAFA"/>
-          </a:solidFill>
-          <a:ln w="7620">
-            <a:solidFill>
-              <a:srgbClr val="E5E7EB"/>
-            </a:solidFill>
-          </a:ln>
-        </p:spPr>
-        <p:style>
-          <a:lnRef idx="1">
-            <a:schemeClr val="accent1"/>
-          </a:lnRef>
-          <a:fillRef idx="3">
-            <a:schemeClr val="accent1"/>
-          </a:fillRef>
-          <a:effectRef idx="2">
-            <a:schemeClr val="accent1"/>
-          </a:effectRef>
-          <a:fontRef idx="minor">
-            <a:schemeClr val="lt1"/>
-          </a:fontRef>
-        </p:style>
-        <p:txBody>
-          <a:bodyPr rtlCol="0" anchor="ctr" lIns="0" rIns="0"/>
-          <a:lstStyle/>
-          <a:p>
-            <a:pPr algn="ctr"/>
-            <a:r>
-              <a:rPr sz="1100" b="1" spc="120">
-                <a:solidFill>
-                  <a:srgbClr val="7857FF"/>
-                </a:solidFill>
-                <a:latin typeface="Inter"/>
-              </a:rPr>
-              <a:t>03  </a:t>
-            </a:r>
-            <a:r>
-              <a:rPr sz="1600" b="1">
-                <a:solidFill>
-                  <a:srgbClr val="0A0A0A"/>
-                </a:solidFill>
-                <a:latin typeface="Inter"/>
-              </a:rPr>
-              <a:t>Pilot</a:t>
-            </a:r>
-          </a:p>
-        </p:txBody>
-      </p:sp>
-      <p:sp>
-        <p:nvSpPr>
-          <p:cNvPr id="8" name="Rounded Rectangle 7"/>
-          <p:cNvSpPr/>
-          <p:nvPr/>
-        </p:nvSpPr>
-        <p:spPr>
-          <a:xfrm>
-            <a:off x="9144000" y="2606040"/>
-            <a:ext cx="2697480" cy="822960"/>
-          </a:xfrm>
-          <a:prstGeom prst="roundRect">
-            <a:avLst>
-              <a:gd name="adj" fmla="val 8000"/>
-            </a:avLst>
-          </a:prstGeom>
-          <a:solidFill>
-            <a:srgbClr val="FAFAFA"/>
-          </a:solidFill>
-          <a:ln w="7620">
-            <a:solidFill>
-              <a:srgbClr val="E5E7EB"/>
-            </a:solidFill>
-          </a:ln>
-        </p:spPr>
-        <p:style>
-          <a:lnRef idx="1">
-            <a:schemeClr val="accent1"/>
-          </a:lnRef>
-          <a:fillRef idx="3">
-            <a:schemeClr val="accent1"/>
-          </a:fillRef>
-          <a:effectRef idx="2">
-            <a:schemeClr val="accent1"/>
-          </a:effectRef>
-          <a:fontRef idx="minor">
-            <a:schemeClr val="lt1"/>
-          </a:fontRef>
-        </p:style>
-        <p:txBody>
-          <a:bodyPr rtlCol="0" anchor="ctr" lIns="0" rIns="0"/>
-          <a:lstStyle/>
-          <a:p>
-            <a:pPr algn="ctr"/>
-            <a:r>
-              <a:rPr sz="1100" b="1" spc="120">
-                <a:solidFill>
-                  <a:srgbClr val="7857FF"/>
-                </a:solidFill>
-                <a:latin typeface="Inter"/>
-              </a:rPr>
-              <a:t>04  </a:t>
-            </a:r>
-            <a:r>
-              <a:rPr sz="1600" b="1">
-                <a:solidFill>
-                  <a:srgbClr val="0A0A0A"/>
-                </a:solidFill>
-                <a:latin typeface="Inter"/>
-              </a:rPr>
-              <a:t>Decision</a:t>
-            </a:r>
-          </a:p>
-        </p:txBody>
-      </p:sp>
-      <p:sp>
-        <p:nvSpPr>
-          <p:cNvPr id="9" name="TextBox 8"/>
+          </a:p>
+        </p:txBody>
+      </p:sp>
+      <p:sp>
+        <p:nvSpPr>
+          <p:cNvPr id="8" name="TextBox 7"/>
           <p:cNvSpPr txBox="1"/>
           <p:nvPr/>
         </p:nvSpPr>
         <p:spPr>
           <a:xfrm>
-            <a:off x="640080" y="3794760"/>
-            <a:ext cx="7315200" cy="274320"/>
+            <a:off x="6492240" y="2971800"/>
+            <a:ext cx="4937760" cy="1920240"/>
           </a:xfrm>
           <a:prstGeom prst="rect">
             <a:avLst/>
@@ -4805,6 +4847,25 @@
             <a:spAutoFit/>
           </a:bodyPr>
           <a:lstStyle/>
+          <a:p>
+            <a:pPr algn="l">
+              <a:spcBef>
+                <a:spcPts val="0"/>
+              </a:spcBef>
+              <a:spcAft>
+                <a:spcPts val="1000"/>
+              </a:spcAft>
+            </a:pPr>
+            <a:r>
+              <a:rPr sz="1000" b="1" spc="120">
+                <a:solidFill>
+                  <a:srgbClr val="7857FF"/>
+                </a:solidFill>
+                <a:latin typeface="Inter"/>
+              </a:rPr>
+              <a:t>MERCOR</a:t>
+            </a:r>
+          </a:p>
           <a:p>
             <a:pPr algn="l">
               <a:spcBef>
@@ -4815,143 +4876,13 @@
               </a:spcAft>
             </a:pPr>
             <a:r>
-              <a:rPr sz="1000" b="1" spc="120">
+              <a:rPr sz="5600" b="1">
                 <a:solidFill>
                   <a:srgbClr val="7857FF"/>
                 </a:solidFill>
                 <a:latin typeface="Inter"/>
               </a:rPr>
-              <a:t>WHO AARON SHOULD CONNECT US WITH</a:t>
-            </a:r>
-          </a:p>
-        </p:txBody>
-      </p:sp>
-      <p:sp>
-        <p:nvSpPr>
-          <p:cNvPr id="10" name="Oval 9"/>
-          <p:cNvSpPr/>
-          <p:nvPr/>
-        </p:nvSpPr>
-        <p:spPr>
-          <a:xfrm>
-            <a:off x="640080" y="4069080"/>
-            <a:ext cx="548640" cy="548640"/>
-          </a:xfrm>
-          <a:prstGeom prst="ellipse">
-            <a:avLst/>
-          </a:prstGeom>
-          <a:solidFill>
-            <a:srgbClr val="E5E7EB"/>
-          </a:solidFill>
-          <a:ln w="6350">
-            <a:solidFill>
-              <a:srgbClr val="E5E7EB"/>
-            </a:solidFill>
-          </a:ln>
-        </p:spPr>
-        <p:style>
-          <a:lnRef idx="1">
-            <a:schemeClr val="accent1"/>
-          </a:lnRef>
-          <a:fillRef idx="3">
-            <a:schemeClr val="accent1"/>
-          </a:fillRef>
-          <a:effectRef idx="2">
-            <a:schemeClr val="accent1"/>
-          </a:effectRef>
-          <a:fontRef idx="minor">
-            <a:schemeClr val="lt1"/>
-          </a:fontRef>
-        </p:style>
-        <p:txBody>
-          <a:bodyPr rtlCol="0" anchor="ctr"/>
-          <a:lstStyle/>
-          <a:p>
-            <a:pPr algn="ctr"/>
-          </a:p>
-        </p:txBody>
-      </p:sp>
-      <p:pic>
-        <p:nvPicPr>
-          <p:cNvPr id="11" name="Picture 10" descr="luna.jpg"/>
-          <p:cNvPicPr>
-            <a:picLocks noChangeAspect="1"/>
-          </p:cNvPicPr>
-          <p:nvPr/>
-        </p:nvPicPr>
-        <p:blipFill>
-          <a:blip r:embed="rId3"/>
-          <a:stretch>
-            <a:fillRect/>
-          </a:stretch>
-        </p:blipFill>
-        <p:spPr>
-          <a:xfrm>
-            <a:off x="640080" y="4069080"/>
-            <a:ext cx="548640" cy="548640"/>
-          </a:xfrm>
-          <a:prstGeom prst="rect">
-            <a:avLst/>
-          </a:prstGeom>
-        </p:spPr>
-      </p:pic>
-      <p:sp>
-        <p:nvSpPr>
-          <p:cNvPr id="12" name="TextBox 11"/>
-          <p:cNvSpPr txBox="1"/>
-          <p:nvPr/>
-        </p:nvSpPr>
-        <p:spPr>
-          <a:xfrm>
-            <a:off x="1371600" y="4069080"/>
-            <a:ext cx="10515600" cy="685800"/>
-          </a:xfrm>
-          <a:prstGeom prst="rect">
-            <a:avLst/>
-          </a:prstGeom>
-          <a:noFill/>
-        </p:spPr>
-        <p:txBody>
-          <a:bodyPr wrap="square" lIns="0" rIns="0" tIns="0" bIns="0" anchor="t">
-            <a:spAutoFit/>
-          </a:bodyPr>
-          <a:lstStyle/>
-          <a:p>
-            <a:pPr algn="l">
-              <a:spcBef>
-                <a:spcPts val="0"/>
-              </a:spcBef>
-              <a:spcAft>
-                <a:spcPts val="100"/>
-              </a:spcAft>
-            </a:pPr>
-            <a:r>
-              <a:rPr sz="1300" b="1">
-                <a:solidFill>
-                  <a:srgbClr val="0A0A0A"/>
-                </a:solidFill>
-                <a:latin typeface="Inter"/>
-              </a:rPr>
-              <a:t>Luna Aizarani</a:t>
-            </a:r>
-          </a:p>
-          <a:p>
-            <a:pPr algn="l">
-              <a:spcBef>
-                <a:spcPts val="0"/>
-              </a:spcBef>
-              <a:spcAft>
-                <a:spcPts val="100"/>
-              </a:spcAft>
-            </a:pPr>
-            <a:r>
-              <a:rPr sz="1000" b="0">
-                <a:solidFill>
-                  <a:srgbClr val="6B7280"/>
-                </a:solidFill>
-                <a:latin typeface="Inter"/>
-              </a:rPr>
-              <a:t>GM, Growth</a:t>
+              <a:t>$1.5M / day</a:t>
             </a:r>
           </a:p>
           <a:p>
@@ -4964,96 +4895,27 @@
               </a:spcAft>
             </a:pPr>
             <a:r>
-              <a:rPr sz="1000" b="0">
-                <a:solidFill>
-                  <a:srgbClr val="7857FF"/>
+              <a:rPr sz="1300" b="0">
+                <a:solidFill>
+                  <a:srgbClr val="0A0A0A"/>
                 </a:solidFill>
                 <a:latin typeface="Inter"/>
               </a:rPr>
-              <a:t>Owns Mercor's expert pipeline.</a:t>
-            </a:r>
-          </a:p>
-        </p:txBody>
-      </p:sp>
-      <p:sp>
-        <p:nvSpPr>
-          <p:cNvPr id="13" name="Oval 12"/>
-          <p:cNvSpPr/>
-          <p:nvPr/>
-        </p:nvSpPr>
-        <p:spPr>
-          <a:xfrm>
-            <a:off x="640080" y="4782312"/>
-            <a:ext cx="548640" cy="548640"/>
-          </a:xfrm>
-          <a:prstGeom prst="ellipse">
-            <a:avLst/>
-          </a:prstGeom>
-          <a:solidFill>
-            <a:srgbClr val="E5E7EB"/>
-          </a:solidFill>
-          <a:ln w="6350">
-            <a:solidFill>
-              <a:srgbClr val="E5E7EB"/>
-            </a:solidFill>
-          </a:ln>
-        </p:spPr>
-        <p:style>
-          <a:lnRef idx="1">
-            <a:schemeClr val="accent1"/>
-          </a:lnRef>
-          <a:fillRef idx="3">
-            <a:schemeClr val="accent1"/>
-          </a:fillRef>
-          <a:effectRef idx="2">
-            <a:schemeClr val="accent1"/>
-          </a:effectRef>
-          <a:fontRef idx="minor">
-            <a:schemeClr val="lt1"/>
-          </a:fontRef>
-        </p:style>
-        <p:txBody>
-          <a:bodyPr rtlCol="0" anchor="ctr"/>
-          <a:lstStyle/>
-          <a:p>
-            <a:pPr algn="ctr"/>
-          </a:p>
-        </p:txBody>
-      </p:sp>
-      <p:pic>
-        <p:nvPicPr>
-          <p:cNvPr id="14" name="Picture 13" descr="jordan.jpg"/>
-          <p:cNvPicPr>
-            <a:picLocks noChangeAspect="1"/>
-          </p:cNvPicPr>
-          <p:nvPr/>
-        </p:nvPicPr>
-        <p:blipFill>
-          <a:blip r:embed="rId4"/>
-          <a:stretch>
-            <a:fillRect/>
-          </a:stretch>
-        </p:blipFill>
-        <p:spPr>
-          <a:xfrm>
-            <a:off x="640080" y="4782312"/>
-            <a:ext cx="548640" cy="548640"/>
-          </a:xfrm>
-          <a:prstGeom prst="rect">
-            <a:avLst/>
-          </a:prstGeom>
-        </p:spPr>
-      </p:pic>
-      <p:sp>
-        <p:nvSpPr>
-          <p:cNvPr id="15" name="TextBox 14"/>
+              <a:t>contractor wages — every day.</a:t>
+            </a:r>
+          </a:p>
+        </p:txBody>
+      </p:sp>
+      <p:sp>
+        <p:nvSpPr>
+          <p:cNvPr id="9" name="TextBox 8"/>
           <p:cNvSpPr txBox="1"/>
           <p:nvPr/>
         </p:nvSpPr>
         <p:spPr>
           <a:xfrm>
-            <a:off x="1371600" y="4782312"/>
-            <a:ext cx="10515600" cy="685800"/>
+            <a:off x="640080" y="5486400"/>
+            <a:ext cx="10972800" cy="640080"/>
           </a:xfrm>
           <a:prstGeom prst="rect">
             <a:avLst/>
@@ -5065,44 +4927,6 @@
             <a:spAutoFit/>
           </a:bodyPr>
           <a:lstStyle/>
-          <a:p>
-            <a:pPr algn="l">
-              <a:spcBef>
-                <a:spcPts val="0"/>
-              </a:spcBef>
-              <a:spcAft>
-                <a:spcPts val="100"/>
-              </a:spcAft>
-            </a:pPr>
-            <a:r>
-              <a:rPr sz="1300" b="1">
-                <a:solidFill>
-                  <a:srgbClr val="0A0A0A"/>
-                </a:solidFill>
-                <a:latin typeface="Inter"/>
-              </a:rPr>
-              <a:t>Jordan Winawer</a:t>
-            </a:r>
-          </a:p>
-          <a:p>
-            <a:pPr algn="l">
-              <a:spcBef>
-                <a:spcPts val="0"/>
-              </a:spcBef>
-              <a:spcAft>
-                <a:spcPts val="100"/>
-              </a:spcAft>
-            </a:pPr>
-            <a:r>
-              <a:rPr sz="1000" b="0">
-                <a:solidFill>
-                  <a:srgbClr val="6B7280"/>
-                </a:solidFill>
-                <a:latin typeface="Inter"/>
-              </a:rPr>
-              <a:t>GM (ex-Scale AI verticals)</a:t>
-            </a:r>
-          </a:p>
           <a:p>
             <a:pPr algn="l">
               <a:spcBef>
@@ -5113,96 +4937,27 @@
               </a:spcAft>
             </a:pPr>
             <a:r>
-              <a:rPr sz="1000" b="0">
-                <a:solidFill>
-                  <a:srgbClr val="7857FF"/>
+              <a:rPr sz="1200" b="0">
+                <a:solidFill>
+                  <a:srgbClr val="6B7280"/>
                 </a:solidFill>
                 <a:latin typeface="Inter"/>
               </a:rPr>
-              <a:t>Shipped Scale's GenAI vertical.</a:t>
-            </a:r>
-          </a:p>
-        </p:txBody>
-      </p:sp>
-      <p:sp>
-        <p:nvSpPr>
-          <p:cNvPr id="16" name="Oval 15"/>
-          <p:cNvSpPr/>
-          <p:nvPr/>
-        </p:nvSpPr>
-        <p:spPr>
-          <a:xfrm>
-            <a:off x="640080" y="5495544"/>
-            <a:ext cx="548640" cy="548640"/>
-          </a:xfrm>
-          <a:prstGeom prst="ellipse">
-            <a:avLst/>
-          </a:prstGeom>
-          <a:solidFill>
-            <a:srgbClr val="E5E7EB"/>
-          </a:solidFill>
-          <a:ln w="6350">
-            <a:solidFill>
-              <a:srgbClr val="E5E7EB"/>
-            </a:solidFill>
-          </a:ln>
-        </p:spPr>
-        <p:style>
-          <a:lnRef idx="1">
-            <a:schemeClr val="accent1"/>
-          </a:lnRef>
-          <a:fillRef idx="3">
-            <a:schemeClr val="accent1"/>
-          </a:fillRef>
-          <a:effectRef idx="2">
-            <a:schemeClr val="accent1"/>
-          </a:effectRef>
-          <a:fontRef idx="minor">
-            <a:schemeClr val="lt1"/>
-          </a:fontRef>
-        </p:style>
-        <p:txBody>
-          <a:bodyPr rtlCol="0" anchor="ctr"/>
-          <a:lstStyle/>
-          <a:p>
-            <a:pPr algn="ctr"/>
-          </a:p>
-        </p:txBody>
-      </p:sp>
-      <p:pic>
-        <p:nvPicPr>
-          <p:cNvPr id="17" name="Picture 16" descr="eddie.jpg"/>
-          <p:cNvPicPr>
-            <a:picLocks noChangeAspect="1"/>
-          </p:cNvPicPr>
-          <p:nvPr/>
-        </p:nvPicPr>
-        <p:blipFill>
-          <a:blip r:embed="rId5"/>
-          <a:stretch>
-            <a:fillRect/>
-          </a:stretch>
-        </p:blipFill>
-        <p:spPr>
-          <a:xfrm>
-            <a:off x="640080" y="5495544"/>
-            <a:ext cx="548640" cy="548640"/>
-          </a:xfrm>
-          <a:prstGeom prst="rect">
-            <a:avLst/>
-          </a:prstGeom>
-        </p:spPr>
-      </p:pic>
-      <p:sp>
-        <p:nvSpPr>
-          <p:cNvPr id="18" name="TextBox 17"/>
+              <a:t>We ran the same play through UCSB and fraternity networks. It worked. Mercor can run it bigger.</a:t>
+            </a:r>
+          </a:p>
+        </p:txBody>
+      </p:sp>
+      <p:sp>
+        <p:nvSpPr>
+          <p:cNvPr id="10" name="TextBox 9"/>
           <p:cNvSpPr txBox="1"/>
           <p:nvPr/>
         </p:nvSpPr>
         <p:spPr>
           <a:xfrm>
-            <a:off x="1371600" y="5495544"/>
-            <a:ext cx="10515600" cy="685800"/>
+            <a:off x="640080" y="6446520"/>
+            <a:ext cx="10972800" cy="274320"/>
           </a:xfrm>
           <a:prstGeom prst="rect">
             <a:avLst/>
@@ -5214,44 +4969,6 @@
             <a:spAutoFit/>
           </a:bodyPr>
           <a:lstStyle/>
-          <a:p>
-            <a:pPr algn="l">
-              <a:spcBef>
-                <a:spcPts val="0"/>
-              </a:spcBef>
-              <a:spcAft>
-                <a:spcPts val="100"/>
-              </a:spcAft>
-            </a:pPr>
-            <a:r>
-              <a:rPr sz="1300" b="1">
-                <a:solidFill>
-                  <a:srgbClr val="0A0A0A"/>
-                </a:solidFill>
-                <a:latin typeface="Inter"/>
-              </a:rPr>
-              <a:t>Eddie Huang</a:t>
-            </a:r>
-          </a:p>
-          <a:p>
-            <a:pPr algn="l">
-              <a:spcBef>
-                <a:spcPts val="0"/>
-              </a:spcBef>
-              <a:spcAft>
-                <a:spcPts val="100"/>
-              </a:spcAft>
-            </a:pPr>
-            <a:r>
-              <a:rPr sz="1000" b="0">
-                <a:solidFill>
-                  <a:srgbClr val="6B7280"/>
-                </a:solidFill>
-                <a:latin typeface="Inter"/>
-              </a:rPr>
-              <a:t>PM, Growth</a:t>
-            </a:r>
-          </a:p>
           <a:p>
             <a:pPr algn="l">
               <a:spcBef>
@@ -5262,55 +4979,13 @@
               </a:spcAft>
             </a:pPr>
             <a:r>
-              <a:rPr sz="1000" b="0">
-                <a:solidFill>
-                  <a:srgbClr val="7857FF"/>
+              <a:rPr sz="900" b="0">
+                <a:solidFill>
+                  <a:srgbClr val="9CA3AF"/>
                 </a:solidFill>
                 <a:latin typeface="Inter"/>
               </a:rPr>
-              <a:t>Builds the growth surface.</a:t>
-            </a:r>
-          </a:p>
-        </p:txBody>
-      </p:sp>
-      <p:sp>
-        <p:nvSpPr>
-          <p:cNvPr id="19" name="TextBox 18"/>
-          <p:cNvSpPr txBox="1"/>
-          <p:nvPr/>
-        </p:nvSpPr>
-        <p:spPr>
-          <a:xfrm>
-            <a:off x="640080" y="6446520"/>
-            <a:ext cx="10972800" cy="274320"/>
-          </a:xfrm>
-          <a:prstGeom prst="rect">
-            <a:avLst/>
-          </a:prstGeom>
-          <a:noFill/>
-        </p:spPr>
-        <p:txBody>
-          <a:bodyPr wrap="square" lIns="0" rIns="0" tIns="0" bIns="0" anchor="t">
-            <a:spAutoFit/>
-          </a:bodyPr>
-          <a:lstStyle/>
-          <a:p>
-            <a:pPr algn="l">
-              <a:spcBef>
-                <a:spcPts val="0"/>
-              </a:spcBef>
-              <a:spcAft>
-                <a:spcPts val="400"/>
-              </a:spcAft>
-            </a:pPr>
-            <a:r>
-              <a:rPr sz="900" b="0">
-                <a:solidFill>
-                  <a:srgbClr val="9CA3AF"/>
-                </a:solidFill>
-                <a:latin typeface="Inter"/>
-              </a:rPr>
-              <a:t>creator experts   ·   internal proposal for aaron langerman   ·   4 / 5</a:t>
+              <a:t>creator experts   ·   internal proposal for aaron langerman   ·   4 / 6</a:t>
             </a:r>
           </a:p>
         </p:txBody>
@@ -5402,7 +5077,7 @@
                 </a:solidFill>
                 <a:latin typeface="Inter"/>
               </a:rPr>
-              <a:t>NOW → LIVE DEMO</a:t>
+              <a:t>THE PLAN</a:t>
             </a:r>
           </a:p>
         </p:txBody>
@@ -5416,7 +5091,7 @@
         <p:spPr>
           <a:xfrm>
             <a:off x="640080" y="1417320"/>
-            <a:ext cx="10972800" cy="2103120"/>
+            <a:ext cx="10972800" cy="914400"/>
           </a:xfrm>
           <a:prstGeom prst="rect">
             <a:avLst/>
@@ -5441,94 +5116,40 @@
               </a:spcAft>
             </a:pPr>
             <a:r>
-              <a:rPr sz="4200" b="1">
+              <a:rPr sz="3000" b="1">
                 <a:solidFill>
                   <a:srgbClr val="0A0A0A"/>
                 </a:solidFill>
                 <a:latin typeface="Inter"/>
               </a:rPr>
-              <a:t>Slides set the case.
-The demo proves it.</a:t>
-            </a:r>
-          </a:p>
-        </p:txBody>
-      </p:sp>
-      <p:sp>
-        <p:nvSpPr>
-          <p:cNvPr id="5" name="TextBox 4"/>
-          <p:cNvSpPr txBox="1"/>
-          <p:nvPr/>
-        </p:nvSpPr>
-        <p:spPr>
-          <a:xfrm>
-            <a:off x="640080" y="4023360"/>
-            <a:ext cx="10972800" cy="1280160"/>
-          </a:xfrm>
-          <a:prstGeom prst="rect">
-            <a:avLst/>
-          </a:prstGeom>
-          <a:noFill/>
-        </p:spPr>
-        <p:txBody>
-          <a:bodyPr wrap="square" lIns="0" rIns="0" tIns="0" bIns="0" anchor="t">
-            <a:spAutoFit/>
-          </a:bodyPr>
-          <a:lstStyle/>
-          <a:p>
-            <a:pPr>
-              <a:spcAft>
-                <a:spcPts val="1000"/>
-              </a:spcAft>
-            </a:pPr>
-            <a:r>
-              <a:rPr sz="1500" b="0">
-                <a:solidFill>
-                  <a:srgbClr val="0A0A0A"/>
-                </a:solidFill>
-                <a:latin typeface="Inter"/>
-              </a:rPr>
-              <a:t>Logan as creator — real 22.7K-follower TikTok inside Mercor's stepper.</a:t>
-            </a:r>
-          </a:p>
-          <a:p>
-            <a:pPr>
-              <a:spcAft>
-                <a:spcPts val="1000"/>
-              </a:spcAft>
-            </a:pPr>
-            <a:r>
-              <a:rPr sz="1500" b="0">
-                <a:solidFill>
-                  <a:srgbClr val="0A0A0A"/>
-                </a:solidFill>
-                <a:latin typeface="Inter"/>
-              </a:rPr>
-              <a:t>Aaron as admin — RAG cites real posts by URL. Persona outreach. Live sim.</a:t>
-            </a:r>
-          </a:p>
-        </p:txBody>
-      </p:sp>
-      <p:sp>
-        <p:nvSpPr>
-          <p:cNvPr id="6" name="Rounded Rectangle 5"/>
+              <a:t>Build it over the summer. Ship it at Q4.</a:t>
+            </a:r>
+          </a:p>
+        </p:txBody>
+      </p:sp>
+      <p:sp>
+        <p:nvSpPr>
+          <p:cNvPr id="5" name="Rounded Rectangle 4"/>
           <p:cNvSpPr/>
           <p:nvPr/>
         </p:nvSpPr>
         <p:spPr>
           <a:xfrm>
-            <a:off x="640080" y="5669280"/>
-            <a:ext cx="10972800" cy="594360"/>
+            <a:off x="640080" y="2606040"/>
+            <a:ext cx="5577840" cy="1325880"/>
           </a:xfrm>
           <a:prstGeom prst="roundRect">
             <a:avLst>
-              <a:gd name="adj" fmla="val 40000"/>
+              <a:gd name="adj" fmla="val 6000"/>
             </a:avLst>
           </a:prstGeom>
           <a:solidFill>
-            <a:srgbClr val="7857FF"/>
+            <a:srgbClr val="FAFAFA"/>
           </a:solidFill>
-          <a:ln>
-            <a:noFill/>
+          <a:ln w="9525">
+            <a:solidFill>
+              <a:srgbClr val="E5E7EB"/>
+            </a:solidFill>
           </a:ln>
         </p:spPr>
         <p:style>
@@ -5546,32 +5167,23 @@
           </a:fontRef>
         </p:style>
         <p:txBody>
-          <a:bodyPr rtlCol="0" anchor="ctr" lIns="0" rIns="0"/>
+          <a:bodyPr rtlCol="0" anchor="ctr"/>
           <a:lstStyle/>
           <a:p>
             <a:pPr algn="ctr"/>
-            <a:r>
-              <a:rPr sz="1500" b="1">
-                <a:solidFill>
-                  <a:srgbClr val="FFFFFF"/>
-                </a:solidFill>
-                <a:latin typeface="Inter"/>
-              </a:rPr>
-              <a:t>Live: musing-maxwell-84ed29.vercel.app</a:t>
-            </a:r>
-          </a:p>
-        </p:txBody>
-      </p:sp>
-      <p:sp>
-        <p:nvSpPr>
-          <p:cNvPr id="7" name="TextBox 6"/>
+          </a:p>
+        </p:txBody>
+      </p:sp>
+      <p:sp>
+        <p:nvSpPr>
+          <p:cNvPr id="6" name="TextBox 5"/>
           <p:cNvSpPr txBox="1"/>
           <p:nvPr/>
         </p:nvSpPr>
         <p:spPr>
           <a:xfrm>
-            <a:off x="640080" y="6446520"/>
-            <a:ext cx="10972800" cy="274320"/>
+            <a:off x="932688" y="2834640"/>
+            <a:ext cx="4992624" cy="960119"/>
           </a:xfrm>
           <a:prstGeom prst="rect">
             <a:avLst/>
@@ -5583,6 +5195,25 @@
             <a:spAutoFit/>
           </a:bodyPr>
           <a:lstStyle/>
+          <a:p>
+            <a:pPr algn="l">
+              <a:spcBef>
+                <a:spcPts val="0"/>
+              </a:spcBef>
+              <a:spcAft>
+                <a:spcPts val="600"/>
+              </a:spcAft>
+            </a:pPr>
+            <a:r>
+              <a:rPr sz="1000" b="1" spc="120">
+                <a:solidFill>
+                  <a:srgbClr val="7857FF"/>
+                </a:solidFill>
+                <a:latin typeface="Inter"/>
+              </a:rPr>
+              <a:t>SUMMER</a:t>
+            </a:r>
+          </a:p>
           <a:p>
             <a:pPr algn="l">
               <a:spcBef>
@@ -5593,13 +5224,783 @@
               </a:spcAft>
             </a:pPr>
             <a:r>
-              <a:rPr sz="900" b="0">
-                <a:solidFill>
-                  <a:srgbClr val="9CA3AF"/>
+              <a:rPr sz="1800" b="1">
+                <a:solidFill>
+                  <a:srgbClr val="0A0A0A"/>
                 </a:solidFill>
                 <a:latin typeface="Inter"/>
               </a:rPr>
-              <a:t>creator experts   ·   internal proposal for aaron langerman   ·   5 / 5</a:t>
+              <a:t>Internship build + PMF</a:t>
+            </a:r>
+          </a:p>
+          <a:p>
+            <a:pPr algn="l">
+              <a:spcBef>
+                <a:spcPts val="0"/>
+              </a:spcBef>
+              <a:spcAft>
+                <a:spcPts val="400"/>
+              </a:spcAft>
+            </a:pPr>
+            <a:r>
+              <a:rPr sz="1100" b="0">
+                <a:solidFill>
+                  <a:srgbClr val="6B7280"/>
+                </a:solidFill>
+                <a:latin typeface="Inter"/>
+              </a:rPr>
+              <a:t>Logan + Aarnav, paid as Mercor interns. Real campaigns running by Aug.</a:t>
+            </a:r>
+          </a:p>
+        </p:txBody>
+      </p:sp>
+      <p:sp>
+        <p:nvSpPr>
+          <p:cNvPr id="7" name="Rounded Rectangle 6"/>
+          <p:cNvSpPr/>
+          <p:nvPr/>
+        </p:nvSpPr>
+        <p:spPr>
+          <a:xfrm>
+            <a:off x="6492240" y="2606040"/>
+            <a:ext cx="5577840" cy="1325880"/>
+          </a:xfrm>
+          <a:prstGeom prst="roundRect">
+            <a:avLst>
+              <a:gd name="adj" fmla="val 6000"/>
+            </a:avLst>
+          </a:prstGeom>
+          <a:solidFill>
+            <a:srgbClr val="EDE9FE"/>
+          </a:solidFill>
+          <a:ln w="12700">
+            <a:solidFill>
+              <a:srgbClr val="7857FF"/>
+            </a:solidFill>
+          </a:ln>
+        </p:spPr>
+        <p:style>
+          <a:lnRef idx="1">
+            <a:schemeClr val="accent1"/>
+          </a:lnRef>
+          <a:fillRef idx="3">
+            <a:schemeClr val="accent1"/>
+          </a:fillRef>
+          <a:effectRef idx="2">
+            <a:schemeClr val="accent1"/>
+          </a:effectRef>
+          <a:fontRef idx="minor">
+            <a:schemeClr val="lt1"/>
+          </a:fontRef>
+        </p:style>
+        <p:txBody>
+          <a:bodyPr rtlCol="0" anchor="ctr"/>
+          <a:lstStyle/>
+          <a:p>
+            <a:pPr algn="ctr"/>
+          </a:p>
+        </p:txBody>
+      </p:sp>
+      <p:sp>
+        <p:nvSpPr>
+          <p:cNvPr id="8" name="TextBox 7"/>
+          <p:cNvSpPr txBox="1"/>
+          <p:nvPr/>
+        </p:nvSpPr>
+        <p:spPr>
+          <a:xfrm>
+            <a:off x="6784848" y="2834640"/>
+            <a:ext cx="4992624" cy="960119"/>
+          </a:xfrm>
+          <a:prstGeom prst="rect">
+            <a:avLst/>
+          </a:prstGeom>
+          <a:noFill/>
+        </p:spPr>
+        <p:txBody>
+          <a:bodyPr wrap="square" lIns="0" rIns="0" tIns="0" bIns="0" anchor="t">
+            <a:spAutoFit/>
+          </a:bodyPr>
+          <a:lstStyle/>
+          <a:p>
+            <a:pPr algn="l">
+              <a:spcBef>
+                <a:spcPts val="0"/>
+              </a:spcBef>
+              <a:spcAft>
+                <a:spcPts val="600"/>
+              </a:spcAft>
+            </a:pPr>
+            <a:r>
+              <a:rPr sz="1000" b="1" spc="120">
+                <a:solidFill>
+                  <a:srgbClr val="7857FF"/>
+                </a:solidFill>
+                <a:latin typeface="Inter"/>
+              </a:rPr>
+              <a:t>Q4</a:t>
+            </a:r>
+          </a:p>
+          <a:p>
+            <a:pPr algn="l">
+              <a:spcBef>
+                <a:spcPts val="0"/>
+              </a:spcBef>
+              <a:spcAft>
+                <a:spcPts val="400"/>
+              </a:spcAft>
+            </a:pPr>
+            <a:r>
+              <a:rPr sz="1800" b="1">
+                <a:solidFill>
+                  <a:srgbClr val="0A0A0A"/>
+                </a:solidFill>
+                <a:latin typeface="Inter"/>
+              </a:rPr>
+              <a:t>Deploy with Eng + Growth</a:t>
+            </a:r>
+          </a:p>
+          <a:p>
+            <a:pPr algn="l">
+              <a:spcBef>
+                <a:spcPts val="0"/>
+              </a:spcBef>
+              <a:spcAft>
+                <a:spcPts val="400"/>
+              </a:spcAft>
+            </a:pPr>
+            <a:r>
+              <a:rPr sz="1100" b="0">
+                <a:solidFill>
+                  <a:srgbClr val="6B7280"/>
+                </a:solidFill>
+                <a:latin typeface="Inter"/>
+              </a:rPr>
+              <a:t>Hand-off to Mercor's eng and growth teams. Domain row goes live.</a:t>
+            </a:r>
+          </a:p>
+        </p:txBody>
+      </p:sp>
+      <p:sp>
+        <p:nvSpPr>
+          <p:cNvPr id="9" name="TextBox 8"/>
+          <p:cNvSpPr txBox="1"/>
+          <p:nvPr/>
+        </p:nvSpPr>
+        <p:spPr>
+          <a:xfrm>
+            <a:off x="640080" y="4297680"/>
+            <a:ext cx="7315200" cy="274320"/>
+          </a:xfrm>
+          <a:prstGeom prst="rect">
+            <a:avLst/>
+          </a:prstGeom>
+          <a:noFill/>
+        </p:spPr>
+        <p:txBody>
+          <a:bodyPr wrap="square" lIns="0" rIns="0" tIns="0" bIns="0" anchor="t">
+            <a:spAutoFit/>
+          </a:bodyPr>
+          <a:lstStyle/>
+          <a:p>
+            <a:pPr algn="l">
+              <a:spcBef>
+                <a:spcPts val="0"/>
+              </a:spcBef>
+              <a:spcAft>
+                <a:spcPts val="400"/>
+              </a:spcAft>
+            </a:pPr>
+            <a:r>
+              <a:rPr sz="1000" b="1" spc="120">
+                <a:solidFill>
+                  <a:srgbClr val="7857FF"/>
+                </a:solidFill>
+                <a:latin typeface="Inter"/>
+              </a:rPr>
+              <a:t>WHAT WE NEED FROM YOU</a:t>
+            </a:r>
+          </a:p>
+        </p:txBody>
+      </p:sp>
+      <p:sp>
+        <p:nvSpPr>
+          <p:cNvPr id="10" name="TextBox 9"/>
+          <p:cNvSpPr txBox="1"/>
+          <p:nvPr/>
+        </p:nvSpPr>
+        <p:spPr>
+          <a:xfrm>
+            <a:off x="640080" y="4846320"/>
+            <a:ext cx="502920" cy="457200"/>
+          </a:xfrm>
+          <a:prstGeom prst="rect">
+            <a:avLst/>
+          </a:prstGeom>
+          <a:noFill/>
+        </p:spPr>
+        <p:txBody>
+          <a:bodyPr wrap="square" lIns="0" rIns="0" tIns="0" bIns="0" anchor="t">
+            <a:spAutoFit/>
+          </a:bodyPr>
+          <a:lstStyle/>
+          <a:p>
+            <a:pPr algn="l">
+              <a:spcBef>
+                <a:spcPts val="0"/>
+              </a:spcBef>
+              <a:spcAft>
+                <a:spcPts val="400"/>
+              </a:spcAft>
+            </a:pPr>
+            <a:r>
+              <a:rPr sz="1400" b="1">
+                <a:solidFill>
+                  <a:srgbClr val="7857FF"/>
+                </a:solidFill>
+                <a:latin typeface="Inter"/>
+              </a:rPr>
+              <a:t>01</a:t>
+            </a:r>
+          </a:p>
+        </p:txBody>
+      </p:sp>
+      <p:sp>
+        <p:nvSpPr>
+          <p:cNvPr id="11" name="TextBox 10"/>
+          <p:cNvSpPr txBox="1"/>
+          <p:nvPr/>
+        </p:nvSpPr>
+        <p:spPr>
+          <a:xfrm>
+            <a:off x="1234440" y="4864607"/>
+            <a:ext cx="10332720" cy="457200"/>
+          </a:xfrm>
+          <a:prstGeom prst="rect">
+            <a:avLst/>
+          </a:prstGeom>
+          <a:noFill/>
+        </p:spPr>
+        <p:txBody>
+          <a:bodyPr wrap="square" lIns="0" rIns="0" tIns="0" bIns="0" anchor="t">
+            <a:spAutoFit/>
+          </a:bodyPr>
+          <a:lstStyle/>
+          <a:p>
+            <a:pPr algn="l">
+              <a:spcBef>
+                <a:spcPts val="0"/>
+              </a:spcBef>
+              <a:spcAft>
+                <a:spcPts val="400"/>
+              </a:spcAft>
+            </a:pPr>
+            <a:r>
+              <a:rPr sz="1400" b="0">
+                <a:solidFill>
+                  <a:srgbClr val="0A0A0A"/>
+                </a:solidFill>
+                <a:latin typeface="Inter"/>
+              </a:rPr>
+              <a:t>Where does Creator Experts live inside Mercor?</a:t>
+            </a:r>
+          </a:p>
+        </p:txBody>
+      </p:sp>
+      <p:sp>
+        <p:nvSpPr>
+          <p:cNvPr id="12" name="TextBox 11"/>
+          <p:cNvSpPr txBox="1"/>
+          <p:nvPr/>
+        </p:nvSpPr>
+        <p:spPr>
+          <a:xfrm>
+            <a:off x="640080" y="5349240"/>
+            <a:ext cx="502920" cy="457200"/>
+          </a:xfrm>
+          <a:prstGeom prst="rect">
+            <a:avLst/>
+          </a:prstGeom>
+          <a:noFill/>
+        </p:spPr>
+        <p:txBody>
+          <a:bodyPr wrap="square" lIns="0" rIns="0" tIns="0" bIns="0" anchor="t">
+            <a:spAutoFit/>
+          </a:bodyPr>
+          <a:lstStyle/>
+          <a:p>
+            <a:pPr algn="l">
+              <a:spcBef>
+                <a:spcPts val="0"/>
+              </a:spcBef>
+              <a:spcAft>
+                <a:spcPts val="400"/>
+              </a:spcAft>
+            </a:pPr>
+            <a:r>
+              <a:rPr sz="1400" b="1">
+                <a:solidFill>
+                  <a:srgbClr val="7857FF"/>
+                </a:solidFill>
+                <a:latin typeface="Inter"/>
+              </a:rPr>
+              <a:t>02</a:t>
+            </a:r>
+          </a:p>
+        </p:txBody>
+      </p:sp>
+      <p:sp>
+        <p:nvSpPr>
+          <p:cNvPr id="13" name="TextBox 12"/>
+          <p:cNvSpPr txBox="1"/>
+          <p:nvPr/>
+        </p:nvSpPr>
+        <p:spPr>
+          <a:xfrm>
+            <a:off x="1234440" y="5367527"/>
+            <a:ext cx="10332720" cy="457200"/>
+          </a:xfrm>
+          <a:prstGeom prst="rect">
+            <a:avLst/>
+          </a:prstGeom>
+          <a:noFill/>
+        </p:spPr>
+        <p:txBody>
+          <a:bodyPr wrap="square" lIns="0" rIns="0" tIns="0" bIns="0" anchor="t">
+            <a:spAutoFit/>
+          </a:bodyPr>
+          <a:lstStyle/>
+          <a:p>
+            <a:pPr algn="l">
+              <a:spcBef>
+                <a:spcPts val="0"/>
+              </a:spcBef>
+              <a:spcAft>
+                <a:spcPts val="400"/>
+              </a:spcAft>
+            </a:pPr>
+            <a:r>
+              <a:rPr sz="1400" b="0">
+                <a:solidFill>
+                  <a:srgbClr val="0A0A0A"/>
+                </a:solidFill>
+                <a:latin typeface="Inter"/>
+              </a:rPr>
+              <a:t>Hourly pricing, or per-post with a relevant-eyes bonus?</a:t>
+            </a:r>
+          </a:p>
+        </p:txBody>
+      </p:sp>
+      <p:sp>
+        <p:nvSpPr>
+          <p:cNvPr id="14" name="TextBox 13"/>
+          <p:cNvSpPr txBox="1"/>
+          <p:nvPr/>
+        </p:nvSpPr>
+        <p:spPr>
+          <a:xfrm>
+            <a:off x="640080" y="5852160"/>
+            <a:ext cx="502920" cy="457200"/>
+          </a:xfrm>
+          <a:prstGeom prst="rect">
+            <a:avLst/>
+          </a:prstGeom>
+          <a:noFill/>
+        </p:spPr>
+        <p:txBody>
+          <a:bodyPr wrap="square" lIns="0" rIns="0" tIns="0" bIns="0" anchor="t">
+            <a:spAutoFit/>
+          </a:bodyPr>
+          <a:lstStyle/>
+          <a:p>
+            <a:pPr algn="l">
+              <a:spcBef>
+                <a:spcPts val="0"/>
+              </a:spcBef>
+              <a:spcAft>
+                <a:spcPts val="400"/>
+              </a:spcAft>
+            </a:pPr>
+            <a:r>
+              <a:rPr sz="1400" b="1">
+                <a:solidFill>
+                  <a:srgbClr val="7857FF"/>
+                </a:solidFill>
+                <a:latin typeface="Inter"/>
+              </a:rPr>
+              <a:t>03</a:t>
+            </a:r>
+          </a:p>
+        </p:txBody>
+      </p:sp>
+      <p:sp>
+        <p:nvSpPr>
+          <p:cNvPr id="15" name="TextBox 14"/>
+          <p:cNvSpPr txBox="1"/>
+          <p:nvPr/>
+        </p:nvSpPr>
+        <p:spPr>
+          <a:xfrm>
+            <a:off x="1234440" y="5870448"/>
+            <a:ext cx="10332720" cy="457200"/>
+          </a:xfrm>
+          <a:prstGeom prst="rect">
+            <a:avLst/>
+          </a:prstGeom>
+          <a:noFill/>
+        </p:spPr>
+        <p:txBody>
+          <a:bodyPr wrap="square" lIns="0" rIns="0" tIns="0" bIns="0" anchor="t">
+            <a:spAutoFit/>
+          </a:bodyPr>
+          <a:lstStyle/>
+          <a:p>
+            <a:pPr algn="l">
+              <a:spcBef>
+                <a:spcPts val="0"/>
+              </a:spcBef>
+              <a:spcAft>
+                <a:spcPts val="400"/>
+              </a:spcAft>
+            </a:pPr>
+            <a:r>
+              <a:rPr sz="1400" b="0">
+                <a:solidFill>
+                  <a:srgbClr val="0A0A0A"/>
+                </a:solidFill>
+                <a:latin typeface="Inter"/>
+              </a:rPr>
+              <a:t>Who handles brand-side sales — Mercor's team, or ours during the pilot?</a:t>
+            </a:r>
+          </a:p>
+        </p:txBody>
+      </p:sp>
+      <p:sp>
+        <p:nvSpPr>
+          <p:cNvPr id="16" name="TextBox 15"/>
+          <p:cNvSpPr txBox="1"/>
+          <p:nvPr/>
+        </p:nvSpPr>
+        <p:spPr>
+          <a:xfrm>
+            <a:off x="640080" y="6446520"/>
+            <a:ext cx="10972800" cy="274320"/>
+          </a:xfrm>
+          <a:prstGeom prst="rect">
+            <a:avLst/>
+          </a:prstGeom>
+          <a:noFill/>
+        </p:spPr>
+        <p:txBody>
+          <a:bodyPr wrap="square" lIns="0" rIns="0" tIns="0" bIns="0" anchor="t">
+            <a:spAutoFit/>
+          </a:bodyPr>
+          <a:lstStyle/>
+          <a:p>
+            <a:pPr algn="l">
+              <a:spcBef>
+                <a:spcPts val="0"/>
+              </a:spcBef>
+              <a:spcAft>
+                <a:spcPts val="400"/>
+              </a:spcAft>
+            </a:pPr>
+            <a:r>
+              <a:rPr sz="900" b="0">
+                <a:solidFill>
+                  <a:srgbClr val="9CA3AF"/>
+                </a:solidFill>
+                <a:latin typeface="Inter"/>
+              </a:rPr>
+              <a:t>creator experts   ·   internal proposal for aaron langerman   ·   5 / 6</a:t>
+            </a:r>
+          </a:p>
+        </p:txBody>
+      </p:sp>
+    </p:spTree>
+  </p:cSld>
+  <p:clrMapOvr>
+    <a:masterClrMapping/>
+  </p:clrMapOvr>
+</p:sld>
+</file>
+
+<file path=ppt/slides/slide6.xml><?xml version="1.0" encoding="utf-8"?>
+<p:sld xmlns:a="http://schemas.openxmlformats.org/drawingml/2006/main" xmlns:p="http://schemas.openxmlformats.org/presentationml/2006/main" xmlns:r="http://schemas.openxmlformats.org/officeDocument/2006/relationships">
+  <p:cSld>
+    <p:bg>
+      <p:bgPr>
+        <a:solidFill>
+          <a:srgbClr val="FFFFFF"/>
+        </a:solidFill>
+        <a:effectLst/>
+      </p:bgPr>
+    </p:bg>
+    <p:spTree>
+      <p:nvGrpSpPr>
+        <p:cNvPr id="1" name=""/>
+        <p:cNvGrpSpPr/>
+        <p:nvPr/>
+      </p:nvGrpSpPr>
+      <p:grpSpPr/>
+      <p:pic>
+        <p:nvPicPr>
+          <p:cNvPr id="2" name="Picture 1" descr="mercor-logo.png"/>
+          <p:cNvPicPr>
+            <a:picLocks noChangeAspect="1"/>
+          </p:cNvPicPr>
+          <p:nvPr/>
+        </p:nvPicPr>
+        <p:blipFill>
+          <a:blip r:embed="rId2"/>
+          <a:stretch>
+            <a:fillRect/>
+          </a:stretch>
+        </p:blipFill>
+        <p:spPr>
+          <a:xfrm>
+            <a:off x="11231575" y="320040"/>
+            <a:ext cx="320040" cy="320040"/>
+          </a:xfrm>
+          <a:prstGeom prst="rect">
+            <a:avLst/>
+          </a:prstGeom>
+        </p:spPr>
+      </p:pic>
+      <p:sp>
+        <p:nvSpPr>
+          <p:cNvPr id="3" name="TextBox 2"/>
+          <p:cNvSpPr txBox="1"/>
+          <p:nvPr/>
+        </p:nvSpPr>
+        <p:spPr>
+          <a:xfrm>
+            <a:off x="640080" y="868680"/>
+            <a:ext cx="7315200" cy="274320"/>
+          </a:xfrm>
+          <a:prstGeom prst="rect">
+            <a:avLst/>
+          </a:prstGeom>
+          <a:noFill/>
+        </p:spPr>
+        <p:txBody>
+          <a:bodyPr wrap="square" lIns="0" rIns="0" tIns="0" bIns="0" anchor="t">
+            <a:spAutoFit/>
+          </a:bodyPr>
+          <a:lstStyle/>
+          <a:p>
+            <a:pPr algn="l">
+              <a:spcBef>
+                <a:spcPts val="0"/>
+              </a:spcBef>
+              <a:spcAft>
+                <a:spcPts val="400"/>
+              </a:spcAft>
+            </a:pPr>
+            <a:r>
+              <a:rPr sz="1000" b="1" spc="120">
+                <a:solidFill>
+                  <a:srgbClr val="7857FF"/>
+                </a:solidFill>
+                <a:latin typeface="Inter"/>
+              </a:rPr>
+              <a:t>NOW → LIVE DEMO</a:t>
+            </a:r>
+          </a:p>
+        </p:txBody>
+      </p:sp>
+      <p:sp>
+        <p:nvSpPr>
+          <p:cNvPr id="4" name="TextBox 3"/>
+          <p:cNvSpPr txBox="1"/>
+          <p:nvPr/>
+        </p:nvSpPr>
+        <p:spPr>
+          <a:xfrm>
+            <a:off x="640080" y="1417320"/>
+            <a:ext cx="10972800" cy="2103120"/>
+          </a:xfrm>
+          <a:prstGeom prst="rect">
+            <a:avLst/>
+          </a:prstGeom>
+          <a:noFill/>
+        </p:spPr>
+        <p:txBody>
+          <a:bodyPr wrap="square" lIns="0" rIns="0" tIns="0" bIns="0" anchor="t">
+            <a:spAutoFit/>
+          </a:bodyPr>
+          <a:lstStyle/>
+          <a:p>
+            <a:pPr algn="l">
+              <a:lnSpc>
+                <a:spcPct val="105000"/>
+              </a:lnSpc>
+              <a:spcBef>
+                <a:spcPts val="0"/>
+              </a:spcBef>
+              <a:spcAft>
+                <a:spcPts val="400"/>
+              </a:spcAft>
+            </a:pPr>
+            <a:r>
+              <a:rPr sz="4200" b="1">
+                <a:solidFill>
+                  <a:srgbClr val="0A0A0A"/>
+                </a:solidFill>
+                <a:latin typeface="Inter"/>
+              </a:rPr>
+              <a:t>The demo's the rest of the pitch.</a:t>
+            </a:r>
+          </a:p>
+        </p:txBody>
+      </p:sp>
+      <p:sp>
+        <p:nvSpPr>
+          <p:cNvPr id="5" name="TextBox 4"/>
+          <p:cNvSpPr txBox="1"/>
+          <p:nvPr/>
+        </p:nvSpPr>
+        <p:spPr>
+          <a:xfrm>
+            <a:off x="640080" y="4023360"/>
+            <a:ext cx="10972800" cy="1280160"/>
+          </a:xfrm>
+          <a:prstGeom prst="rect">
+            <a:avLst/>
+          </a:prstGeom>
+          <a:noFill/>
+        </p:spPr>
+        <p:txBody>
+          <a:bodyPr wrap="square" lIns="0" rIns="0" tIns="0" bIns="0" anchor="t">
+            <a:spAutoFit/>
+          </a:bodyPr>
+          <a:lstStyle/>
+          <a:p>
+            <a:pPr>
+              <a:spcAft>
+                <a:spcPts val="1000"/>
+              </a:spcAft>
+            </a:pPr>
+            <a:r>
+              <a:rPr sz="1500" b="0">
+                <a:solidFill>
+                  <a:srgbClr val="0A0A0A"/>
+                </a:solidFill>
+                <a:latin typeface="Inter"/>
+              </a:rPr>
+              <a:t>Logan as a creator — real 22.7K TikTok account, applying inside Mercor's stepper.</a:t>
+            </a:r>
+          </a:p>
+          <a:p>
+            <a:pPr>
+              <a:spcAft>
+                <a:spcPts val="1000"/>
+              </a:spcAft>
+            </a:pPr>
+            <a:r>
+              <a:rPr sz="1500" b="0">
+                <a:solidFill>
+                  <a:srgbClr val="0A0A0A"/>
+                </a:solidFill>
+                <a:latin typeface="Inter"/>
+              </a:rPr>
+              <a:t>Aaron as Mercor admin — RAG cites real posts back by URL, outreach drafts in line.</a:t>
+            </a:r>
+          </a:p>
+        </p:txBody>
+      </p:sp>
+      <p:sp>
+        <p:nvSpPr>
+          <p:cNvPr id="6" name="Rounded Rectangle 5"/>
+          <p:cNvSpPr/>
+          <p:nvPr/>
+        </p:nvSpPr>
+        <p:spPr>
+          <a:xfrm>
+            <a:off x="640080" y="5669280"/>
+            <a:ext cx="10972800" cy="594360"/>
+          </a:xfrm>
+          <a:prstGeom prst="roundRect">
+            <a:avLst>
+              <a:gd name="adj" fmla="val 40000"/>
+            </a:avLst>
+          </a:prstGeom>
+          <a:solidFill>
+            <a:srgbClr val="7857FF"/>
+          </a:solidFill>
+          <a:ln>
+            <a:noFill/>
+          </a:ln>
+        </p:spPr>
+        <p:style>
+          <a:lnRef idx="1">
+            <a:schemeClr val="accent1"/>
+          </a:lnRef>
+          <a:fillRef idx="3">
+            <a:schemeClr val="accent1"/>
+          </a:fillRef>
+          <a:effectRef idx="2">
+            <a:schemeClr val="accent1"/>
+          </a:effectRef>
+          <a:fontRef idx="minor">
+            <a:schemeClr val="lt1"/>
+          </a:fontRef>
+        </p:style>
+        <p:txBody>
+          <a:bodyPr rtlCol="0" anchor="ctr" lIns="0" rIns="0"/>
+          <a:lstStyle/>
+          <a:p>
+            <a:pPr algn="ctr"/>
+            <a:r>
+              <a:rPr sz="1500" b="1">
+                <a:solidFill>
+                  <a:srgbClr val="FFFFFF"/>
+                </a:solidFill>
+                <a:latin typeface="Inter"/>
+              </a:rPr>
+              <a:t>Live: musing-maxwell-84ed29.vercel.app</a:t>
+            </a:r>
+          </a:p>
+        </p:txBody>
+      </p:sp>
+      <p:sp>
+        <p:nvSpPr>
+          <p:cNvPr id="7" name="TextBox 6"/>
+          <p:cNvSpPr txBox="1"/>
+          <p:nvPr/>
+        </p:nvSpPr>
+        <p:spPr>
+          <a:xfrm>
+            <a:off x="640080" y="6446520"/>
+            <a:ext cx="10972800" cy="274320"/>
+          </a:xfrm>
+          <a:prstGeom prst="rect">
+            <a:avLst/>
+          </a:prstGeom>
+          <a:noFill/>
+        </p:spPr>
+        <p:txBody>
+          <a:bodyPr wrap="square" lIns="0" rIns="0" tIns="0" bIns="0" anchor="t">
+            <a:spAutoFit/>
+          </a:bodyPr>
+          <a:lstStyle/>
+          <a:p>
+            <a:pPr algn="l">
+              <a:spcBef>
+                <a:spcPts val="0"/>
+              </a:spcBef>
+              <a:spcAft>
+                <a:spcPts val="400"/>
+              </a:spcAft>
+            </a:pPr>
+            <a:r>
+              <a:rPr sz="900" b="0">
+                <a:solidFill>
+                  <a:srgbClr val="9CA3AF"/>
+                </a:solidFill>
+                <a:latin typeface="Inter"/>
+              </a:rPr>
+              <a:t>creator experts   ·   internal proposal for aaron langerman   ·   6 / 6</a:t>
             </a:r>
           </a:p>
         </p:txBody>

--- a/docs/pitch/Mercor-Creators-Domain.pptx
+++ b/docs/pitch/Mercor-Creators-Domain.pptx
@@ -11,6 +11,8 @@
     <p:sldId id="259" r:id="rId10"/>
     <p:sldId id="260" r:id="rId11"/>
     <p:sldId id="261" r:id="rId12"/>
+    <p:sldId id="262" r:id="rId13"/>
+    <p:sldId id="263" r:id="rId14"/>
   </p:sldIdLst>
   <p:sldSz cx="12191695" cy="6858000" type="screen4x3"/>
   <p:notesSz cx="6858000" cy="9144000"/>
@@ -3222,7 +3224,7 @@
         <p:spPr>
           <a:xfrm>
             <a:off x="640080" y="3657600"/>
-            <a:ext cx="10972800" cy="548640"/>
+            <a:ext cx="10972800" cy="640080"/>
           </a:xfrm>
           <a:prstGeom prst="rect">
             <a:avLst/>
@@ -3237,7 +3239,7 @@
           <a:p>
             <a:pPr algn="l">
               <a:lnSpc>
-                <a:spcPct val="100000"/>
+                <a:spcPct val="105000"/>
               </a:lnSpc>
               <a:spcBef>
                 <a:spcPts val="0"/>
@@ -3253,7 +3255,7 @@
                 </a:solidFill>
                 <a:latin typeface="Inter"/>
               </a:rPr>
-              <a:t>A new Expert Domain for Mercor.</a:t>
+              <a:t>A high-friction labor market. Where AI compounds.</a:t>
             </a:r>
           </a:p>
         </p:txBody>
@@ -3266,7 +3268,7 @@
         </p:nvSpPr>
         <p:spPr>
           <a:xfrm>
-            <a:off x="640080" y="4206240"/>
+            <a:off x="640080" y="4343400"/>
             <a:ext cx="10972800" cy="457200"/>
           </a:xfrm>
           <a:prstGeom prst="rect">
@@ -3292,13 +3294,13 @@
               </a:spcAft>
             </a:pPr>
             <a:r>
-              <a:rPr sz="1600" b="1">
+              <a:rPr sz="1400" b="1">
                 <a:solidFill>
                   <a:srgbClr val="9CA3AF"/>
                 </a:solidFill>
                 <a:latin typeface="Inter"/>
               </a:rPr>
-              <a:t>Build over the summer. Ship at the start of Q4.</a:t>
+              <a:t>Sourcing. Verification. Evaluation. Outcome prediction.</a:t>
             </a:r>
           </a:p>
         </p:txBody>
@@ -3420,7 +3422,7 @@
                 </a:solidFill>
                 <a:latin typeface="Inter"/>
               </a:rPr>
-              <a:t>creator experts   ·   internal proposal for aaron langerman   ·   1 / 6</a:t>
+              <a:t>creator experts   ·   internal proposal for aaron langerman   ·   1 / 8</a:t>
             </a:r>
           </a:p>
         </p:txBody>
@@ -3484,7 +3486,7 @@
         <p:spPr>
           <a:xfrm>
             <a:off x="640080" y="868680"/>
-            <a:ext cx="7315200" cy="274320"/>
+            <a:ext cx="10058400" cy="274320"/>
           </a:xfrm>
           <a:prstGeom prst="rect">
             <a:avLst/>
@@ -3512,7 +3514,7 @@
                 </a:solidFill>
                 <a:latin typeface="Inter"/>
               </a:rPr>
-              <a:t>THREE NUMBERS</a:t>
+              <a:t>THE BROKEN WORKFLOW.</a:t>
             </a:r>
           </a:p>
         </p:txBody>
@@ -3525,8 +3527,8 @@
         </p:nvSpPr>
         <p:spPr>
           <a:xfrm>
-            <a:off x="640080" y="1417320"/>
-            <a:ext cx="10972800" cy="1005840"/>
+            <a:off x="640080" y="1371600"/>
+            <a:ext cx="10972800" cy="914400"/>
           </a:xfrm>
           <a:prstGeom prst="rect">
             <a:avLst/>
@@ -3551,13 +3553,13 @@
               </a:spcAft>
             </a:pPr>
             <a:r>
-              <a:rPr sz="3400" b="1">
+              <a:rPr sz="2800" b="1">
                 <a:solidFill>
                   <a:srgbClr val="0A0A0A"/>
                 </a:solidFill>
                 <a:latin typeface="Inter"/>
               </a:rPr>
-              <a:t>The market is bigger than the model.</a:t>
+              <a:t>Five steps. Most of them manual. None of them scale.</a:t>
             </a:r>
           </a:p>
         </p:txBody>
@@ -3570,12 +3572,12 @@
         </p:nvSpPr>
         <p:spPr>
           <a:xfrm>
-            <a:off x="640080" y="3108960"/>
-            <a:ext cx="3657600" cy="2743200"/>
+            <a:off x="640080" y="2743200"/>
+            <a:ext cx="2072579" cy="1691640"/>
           </a:xfrm>
           <a:prstGeom prst="roundRect">
             <a:avLst>
-              <a:gd name="adj" fmla="val 5000"/>
+              <a:gd name="adj" fmla="val 6000"/>
             </a:avLst>
           </a:prstGeom>
           <a:solidFill>
@@ -3617,8 +3619,8 @@
         </p:nvSpPr>
         <p:spPr>
           <a:xfrm>
-            <a:off x="914400" y="3474720"/>
-            <a:ext cx="3108960" cy="2194560"/>
+            <a:off x="841247" y="2944368"/>
+            <a:ext cx="1670243" cy="1325880"/>
           </a:xfrm>
           <a:prstGeom prst="rect">
             <a:avLst/>
@@ -3636,36 +3638,36 @@
                 <a:spcPts val="0"/>
               </a:spcBef>
               <a:spcAft>
-                <a:spcPts val="1000"/>
-              </a:spcAft>
-            </a:pPr>
-            <a:r>
-              <a:rPr sz="4400" b="1">
+                <a:spcPts val="600"/>
+              </a:spcAft>
+            </a:pPr>
+            <a:r>
+              <a:rPr sz="1100" b="1" spc="120">
+                <a:solidFill>
+                  <a:srgbClr val="9CA3AF"/>
+                </a:solidFill>
+                <a:latin typeface="Inter"/>
+              </a:rPr>
+              <a:t>01</a:t>
+            </a:r>
+          </a:p>
+          <a:p>
+            <a:pPr algn="l">
+              <a:spcBef>
+                <a:spcPts val="0"/>
+              </a:spcBef>
+              <a:spcAft>
+                <a:spcPts val="400"/>
+              </a:spcAft>
+            </a:pPr>
+            <a:r>
+              <a:rPr sz="1400" b="1">
                 <a:solidFill>
                   <a:srgbClr val="0A0A0A"/>
                 </a:solidFill>
                 <a:latin typeface="Inter"/>
               </a:rPr>
-              <a:t>$480B</a:t>
-            </a:r>
-          </a:p>
-          <a:p>
-            <a:pPr algn="l">
-              <a:spcBef>
-                <a:spcPts val="0"/>
-              </a:spcBef>
-              <a:spcAft>
-                <a:spcPts val="1400"/>
-              </a:spcAft>
-            </a:pPr>
-            <a:r>
-              <a:rPr sz="1300" b="1">
-                <a:solidFill>
-                  <a:srgbClr val="0A0A0A"/>
-                </a:solidFill>
-                <a:latin typeface="Inter"/>
-              </a:rPr>
-              <a:t>Creator economy by 2027.</a:t>
+              <a:t>Brand brief</a:t>
             </a:r>
           </a:p>
           <a:p>
@@ -3680,11 +3682,11 @@
             <a:r>
               <a:rPr sz="1000" b="0">
                 <a:solidFill>
-                  <a:srgbClr val="9CA3AF"/>
-                </a:solidFill>
-                <a:latin typeface="Inter"/>
-              </a:rPr>
-              <a:t>Goldman Sachs.</a:t>
+                  <a:srgbClr val="6B7280"/>
+                </a:solidFill>
+                <a:latin typeface="Inter"/>
+              </a:rPr>
+              <a:t>marketing manager opens a doc</a:t>
             </a:r>
           </a:p>
         </p:txBody>
@@ -3697,20 +3699,20 @@
         </p:nvSpPr>
         <p:spPr>
           <a:xfrm>
-            <a:off x="4434840" y="3108960"/>
-            <a:ext cx="3657600" cy="2743200"/>
+            <a:off x="2849819" y="2743200"/>
+            <a:ext cx="2072579" cy="1691640"/>
           </a:xfrm>
           <a:prstGeom prst="roundRect">
             <a:avLst>
-              <a:gd name="adj" fmla="val 5000"/>
+              <a:gd name="adj" fmla="val 6000"/>
             </a:avLst>
           </a:prstGeom>
           <a:solidFill>
-            <a:srgbClr val="EDE9FE"/>
+            <a:srgbClr val="FAFAFA"/>
           </a:solidFill>
-          <a:ln w="12700">
+          <a:ln w="9525">
             <a:solidFill>
-              <a:srgbClr val="7857FF"/>
+              <a:srgbClr val="E5E7EB"/>
             </a:solidFill>
           </a:ln>
         </p:spPr>
@@ -3744,8 +3746,8 @@
         </p:nvSpPr>
         <p:spPr>
           <a:xfrm>
-            <a:off x="4709160" y="3474720"/>
-            <a:ext cx="3108960" cy="2194560"/>
+            <a:off x="3050987" y="2944368"/>
+            <a:ext cx="1670243" cy="1325880"/>
           </a:xfrm>
           <a:prstGeom prst="rect">
             <a:avLst/>
@@ -3763,36 +3765,36 @@
                 <a:spcPts val="0"/>
               </a:spcBef>
               <a:spcAft>
-                <a:spcPts val="1000"/>
-              </a:spcAft>
-            </a:pPr>
-            <a:r>
-              <a:rPr sz="4400" b="1">
-                <a:solidFill>
-                  <a:srgbClr val="7857FF"/>
-                </a:solidFill>
-                <a:latin typeface="Inter"/>
-              </a:rPr>
-              <a:t>4×</a:t>
-            </a:r>
-          </a:p>
-          <a:p>
-            <a:pPr algn="l">
-              <a:spcBef>
-                <a:spcPts val="0"/>
-              </a:spcBef>
-              <a:spcAft>
-                <a:spcPts val="1400"/>
-              </a:spcAft>
-            </a:pPr>
-            <a:r>
-              <a:rPr sz="1300" b="1">
+                <a:spcPts val="600"/>
+              </a:spcAft>
+            </a:pPr>
+            <a:r>
+              <a:rPr sz="1100" b="1" spc="120">
+                <a:solidFill>
+                  <a:srgbClr val="9CA3AF"/>
+                </a:solidFill>
+                <a:latin typeface="Inter"/>
+              </a:rPr>
+              <a:t>02</a:t>
+            </a:r>
+          </a:p>
+          <a:p>
+            <a:pPr algn="l">
+              <a:spcBef>
+                <a:spcPts val="0"/>
+              </a:spcBef>
+              <a:spcAft>
+                <a:spcPts val="400"/>
+              </a:spcAft>
+            </a:pPr>
+            <a:r>
+              <a:rPr sz="1400" b="1">
                 <a:solidFill>
                   <a:srgbClr val="0A0A0A"/>
                 </a:solidFill>
                 <a:latin typeface="Inter"/>
               </a:rPr>
-              <a:t>CTR lift on UGC vs. polished ads.</a:t>
+              <a:t>DM agents</a:t>
             </a:r>
           </a:p>
           <a:p>
@@ -3807,11 +3809,11 @@
             <a:r>
               <a:rPr sz="1000" b="0">
                 <a:solidFill>
-                  <a:srgbClr val="9CA3AF"/>
-                </a:solidFill>
-                <a:latin typeface="Inter"/>
-              </a:rPr>
-              <a:t>Half the CPC, too. Impact, 2026.</a:t>
+                  <a:srgbClr val="6B7280"/>
+                </a:solidFill>
+                <a:latin typeface="Inter"/>
+              </a:rPr>
+              <a:t>searches IG/TikTok DMs</a:t>
             </a:r>
           </a:p>
         </p:txBody>
@@ -3824,20 +3826,20 @@
         </p:nvSpPr>
         <p:spPr>
           <a:xfrm>
-            <a:off x="8229600" y="3108960"/>
-            <a:ext cx="3657600" cy="2743200"/>
+            <a:off x="5059558" y="2743200"/>
+            <a:ext cx="2072579" cy="1691640"/>
           </a:xfrm>
           <a:prstGeom prst="roundRect">
             <a:avLst>
-              <a:gd name="adj" fmla="val 5000"/>
+              <a:gd name="adj" fmla="val 6000"/>
             </a:avLst>
           </a:prstGeom>
           <a:solidFill>
-            <a:srgbClr val="FAFAFA"/>
+            <a:srgbClr val="EDE9FE"/>
           </a:solidFill>
-          <a:ln w="9525">
+          <a:ln w="12700">
             <a:solidFill>
-              <a:srgbClr val="E5E7EB"/>
+              <a:srgbClr val="7857FF"/>
             </a:solidFill>
           </a:ln>
         </p:spPr>
@@ -3871,8 +3873,8 @@
         </p:nvSpPr>
         <p:spPr>
           <a:xfrm>
-            <a:off x="8503920" y="3474720"/>
-            <a:ext cx="3108960" cy="2194560"/>
+            <a:off x="5260726" y="2944368"/>
+            <a:ext cx="1670243" cy="1325880"/>
           </a:xfrm>
           <a:prstGeom prst="rect">
             <a:avLst/>
@@ -3890,36 +3892,36 @@
                 <a:spcPts val="0"/>
               </a:spcBef>
               <a:spcAft>
-                <a:spcPts val="1000"/>
-              </a:spcAft>
-            </a:pPr>
-            <a:r>
-              <a:rPr sz="4400" b="1">
+                <a:spcPts val="600"/>
+              </a:spcAft>
+            </a:pPr>
+            <a:r>
+              <a:rPr sz="1100" b="1" spc="120">
+                <a:solidFill>
+                  <a:srgbClr val="7857FF"/>
+                </a:solidFill>
+                <a:latin typeface="Inter"/>
+              </a:rPr>
+              <a:t>03</a:t>
+            </a:r>
+          </a:p>
+          <a:p>
+            <a:pPr algn="l">
+              <a:spcBef>
+                <a:spcPts val="0"/>
+              </a:spcBef>
+              <a:spcAft>
+                <a:spcPts val="400"/>
+              </a:spcAft>
+            </a:pPr>
+            <a:r>
+              <a:rPr sz="1400" b="1">
                 <a:solidFill>
                   <a:srgbClr val="0A0A0A"/>
                 </a:solidFill>
                 <a:latin typeface="Inter"/>
               </a:rPr>
-              <a:t>74%</a:t>
-            </a:r>
-          </a:p>
-          <a:p>
-            <a:pPr algn="l">
-              <a:spcBef>
-                <a:spcPts val="0"/>
-              </a:spcBef>
-              <a:spcAft>
-                <a:spcPts val="1400"/>
-              </a:spcAft>
-            </a:pPr>
-            <a:r>
-              <a:rPr sz="1300" b="1">
-                <a:solidFill>
-                  <a:srgbClr val="0A0A0A"/>
-                </a:solidFill>
-                <a:latin typeface="Inter"/>
-              </a:rPr>
-              <a:t>of brands shifting budget into creator programs.</a:t>
+              <a:t>Manual scroll</a:t>
             </a:r>
           </a:p>
           <a:p>
@@ -3934,25 +3936,72 @@
             <a:r>
               <a:rPr sz="1000" b="0">
                 <a:solidFill>
-                  <a:srgbClr val="9CA3AF"/>
-                </a:solidFill>
-                <a:latin typeface="Inter"/>
-              </a:rPr>
-              <a:t>Influencer Marketing Factory, 2026.</a:t>
-            </a:r>
-          </a:p>
-        </p:txBody>
-      </p:sp>
-      <p:sp>
-        <p:nvSpPr>
-          <p:cNvPr id="11" name="TextBox 10"/>
+                  <a:srgbClr val="6B7280"/>
+                </a:solidFill>
+                <a:latin typeface="Inter"/>
+              </a:rPr>
+              <a:t>opens 40 profiles, evaluates by eye</a:t>
+            </a:r>
+          </a:p>
+        </p:txBody>
+      </p:sp>
+      <p:sp>
+        <p:nvSpPr>
+          <p:cNvPr id="11" name="Rounded Rectangle 10"/>
+          <p:cNvSpPr/>
+          <p:nvPr/>
+        </p:nvSpPr>
+        <p:spPr>
+          <a:xfrm>
+            <a:off x="7269297" y="2743200"/>
+            <a:ext cx="2072579" cy="1691640"/>
+          </a:xfrm>
+          <a:prstGeom prst="roundRect">
+            <a:avLst>
+              <a:gd name="adj" fmla="val 6000"/>
+            </a:avLst>
+          </a:prstGeom>
+          <a:solidFill>
+            <a:srgbClr val="FAFAFA"/>
+          </a:solidFill>
+          <a:ln w="9525">
+            <a:solidFill>
+              <a:srgbClr val="E5E7EB"/>
+            </a:solidFill>
+          </a:ln>
+        </p:spPr>
+        <p:style>
+          <a:lnRef idx="1">
+            <a:schemeClr val="accent1"/>
+          </a:lnRef>
+          <a:fillRef idx="3">
+            <a:schemeClr val="accent1"/>
+          </a:fillRef>
+          <a:effectRef idx="2">
+            <a:schemeClr val="accent1"/>
+          </a:effectRef>
+          <a:fontRef idx="minor">
+            <a:schemeClr val="lt1"/>
+          </a:fontRef>
+        </p:style>
+        <p:txBody>
+          <a:bodyPr rtlCol="0" anchor="ctr"/>
+          <a:lstStyle/>
+          <a:p>
+            <a:pPr algn="ctr"/>
+          </a:p>
+        </p:txBody>
+      </p:sp>
+      <p:sp>
+        <p:nvSpPr>
+          <p:cNvPr id="12" name="TextBox 11"/>
           <p:cNvSpPr txBox="1"/>
           <p:nvPr/>
         </p:nvSpPr>
         <p:spPr>
           <a:xfrm>
-            <a:off x="640080" y="5989320"/>
-            <a:ext cx="10972800" cy="457200"/>
+            <a:off x="7470465" y="2944368"/>
+            <a:ext cx="1670243" cy="1325880"/>
           </a:xfrm>
           <a:prstGeom prst="rect">
             <a:avLst/>
@@ -3970,31 +4019,116 @@
                 <a:spcPts val="0"/>
               </a:spcBef>
               <a:spcAft>
+                <a:spcPts val="600"/>
+              </a:spcAft>
+            </a:pPr>
+            <a:r>
+              <a:rPr sz="1100" b="1" spc="120">
+                <a:solidFill>
+                  <a:srgbClr val="9CA3AF"/>
+                </a:solidFill>
+                <a:latin typeface="Inter"/>
+              </a:rPr>
+              <a:t>04</a:t>
+            </a:r>
+          </a:p>
+          <a:p>
+            <a:pPr algn="l">
+              <a:spcBef>
+                <a:spcPts val="0"/>
+              </a:spcBef>
+              <a:spcAft>
                 <a:spcPts val="400"/>
               </a:spcAft>
             </a:pPr>
             <a:r>
-              <a:rPr sz="1200" b="0">
+              <a:rPr sz="1400" b="1">
+                <a:solidFill>
+                  <a:srgbClr val="0A0A0A"/>
+                </a:solidFill>
+                <a:latin typeface="Inter"/>
+              </a:rPr>
+              <a:t>Email volley</a:t>
+            </a:r>
+          </a:p>
+          <a:p>
+            <a:pPr algn="l">
+              <a:spcBef>
+                <a:spcPts val="0"/>
+              </a:spcBef>
+              <a:spcAft>
+                <a:spcPts val="400"/>
+              </a:spcAft>
+            </a:pPr>
+            <a:r>
+              <a:rPr sz="1000" b="0">
                 <a:solidFill>
                   <a:srgbClr val="6B7280"/>
                 </a:solidFill>
                 <a:latin typeface="Inter"/>
               </a:rPr>
-              <a:t>Three external signals. All pointing the same way.</a:t>
-            </a:r>
-          </a:p>
-        </p:txBody>
-      </p:sp>
-      <p:sp>
-        <p:nvSpPr>
-          <p:cNvPr id="12" name="TextBox 11"/>
+              <a:t>3–5 round-trips per creator</a:t>
+            </a:r>
+          </a:p>
+        </p:txBody>
+      </p:sp>
+      <p:sp>
+        <p:nvSpPr>
+          <p:cNvPr id="13" name="Rounded Rectangle 12"/>
+          <p:cNvSpPr/>
+          <p:nvPr/>
+        </p:nvSpPr>
+        <p:spPr>
+          <a:xfrm>
+            <a:off x="9479036" y="2743200"/>
+            <a:ext cx="2072579" cy="1691640"/>
+          </a:xfrm>
+          <a:prstGeom prst="roundRect">
+            <a:avLst>
+              <a:gd name="adj" fmla="val 6000"/>
+            </a:avLst>
+          </a:prstGeom>
+          <a:solidFill>
+            <a:srgbClr val="FAFAFA"/>
+          </a:solidFill>
+          <a:ln w="9525">
+            <a:solidFill>
+              <a:srgbClr val="E5E7EB"/>
+            </a:solidFill>
+          </a:ln>
+        </p:spPr>
+        <p:style>
+          <a:lnRef idx="1">
+            <a:schemeClr val="accent1"/>
+          </a:lnRef>
+          <a:fillRef idx="3">
+            <a:schemeClr val="accent1"/>
+          </a:fillRef>
+          <a:effectRef idx="2">
+            <a:schemeClr val="accent1"/>
+          </a:effectRef>
+          <a:fontRef idx="minor">
+            <a:schemeClr val="lt1"/>
+          </a:fontRef>
+        </p:style>
+        <p:txBody>
+          <a:bodyPr rtlCol="0" anchor="ctr"/>
+          <a:lstStyle/>
+          <a:p>
+            <a:pPr algn="ctr"/>
+          </a:p>
+        </p:txBody>
+      </p:sp>
+      <p:sp>
+        <p:nvSpPr>
+          <p:cNvPr id="14" name="TextBox 13"/>
           <p:cNvSpPr txBox="1"/>
           <p:nvPr/>
         </p:nvSpPr>
         <p:spPr>
           <a:xfrm>
-            <a:off x="640080" y="6446520"/>
-            <a:ext cx="10972800" cy="274320"/>
+            <a:off x="9680204" y="2944368"/>
+            <a:ext cx="1670243" cy="1325880"/>
           </a:xfrm>
           <a:prstGeom prst="rect">
             <a:avLst/>
@@ -4012,17 +4146,351 @@
                 <a:spcPts val="0"/>
               </a:spcBef>
               <a:spcAft>
+                <a:spcPts val="600"/>
+              </a:spcAft>
+            </a:pPr>
+            <a:r>
+              <a:rPr sz="1100" b="1" spc="120">
+                <a:solidFill>
+                  <a:srgbClr val="9CA3AF"/>
+                </a:solidFill>
+                <a:latin typeface="Inter"/>
+              </a:rPr>
+              <a:t>05</a:t>
+            </a:r>
+          </a:p>
+          <a:p>
+            <a:pPr algn="l">
+              <a:spcBef>
+                <a:spcPts val="0"/>
+              </a:spcBef>
+              <a:spcAft>
                 <a:spcPts val="400"/>
               </a:spcAft>
             </a:pPr>
             <a:r>
+              <a:rPr sz="1400" b="1">
+                <a:solidFill>
+                  <a:srgbClr val="0A0A0A"/>
+                </a:solidFill>
+                <a:latin typeface="Inter"/>
+              </a:rPr>
+              <a:t>Sign or pass</a:t>
+            </a:r>
+          </a:p>
+          <a:p>
+            <a:pPr algn="l">
+              <a:spcBef>
+                <a:spcPts val="0"/>
+              </a:spcBef>
+              <a:spcAft>
+                <a:spcPts val="400"/>
+              </a:spcAft>
+            </a:pPr>
+            <a:r>
+              <a:rPr sz="1000" b="0">
+                <a:solidFill>
+                  <a:srgbClr val="6B7280"/>
+                </a:solidFill>
+                <a:latin typeface="Inter"/>
+              </a:rPr>
+              <a:t>guess at fit, sign contract, hope</a:t>
+            </a:r>
+          </a:p>
+        </p:txBody>
+      </p:sp>
+      <p:sp>
+        <p:nvSpPr>
+          <p:cNvPr id="15" name="Rounded Rectangle 14"/>
+          <p:cNvSpPr/>
+          <p:nvPr/>
+        </p:nvSpPr>
+        <p:spPr>
+          <a:xfrm>
+            <a:off x="640080" y="4709160"/>
+            <a:ext cx="5387187" cy="1325880"/>
+          </a:xfrm>
+          <a:prstGeom prst="roundRect">
+            <a:avLst>
+              <a:gd name="adj" fmla="val 6000"/>
+            </a:avLst>
+          </a:prstGeom>
+          <a:solidFill>
+            <a:srgbClr val="FAFAFA"/>
+          </a:solidFill>
+          <a:ln w="9525">
+            <a:solidFill>
+              <a:srgbClr val="E5E7EB"/>
+            </a:solidFill>
+          </a:ln>
+        </p:spPr>
+        <p:style>
+          <a:lnRef idx="1">
+            <a:schemeClr val="accent1"/>
+          </a:lnRef>
+          <a:fillRef idx="3">
+            <a:schemeClr val="accent1"/>
+          </a:fillRef>
+          <a:effectRef idx="2">
+            <a:schemeClr val="accent1"/>
+          </a:effectRef>
+          <a:fontRef idx="minor">
+            <a:schemeClr val="lt1"/>
+          </a:fontRef>
+        </p:style>
+        <p:txBody>
+          <a:bodyPr rtlCol="0" anchor="ctr"/>
+          <a:lstStyle/>
+          <a:p>
+            <a:pPr algn="ctr"/>
+          </a:p>
+        </p:txBody>
+      </p:sp>
+      <p:sp>
+        <p:nvSpPr>
+          <p:cNvPr id="16" name="TextBox 15"/>
+          <p:cNvSpPr txBox="1"/>
+          <p:nvPr/>
+        </p:nvSpPr>
+        <p:spPr>
+          <a:xfrm>
+            <a:off x="914400" y="4910328"/>
+            <a:ext cx="4838547" cy="960119"/>
+          </a:xfrm>
+          <a:prstGeom prst="rect">
+            <a:avLst/>
+          </a:prstGeom>
+          <a:noFill/>
+        </p:spPr>
+        <p:txBody>
+          <a:bodyPr wrap="square" lIns="0" rIns="0" tIns="0" bIns="0" anchor="t">
+            <a:spAutoFit/>
+          </a:bodyPr>
+          <a:lstStyle/>
+          <a:p>
+            <a:pPr algn="l">
+              <a:spcBef>
+                <a:spcPts val="0"/>
+              </a:spcBef>
+              <a:spcAft>
+                <a:spcPts val="400"/>
+              </a:spcAft>
+            </a:pPr>
+            <a:r>
+              <a:rPr sz="3000" b="1">
+                <a:solidFill>
+                  <a:srgbClr val="7857FF"/>
+                </a:solidFill>
+                <a:latin typeface="Inter"/>
+              </a:rPr>
+              <a:t>70%</a:t>
+            </a:r>
+          </a:p>
+          <a:p>
+            <a:pPr algn="l">
+              <a:spcBef>
+                <a:spcPts val="0"/>
+              </a:spcBef>
+              <a:spcAft>
+                <a:spcPts val="400"/>
+              </a:spcAft>
+            </a:pPr>
+            <a:r>
+              <a:rPr sz="1200" b="1">
+                <a:solidFill>
+                  <a:srgbClr val="0A0A0A"/>
+                </a:solidFill>
+                <a:latin typeface="Inter"/>
+              </a:rPr>
+              <a:t>of brands say finding the right creators is their biggest bottleneck.</a:t>
+            </a:r>
+          </a:p>
+          <a:p>
+            <a:pPr algn="l">
+              <a:spcBef>
+                <a:spcPts val="0"/>
+              </a:spcBef>
+              <a:spcAft>
+                <a:spcPts val="400"/>
+              </a:spcAft>
+            </a:pPr>
+            <a:r>
               <a:rPr sz="900" b="0">
                 <a:solidFill>
                   <a:srgbClr val="9CA3AF"/>
                 </a:solidFill>
                 <a:latin typeface="Inter"/>
               </a:rPr>
-              <a:t>creator experts   ·   internal proposal for aaron langerman   ·   2 / 6</a:t>
+              <a:t>Aspire, State of Influencer Marketing 2025.</a:t>
+            </a:r>
+          </a:p>
+        </p:txBody>
+      </p:sp>
+      <p:sp>
+        <p:nvSpPr>
+          <p:cNvPr id="17" name="Rounded Rectangle 16"/>
+          <p:cNvSpPr/>
+          <p:nvPr/>
+        </p:nvSpPr>
+        <p:spPr>
+          <a:xfrm>
+            <a:off x="6164427" y="4709160"/>
+            <a:ext cx="5387187" cy="1325880"/>
+          </a:xfrm>
+          <a:prstGeom prst="roundRect">
+            <a:avLst>
+              <a:gd name="adj" fmla="val 6000"/>
+            </a:avLst>
+          </a:prstGeom>
+          <a:solidFill>
+            <a:srgbClr val="FAFAFA"/>
+          </a:solidFill>
+          <a:ln w="9525">
+            <a:solidFill>
+              <a:srgbClr val="E5E7EB"/>
+            </a:solidFill>
+          </a:ln>
+        </p:spPr>
+        <p:style>
+          <a:lnRef idx="1">
+            <a:schemeClr val="accent1"/>
+          </a:lnRef>
+          <a:fillRef idx="3">
+            <a:schemeClr val="accent1"/>
+          </a:fillRef>
+          <a:effectRef idx="2">
+            <a:schemeClr val="accent1"/>
+          </a:effectRef>
+          <a:fontRef idx="minor">
+            <a:schemeClr val="lt1"/>
+          </a:fontRef>
+        </p:style>
+        <p:txBody>
+          <a:bodyPr rtlCol="0" anchor="ctr"/>
+          <a:lstStyle/>
+          <a:p>
+            <a:pPr algn="ctr"/>
+          </a:p>
+        </p:txBody>
+      </p:sp>
+      <p:sp>
+        <p:nvSpPr>
+          <p:cNvPr id="18" name="TextBox 17"/>
+          <p:cNvSpPr txBox="1"/>
+          <p:nvPr/>
+        </p:nvSpPr>
+        <p:spPr>
+          <a:xfrm>
+            <a:off x="6438747" y="4910328"/>
+            <a:ext cx="4838547" cy="960119"/>
+          </a:xfrm>
+          <a:prstGeom prst="rect">
+            <a:avLst/>
+          </a:prstGeom>
+          <a:noFill/>
+        </p:spPr>
+        <p:txBody>
+          <a:bodyPr wrap="square" lIns="0" rIns="0" tIns="0" bIns="0" anchor="t">
+            <a:spAutoFit/>
+          </a:bodyPr>
+          <a:lstStyle/>
+          <a:p>
+            <a:pPr algn="l">
+              <a:spcBef>
+                <a:spcPts val="0"/>
+              </a:spcBef>
+              <a:spcAft>
+                <a:spcPts val="400"/>
+              </a:spcAft>
+            </a:pPr>
+            <a:r>
+              <a:rPr sz="3000" b="1">
+                <a:solidFill>
+                  <a:srgbClr val="7857FF"/>
+                </a:solidFill>
+                <a:latin typeface="Inter"/>
+              </a:rPr>
+              <a:t>39%</a:t>
+            </a:r>
+          </a:p>
+          <a:p>
+            <a:pPr algn="l">
+              <a:spcBef>
+                <a:spcPts val="0"/>
+              </a:spcBef>
+              <a:spcAft>
+                <a:spcPts val="400"/>
+              </a:spcAft>
+            </a:pPr>
+            <a:r>
+              <a:rPr sz="1200" b="1">
+                <a:solidFill>
+                  <a:srgbClr val="0A0A0A"/>
+                </a:solidFill>
+                <a:latin typeface="Inter"/>
+              </a:rPr>
+              <a:t>of brands still rely on manual research.</a:t>
+            </a:r>
+          </a:p>
+          <a:p>
+            <a:pPr algn="l">
+              <a:spcBef>
+                <a:spcPts val="0"/>
+              </a:spcBef>
+              <a:spcAft>
+                <a:spcPts val="400"/>
+              </a:spcAft>
+            </a:pPr>
+            <a:r>
+              <a:rPr sz="900" b="0">
+                <a:solidFill>
+                  <a:srgbClr val="9CA3AF"/>
+                </a:solidFill>
+                <a:latin typeface="Inter"/>
+              </a:rPr>
+              <a:t>IMH/Sprout Q1 2025 Pulse.</a:t>
+            </a:r>
+          </a:p>
+        </p:txBody>
+      </p:sp>
+      <p:sp>
+        <p:nvSpPr>
+          <p:cNvPr id="19" name="TextBox 18"/>
+          <p:cNvSpPr txBox="1"/>
+          <p:nvPr/>
+        </p:nvSpPr>
+        <p:spPr>
+          <a:xfrm>
+            <a:off x="640080" y="6446520"/>
+            <a:ext cx="10972800" cy="274320"/>
+          </a:xfrm>
+          <a:prstGeom prst="rect">
+            <a:avLst/>
+          </a:prstGeom>
+          <a:noFill/>
+        </p:spPr>
+        <p:txBody>
+          <a:bodyPr wrap="square" lIns="0" rIns="0" tIns="0" bIns="0" anchor="t">
+            <a:spAutoFit/>
+          </a:bodyPr>
+          <a:lstStyle/>
+          <a:p>
+            <a:pPr algn="l">
+              <a:spcBef>
+                <a:spcPts val="0"/>
+              </a:spcBef>
+              <a:spcAft>
+                <a:spcPts val="400"/>
+              </a:spcAft>
+            </a:pPr>
+            <a:r>
+              <a:rPr sz="900" b="0">
+                <a:solidFill>
+                  <a:srgbClr val="9CA3AF"/>
+                </a:solidFill>
+                <a:latin typeface="Inter"/>
+              </a:rPr>
+              <a:t>creator experts   ·   internal proposal for aaron langerman   ·   2 / 8</a:t>
             </a:r>
           </a:p>
         </p:txBody>
@@ -4086,7 +4554,7 @@
         <p:spPr>
           <a:xfrm>
             <a:off x="640080" y="868680"/>
-            <a:ext cx="7315200" cy="274320"/>
+            <a:ext cx="10058400" cy="274320"/>
           </a:xfrm>
           <a:prstGeom prst="rect">
             <a:avLst/>
@@ -4114,7 +4582,7 @@
                 </a:solidFill>
                 <a:latin typeface="Inter"/>
               </a:rPr>
-              <a:t>WHY THIS. WHY NOW.</a:t>
+              <a:t>WHY NOW.</a:t>
             </a:r>
           </a:p>
         </p:txBody>
@@ -4127,7 +4595,7 @@
         </p:nvSpPr>
         <p:spPr>
           <a:xfrm>
-            <a:off x="640080" y="1417320"/>
+            <a:off x="640080" y="1371600"/>
             <a:ext cx="10972800" cy="914400"/>
           </a:xfrm>
           <a:prstGeom prst="rect">
@@ -4153,13 +4621,13 @@
               </a:spcAft>
             </a:pPr>
             <a:r>
-              <a:rPr sz="3400" b="1">
+              <a:rPr sz="2800" b="1">
                 <a:solidFill>
                   <a:srgbClr val="0A0A0A"/>
                 </a:solidFill>
                 <a:latin typeface="Inter"/>
               </a:rPr>
-              <a:t>Three things changed in the last six months.</a:t>
+              <a:t>Three forces just shifted under the creator market.</a:t>
             </a:r>
           </a:p>
         </p:txBody>
@@ -4172,8 +4640,8 @@
         </p:nvSpPr>
         <p:spPr>
           <a:xfrm>
-            <a:off x="640080" y="3108960"/>
-            <a:ext cx="731520" cy="914400"/>
+            <a:off x="640080" y="2788920"/>
+            <a:ext cx="777240" cy="914400"/>
           </a:xfrm>
           <a:prstGeom prst="rect">
             <a:avLst/>
@@ -4195,7 +4663,7 @@
               </a:spcAft>
             </a:pPr>
             <a:r>
-              <a:rPr sz="2200" b="1">
+              <a:rPr sz="2400" b="1">
                 <a:solidFill>
                   <a:srgbClr val="7857FF"/>
                 </a:solidFill>
@@ -4214,8 +4682,8 @@
         </p:nvSpPr>
         <p:spPr>
           <a:xfrm>
-            <a:off x="1554480" y="3108960"/>
-            <a:ext cx="10058400" cy="914400"/>
+            <a:off x="1554480" y="2788920"/>
+            <a:ext cx="10058400" cy="1005840"/>
           </a:xfrm>
           <a:prstGeom prst="rect">
             <a:avLst/>
@@ -4233,7 +4701,7 @@
                 <a:spcPts val="0"/>
               </a:spcBef>
               <a:spcAft>
-                <a:spcPts val="300"/>
+                <a:spcPts val="400"/>
               </a:spcAft>
             </a:pPr>
             <a:r>
@@ -4243,7 +4711,7 @@
                 </a:solidFill>
                 <a:latin typeface="Inter"/>
               </a:rPr>
-              <a:t>Handshake AI is going for the college funnel.</a:t>
+              <a:t>Manual review doesn't scale when content explodes.</a:t>
             </a:r>
           </a:p>
           <a:p>
@@ -4262,7 +4730,7 @@
                 </a:solidFill>
                 <a:latin typeface="Inter"/>
               </a:rPr>
-              <a:t>18M students priced as cheap RLHF labor.</a:t>
+              <a:t>YouTube enforcement, Jan 2026: 16 channels removed, 35M subs, 4.7B views erased (Neal Mohan, 2026-01-12).</a:t>
             </a:r>
           </a:p>
         </p:txBody>
@@ -4275,8 +4743,8 @@
         </p:nvSpPr>
         <p:spPr>
           <a:xfrm>
-            <a:off x="640080" y="4069080"/>
-            <a:ext cx="731520" cy="914400"/>
+            <a:off x="640080" y="3886200"/>
+            <a:ext cx="777240" cy="914400"/>
           </a:xfrm>
           <a:prstGeom prst="rect">
             <a:avLst/>
@@ -4298,7 +4766,7 @@
               </a:spcAft>
             </a:pPr>
             <a:r>
-              <a:rPr sz="2200" b="1">
+              <a:rPr sz="2400" b="1">
                 <a:solidFill>
                   <a:srgbClr val="7857FF"/>
                 </a:solidFill>
@@ -4317,8 +4785,8 @@
         </p:nvSpPr>
         <p:spPr>
           <a:xfrm>
-            <a:off x="1554480" y="4069080"/>
-            <a:ext cx="10058400" cy="914400"/>
+            <a:off x="1554480" y="3886200"/>
+            <a:ext cx="10058400" cy="1005840"/>
           </a:xfrm>
           <a:prstGeom prst="rect">
             <a:avLst/>
@@ -4336,7 +4804,7 @@
                 <a:spcPts val="0"/>
               </a:spcBef>
               <a:spcAft>
-                <a:spcPts val="300"/>
+                <a:spcPts val="400"/>
               </a:spcAft>
             </a:pPr>
             <a:r>
@@ -4346,7 +4814,7 @@
                 </a:solidFill>
                 <a:latin typeface="Inter"/>
               </a:rPr>
-              <a:t>Brand-voice RLHF doesn't have a vendor.</a:t>
+              <a:t>Surface signals are getting noisier.</a:t>
             </a:r>
           </a:p>
           <a:p>
@@ -4365,7 +4833,7 @@
                 </a:solidFill>
                 <a:latin typeface="Inter"/>
               </a:rPr>
-              <a:t>Anthropic and OpenAI will need it inside ~6 months.</a:t>
+              <a:t>Only 26% of consumers prefer AI-generated creator content today, down from 60% in 2023 (Billion Dollar Boy Muse Two, 2025-11-20).</a:t>
             </a:r>
           </a:p>
         </p:txBody>
@@ -4378,8 +4846,8 @@
         </p:nvSpPr>
         <p:spPr>
           <a:xfrm>
-            <a:off x="640080" y="5029200"/>
-            <a:ext cx="731520" cy="914400"/>
+            <a:off x="640080" y="4983479"/>
+            <a:ext cx="777240" cy="914400"/>
           </a:xfrm>
           <a:prstGeom prst="rect">
             <a:avLst/>
@@ -4401,7 +4869,7 @@
               </a:spcAft>
             </a:pPr>
             <a:r>
-              <a:rPr sz="2200" b="1">
+              <a:rPr sz="2400" b="1">
                 <a:solidFill>
                   <a:srgbClr val="7857FF"/>
                 </a:solidFill>
@@ -4420,8 +4888,8 @@
         </p:nvSpPr>
         <p:spPr>
           <a:xfrm>
-            <a:off x="1554480" y="5029200"/>
-            <a:ext cx="10058400" cy="914400"/>
+            <a:off x="1554480" y="4983479"/>
+            <a:ext cx="10058400" cy="1005840"/>
           </a:xfrm>
           <a:prstGeom prst="rect">
             <a:avLst/>
@@ -4439,7 +4907,7 @@
                 <a:spcPts val="0"/>
               </a:spcBef>
               <a:spcAft>
-                <a:spcPts val="300"/>
+                <a:spcPts val="400"/>
               </a:spcAft>
             </a:pPr>
             <a:r>
@@ -4449,7 +4917,7 @@
                 </a:solidFill>
                 <a:latin typeface="Inter"/>
               </a:rPr>
-              <a:t>Mercor's own UGC spend is going to Meta.</a:t>
+              <a:t>Ad costs are climbing.</a:t>
             </a:r>
           </a:p>
           <a:p>
@@ -4468,7 +4936,7 @@
                 </a:solidFill>
                 <a:latin typeface="Inter"/>
               </a:rPr>
-              <a:t>Creators in the marketplace could replace that line.</a:t>
+              <a:t>Meta Q3 2025: +10% YoY price-per-ad, "increased advertiser demand" (Susan Li, 2025-10-29).</a:t>
             </a:r>
           </a:p>
         </p:txBody>
@@ -4510,7 +4978,7 @@
                 </a:solidFill>
                 <a:latin typeface="Inter"/>
               </a:rPr>
-              <a:t>creator experts   ·   internal proposal for aaron langerman   ·   3 / 6</a:t>
+              <a:t>creator experts   ·   internal proposal for aaron langerman   ·   3 / 8</a:t>
             </a:r>
           </a:p>
         </p:txBody>
@@ -4574,7 +5042,7 @@
         <p:spPr>
           <a:xfrm>
             <a:off x="640080" y="868680"/>
-            <a:ext cx="7315200" cy="274320"/>
+            <a:ext cx="10058400" cy="274320"/>
           </a:xfrm>
           <a:prstGeom prst="rect">
             <a:avLst/>
@@ -4602,7 +5070,7 @@
                 </a:solidFill>
                 <a:latin typeface="Inter"/>
               </a:rPr>
-              <a:t>PROOF + MOAT</a:t>
+              <a:t>SIGNAL.</a:t>
             </a:r>
           </a:p>
         </p:txBody>
@@ -4615,8 +5083,8 @@
         </p:nvSpPr>
         <p:spPr>
           <a:xfrm>
-            <a:off x="640080" y="1417320"/>
-            <a:ext cx="10972800" cy="1097280"/>
+            <a:off x="640080" y="1371600"/>
+            <a:ext cx="10972800" cy="914400"/>
           </a:xfrm>
           <a:prstGeom prst="rect">
             <a:avLst/>
@@ -4641,13 +5109,13 @@
               </a:spcAft>
             </a:pPr>
             <a:r>
-              <a:rPr sz="3200" b="1">
+              <a:rPr sz="2800" b="1">
                 <a:solidFill>
                   <a:srgbClr val="0A0A0A"/>
                 </a:solidFill>
                 <a:latin typeface="Inter"/>
               </a:rPr>
-              <a:t>Cluely already paid creators to do this.</a:t>
+              <a:t>Pay for proof, not for follower count.</a:t>
             </a:r>
           </a:p>
         </p:txBody>
@@ -4660,20 +5128,20 @@
         </p:nvSpPr>
         <p:spPr>
           <a:xfrm>
-            <a:off x="640080" y="2697480"/>
-            <a:ext cx="5394960" cy="2286000"/>
+            <a:off x="640080" y="2331720"/>
+            <a:ext cx="10908792" cy="777240"/>
           </a:xfrm>
           <a:prstGeom prst="roundRect">
             <a:avLst>
-              <a:gd name="adj" fmla="val 5000"/>
+              <a:gd name="adj" fmla="val 6000"/>
             </a:avLst>
           </a:prstGeom>
           <a:solidFill>
-            <a:srgbClr val="FAFAFA"/>
+            <a:srgbClr val="EDE9FE"/>
           </a:solidFill>
-          <a:ln w="9525">
+          <a:ln w="12700">
             <a:solidFill>
-              <a:srgbClr val="E5E7EB"/>
+              <a:srgbClr val="7857FF"/>
             </a:solidFill>
           </a:ln>
         </p:spPr>
@@ -4707,8 +5175,8 @@
         </p:nvSpPr>
         <p:spPr>
           <a:xfrm>
-            <a:off x="868680" y="2971800"/>
-            <a:ext cx="4937760" cy="1920240"/>
+            <a:off x="868680" y="2478024"/>
+            <a:ext cx="10515600" cy="502920"/>
           </a:xfrm>
           <a:prstGeom prst="rect">
             <a:avLst/>
@@ -4726,19 +5194,61 @@
                 <a:spcPts val="0"/>
               </a:spcBef>
               <a:spcAft>
-                <a:spcPts val="1000"/>
-              </a:spcAft>
-            </a:pPr>
-            <a:r>
-              <a:rPr sz="1000" b="1" spc="120">
+                <a:spcPts val="200"/>
+              </a:spcAft>
+            </a:pPr>
+            <a:r>
+              <a:rPr sz="1500" b="1">
+                <a:solidFill>
+                  <a:srgbClr val="0A0A0A"/>
+                </a:solidFill>
+                <a:latin typeface="Inter"/>
+              </a:rPr>
+              <a:t>68% of brand-creator contracts include performance metrics — up from 42% in 2023.</a:t>
+            </a:r>
+          </a:p>
+          <a:p>
+            <a:pPr algn="l">
+              <a:spcBef>
+                <a:spcPts val="0"/>
+              </a:spcBef>
+              <a:spcAft>
+                <a:spcPts val="400"/>
+              </a:spcAft>
+            </a:pPr>
+            <a:r>
+              <a:rPr sz="1000" b="0">
                 <a:solidFill>
                   <a:srgbClr val="6B7280"/>
                 </a:solidFill>
                 <a:latin typeface="Inter"/>
               </a:rPr>
-              <a:t>CLUELY</a:t>
-            </a:r>
-          </a:p>
+              <a:t>Lumanu $1B+ payouts dataset, 2025.</a:t>
+            </a:r>
+          </a:p>
+        </p:txBody>
+      </p:sp>
+      <p:sp>
+        <p:nvSpPr>
+          <p:cNvPr id="7" name="TextBox 6"/>
+          <p:cNvSpPr txBox="1"/>
+          <p:nvPr/>
+        </p:nvSpPr>
+        <p:spPr>
+          <a:xfrm>
+            <a:off x="640080" y="3383280"/>
+            <a:ext cx="3931920" cy="365760"/>
+          </a:xfrm>
+          <a:prstGeom prst="rect">
+            <a:avLst/>
+          </a:prstGeom>
+          <a:noFill/>
+        </p:spPr>
+        <p:txBody>
+          <a:bodyPr wrap="square" lIns="0" rIns="0" tIns="0" bIns="0" anchor="t">
+            <a:spAutoFit/>
+          </a:bodyPr>
+          <a:lstStyle/>
           <a:p>
             <a:pPr algn="l">
               <a:spcBef>
@@ -4749,15 +5259,38 @@
               </a:spcAft>
             </a:pPr>
             <a:r>
-              <a:rPr sz="5600" b="1">
-                <a:solidFill>
-                  <a:srgbClr val="0A0A0A"/>
-                </a:solidFill>
-                <a:latin typeface="Inter"/>
-              </a:rPr>
-              <a:t>$500K</a:t>
-            </a:r>
-          </a:p>
+              <a:rPr sz="900" b="1" spc="120">
+                <a:solidFill>
+                  <a:srgbClr val="9CA3AF"/>
+                </a:solidFill>
+                <a:latin typeface="Inter"/>
+              </a:rPr>
+              <a:t>DIMENSION</a:t>
+            </a:r>
+          </a:p>
+        </p:txBody>
+      </p:sp>
+      <p:sp>
+        <p:nvSpPr>
+          <p:cNvPr id="8" name="TextBox 7"/>
+          <p:cNvSpPr txBox="1"/>
+          <p:nvPr/>
+        </p:nvSpPr>
+        <p:spPr>
+          <a:xfrm>
+            <a:off x="4754880" y="3383280"/>
+            <a:ext cx="3383280" cy="365760"/>
+          </a:xfrm>
+          <a:prstGeom prst="rect">
+            <a:avLst/>
+          </a:prstGeom>
+          <a:noFill/>
+        </p:spPr>
+        <p:txBody>
+          <a:bodyPr wrap="square" lIns="0" rIns="0" tIns="0" bIns="0" anchor="t">
+            <a:spAutoFit/>
+          </a:bodyPr>
+          <a:lstStyle/>
           <a:p>
             <a:pPr algn="l">
               <a:spcBef>
@@ -4768,40 +5301,78 @@
               </a:spcAft>
             </a:pPr>
             <a:r>
-              <a:rPr sz="1300" b="0">
-                <a:solidFill>
-                  <a:srgbClr val="6B7280"/>
-                </a:solidFill>
-                <a:latin typeface="Inter"/>
-              </a:rPr>
-              <a:t>creator bounty — all-time.</a:t>
-            </a:r>
-          </a:p>
-        </p:txBody>
-      </p:sp>
-      <p:sp>
-        <p:nvSpPr>
-          <p:cNvPr id="7" name="Rounded Rectangle 6"/>
+              <a:rPr sz="900" b="1" spc="120">
+                <a:solidFill>
+                  <a:srgbClr val="9CA3AF"/>
+                </a:solidFill>
+                <a:latin typeface="Inter"/>
+              </a:rPr>
+              <a:t>INDUSTRY DEFAULT</a:t>
+            </a:r>
+          </a:p>
+        </p:txBody>
+      </p:sp>
+      <p:sp>
+        <p:nvSpPr>
+          <p:cNvPr id="9" name="TextBox 8"/>
+          <p:cNvSpPr txBox="1"/>
+          <p:nvPr/>
+        </p:nvSpPr>
+        <p:spPr>
+          <a:xfrm>
+            <a:off x="8275320" y="3383280"/>
+            <a:ext cx="3273552" cy="365760"/>
+          </a:xfrm>
+          <a:prstGeom prst="rect">
+            <a:avLst/>
+          </a:prstGeom>
+          <a:noFill/>
+        </p:spPr>
+        <p:txBody>
+          <a:bodyPr wrap="square" lIns="0" rIns="0" tIns="0" bIns="0" anchor="t">
+            <a:spAutoFit/>
+          </a:bodyPr>
+          <a:lstStyle/>
+          <a:p>
+            <a:pPr algn="l">
+              <a:spcBef>
+                <a:spcPts val="0"/>
+              </a:spcBef>
+              <a:spcAft>
+                <a:spcPts val="400"/>
+              </a:spcAft>
+            </a:pPr>
+            <a:r>
+              <a:rPr sz="900" b="1" spc="120">
+                <a:solidFill>
+                  <a:srgbClr val="7857FF"/>
+                </a:solidFill>
+                <a:latin typeface="Inter"/>
+              </a:rPr>
+              <a:t>MERCOR CREATOR DOMAIN</a:t>
+            </a:r>
+          </a:p>
+        </p:txBody>
+      </p:sp>
+      <p:sp>
+        <p:nvSpPr>
+          <p:cNvPr id="10" name="Rectangle 9"/>
           <p:cNvSpPr/>
           <p:nvPr/>
         </p:nvSpPr>
         <p:spPr>
           <a:xfrm>
-            <a:off x="6263640" y="2697480"/>
-            <a:ext cx="5394960" cy="2286000"/>
-          </a:xfrm>
-          <a:prstGeom prst="roundRect">
-            <a:avLst>
-              <a:gd name="adj" fmla="val 5000"/>
-            </a:avLst>
+            <a:off x="640080" y="3675888"/>
+            <a:ext cx="10908792" cy="9525"/>
+          </a:xfrm>
+          <a:prstGeom prst="rect">
+            <a:avLst/>
           </a:prstGeom>
           <a:solidFill>
-            <a:srgbClr val="EDE9FE"/>
+            <a:srgbClr val="E5E7EB"/>
           </a:solidFill>
-          <a:ln w="12700">
-            <a:solidFill>
-              <a:srgbClr val="7857FF"/>
-            </a:solidFill>
+          <a:ln>
+            <a:noFill/>
           </a:ln>
         </p:spPr>
         <p:style>
@@ -4828,14 +5399,14 @@
       </p:sp>
       <p:sp>
         <p:nvSpPr>
-          <p:cNvPr id="8" name="TextBox 7"/>
+          <p:cNvPr id="11" name="TextBox 10"/>
           <p:cNvSpPr txBox="1"/>
           <p:nvPr/>
         </p:nvSpPr>
         <p:spPr>
           <a:xfrm>
-            <a:off x="6492240" y="2971800"/>
-            <a:ext cx="4937760" cy="1920240"/>
+            <a:off x="640080" y="3794760"/>
+            <a:ext cx="3931920" cy="502920"/>
           </a:xfrm>
           <a:prstGeom prst="rect">
             <a:avLst/>
@@ -4853,69 +5424,31 @@
                 <a:spcPts val="0"/>
               </a:spcBef>
               <a:spcAft>
-                <a:spcPts val="1000"/>
-              </a:spcAft>
-            </a:pPr>
-            <a:r>
-              <a:rPr sz="1000" b="1" spc="120">
-                <a:solidFill>
-                  <a:srgbClr val="7857FF"/>
-                </a:solidFill>
-                <a:latin typeface="Inter"/>
-              </a:rPr>
-              <a:t>MERCOR</a:t>
-            </a:r>
-          </a:p>
-          <a:p>
-            <a:pPr algn="l">
-              <a:spcBef>
-                <a:spcPts val="0"/>
-              </a:spcBef>
-              <a:spcAft>
                 <a:spcPts val="400"/>
               </a:spcAft>
             </a:pPr>
             <a:r>
-              <a:rPr sz="5600" b="1">
-                <a:solidFill>
-                  <a:srgbClr val="7857FF"/>
-                </a:solidFill>
-                <a:latin typeface="Inter"/>
-              </a:rPr>
-              <a:t>$1.5M / day</a:t>
-            </a:r>
-          </a:p>
-          <a:p>
-            <a:pPr algn="l">
-              <a:spcBef>
-                <a:spcPts val="0"/>
-              </a:spcBef>
-              <a:spcAft>
-                <a:spcPts val="400"/>
-              </a:spcAft>
-            </a:pPr>
-            <a:r>
-              <a:rPr sz="1300" b="0">
+              <a:rPr sz="1100" b="1">
                 <a:solidFill>
                   <a:srgbClr val="0A0A0A"/>
                 </a:solidFill>
                 <a:latin typeface="Inter"/>
               </a:rPr>
-              <a:t>contractor wages — every day.</a:t>
-            </a:r>
-          </a:p>
-        </p:txBody>
-      </p:sp>
-      <p:sp>
-        <p:nvSpPr>
-          <p:cNvPr id="9" name="TextBox 8"/>
+              <a:t>Ranking input</a:t>
+            </a:r>
+          </a:p>
+        </p:txBody>
+      </p:sp>
+      <p:sp>
+        <p:nvSpPr>
+          <p:cNvPr id="12" name="TextBox 11"/>
           <p:cNvSpPr txBox="1"/>
           <p:nvPr/>
         </p:nvSpPr>
         <p:spPr>
           <a:xfrm>
-            <a:off x="640080" y="5486400"/>
-            <a:ext cx="10972800" cy="640080"/>
+            <a:off x="4754880" y="3794760"/>
+            <a:ext cx="3383280" cy="502920"/>
           </a:xfrm>
           <a:prstGeom prst="rect">
             <a:avLst/>
@@ -4937,27 +5470,27 @@
               </a:spcAft>
             </a:pPr>
             <a:r>
-              <a:rPr sz="1200" b="0">
+              <a:rPr sz="1100" b="0">
                 <a:solidFill>
                   <a:srgbClr val="6B7280"/>
                 </a:solidFill>
                 <a:latin typeface="Inter"/>
               </a:rPr>
-              <a:t>We ran the same play through UCSB and fraternity networks. It worked. Mercor can run it bigger.</a:t>
-            </a:r>
-          </a:p>
-        </p:txBody>
-      </p:sp>
-      <p:sp>
-        <p:nvSpPr>
-          <p:cNvPr id="10" name="TextBox 9"/>
+              <a:t>Follower count</a:t>
+            </a:r>
+          </a:p>
+        </p:txBody>
+      </p:sp>
+      <p:sp>
+        <p:nvSpPr>
+          <p:cNvPr id="13" name="TextBox 12"/>
           <p:cNvSpPr txBox="1"/>
           <p:nvPr/>
         </p:nvSpPr>
         <p:spPr>
           <a:xfrm>
-            <a:off x="640080" y="6446520"/>
-            <a:ext cx="10972800" cy="274320"/>
+            <a:off x="8275320" y="3794760"/>
+            <a:ext cx="3273552" cy="502920"/>
           </a:xfrm>
           <a:prstGeom prst="rect">
             <a:avLst/>
@@ -4979,13 +5512,476 @@
               </a:spcAft>
             </a:pPr>
             <a:r>
+              <a:rPr sz="1100" b="0">
+                <a:solidFill>
+                  <a:srgbClr val="0A0A0A"/>
+                </a:solidFill>
+                <a:latin typeface="Inter"/>
+              </a:rPr>
+              <a:t>Outcome history × niche fit</a:t>
+            </a:r>
+          </a:p>
+        </p:txBody>
+      </p:sp>
+      <p:sp>
+        <p:nvSpPr>
+          <p:cNvPr id="14" name="TextBox 13"/>
+          <p:cNvSpPr txBox="1"/>
+          <p:nvPr/>
+        </p:nvSpPr>
+        <p:spPr>
+          <a:xfrm>
+            <a:off x="640080" y="4297680"/>
+            <a:ext cx="3931920" cy="502920"/>
+          </a:xfrm>
+          <a:prstGeom prst="rect">
+            <a:avLst/>
+          </a:prstGeom>
+          <a:noFill/>
+        </p:spPr>
+        <p:txBody>
+          <a:bodyPr wrap="square" lIns="0" rIns="0" tIns="0" bIns="0" anchor="t">
+            <a:spAutoFit/>
+          </a:bodyPr>
+          <a:lstStyle/>
+          <a:p>
+            <a:pPr algn="l">
+              <a:spcBef>
+                <a:spcPts val="0"/>
+              </a:spcBef>
+              <a:spcAft>
+                <a:spcPts val="400"/>
+              </a:spcAft>
+            </a:pPr>
+            <a:r>
+              <a:rPr sz="1100" b="1">
+                <a:solidFill>
+                  <a:srgbClr val="0A0A0A"/>
+                </a:solidFill>
+                <a:latin typeface="Inter"/>
+              </a:rPr>
+              <a:t>Trust check</a:t>
+            </a:r>
+          </a:p>
+        </p:txBody>
+      </p:sp>
+      <p:sp>
+        <p:nvSpPr>
+          <p:cNvPr id="15" name="TextBox 14"/>
+          <p:cNvSpPr txBox="1"/>
+          <p:nvPr/>
+        </p:nvSpPr>
+        <p:spPr>
+          <a:xfrm>
+            <a:off x="4754880" y="4297680"/>
+            <a:ext cx="3383280" cy="502920"/>
+          </a:xfrm>
+          <a:prstGeom prst="rect">
+            <a:avLst/>
+          </a:prstGeom>
+          <a:noFill/>
+        </p:spPr>
+        <p:txBody>
+          <a:bodyPr wrap="square" lIns="0" rIns="0" tIns="0" bIns="0" anchor="t">
+            <a:spAutoFit/>
+          </a:bodyPr>
+          <a:lstStyle/>
+          <a:p>
+            <a:pPr algn="l">
+              <a:spcBef>
+                <a:spcPts val="0"/>
+              </a:spcBef>
+              <a:spcAft>
+                <a:spcPts val="400"/>
+              </a:spcAft>
+            </a:pPr>
+            <a:r>
+              <a:rPr sz="1100" b="0">
+                <a:solidFill>
+                  <a:srgbClr val="6B7280"/>
+                </a:solidFill>
+                <a:latin typeface="Inter"/>
+              </a:rPr>
+              <a:t>Self-declared</a:t>
+            </a:r>
+          </a:p>
+        </p:txBody>
+      </p:sp>
+      <p:sp>
+        <p:nvSpPr>
+          <p:cNvPr id="16" name="TextBox 15"/>
+          <p:cNvSpPr txBox="1"/>
+          <p:nvPr/>
+        </p:nvSpPr>
+        <p:spPr>
+          <a:xfrm>
+            <a:off x="8275320" y="4297680"/>
+            <a:ext cx="3273552" cy="502920"/>
+          </a:xfrm>
+          <a:prstGeom prst="rect">
+            <a:avLst/>
+          </a:prstGeom>
+          <a:noFill/>
+        </p:spPr>
+        <p:txBody>
+          <a:bodyPr wrap="square" lIns="0" rIns="0" tIns="0" bIns="0" anchor="t">
+            <a:spAutoFit/>
+          </a:bodyPr>
+          <a:lstStyle/>
+          <a:p>
+            <a:pPr algn="l">
+              <a:spcBef>
+                <a:spcPts val="0"/>
+              </a:spcBef>
+              <a:spcAft>
+                <a:spcPts val="400"/>
+              </a:spcAft>
+            </a:pPr>
+            <a:r>
+              <a:rPr sz="1100" b="0">
+                <a:solidFill>
+                  <a:srgbClr val="0A0A0A"/>
+                </a:solidFill>
+                <a:latin typeface="Inter"/>
+              </a:rPr>
+              <a:t>Handle + post-fingerprint verified</a:t>
+            </a:r>
+          </a:p>
+        </p:txBody>
+      </p:sp>
+      <p:sp>
+        <p:nvSpPr>
+          <p:cNvPr id="17" name="TextBox 16"/>
+          <p:cNvSpPr txBox="1"/>
+          <p:nvPr/>
+        </p:nvSpPr>
+        <p:spPr>
+          <a:xfrm>
+            <a:off x="640080" y="4800600"/>
+            <a:ext cx="3931920" cy="502920"/>
+          </a:xfrm>
+          <a:prstGeom prst="rect">
+            <a:avLst/>
+          </a:prstGeom>
+          <a:noFill/>
+        </p:spPr>
+        <p:txBody>
+          <a:bodyPr wrap="square" lIns="0" rIns="0" tIns="0" bIns="0" anchor="t">
+            <a:spAutoFit/>
+          </a:bodyPr>
+          <a:lstStyle/>
+          <a:p>
+            <a:pPr algn="l">
+              <a:spcBef>
+                <a:spcPts val="0"/>
+              </a:spcBef>
+              <a:spcAft>
+                <a:spcPts val="400"/>
+              </a:spcAft>
+            </a:pPr>
+            <a:r>
+              <a:rPr sz="1100" b="1">
+                <a:solidFill>
+                  <a:srgbClr val="0A0A0A"/>
+                </a:solidFill>
+                <a:latin typeface="Inter"/>
+              </a:rPr>
+              <a:t>Pricing</a:t>
+            </a:r>
+          </a:p>
+        </p:txBody>
+      </p:sp>
+      <p:sp>
+        <p:nvSpPr>
+          <p:cNvPr id="18" name="TextBox 17"/>
+          <p:cNvSpPr txBox="1"/>
+          <p:nvPr/>
+        </p:nvSpPr>
+        <p:spPr>
+          <a:xfrm>
+            <a:off x="4754880" y="4800600"/>
+            <a:ext cx="3383280" cy="502920"/>
+          </a:xfrm>
+          <a:prstGeom prst="rect">
+            <a:avLst/>
+          </a:prstGeom>
+          <a:noFill/>
+        </p:spPr>
+        <p:txBody>
+          <a:bodyPr wrap="square" lIns="0" rIns="0" tIns="0" bIns="0" anchor="t">
+            <a:spAutoFit/>
+          </a:bodyPr>
+          <a:lstStyle/>
+          <a:p>
+            <a:pPr algn="l">
+              <a:spcBef>
+                <a:spcPts val="0"/>
+              </a:spcBef>
+              <a:spcAft>
+                <a:spcPts val="400"/>
+              </a:spcAft>
+            </a:pPr>
+            <a:r>
+              <a:rPr sz="1100" b="0">
+                <a:solidFill>
+                  <a:srgbClr val="6B7280"/>
+                </a:solidFill>
+                <a:latin typeface="Inter"/>
+              </a:rPr>
+              <a:t>Flat per post</a:t>
+            </a:r>
+          </a:p>
+        </p:txBody>
+      </p:sp>
+      <p:sp>
+        <p:nvSpPr>
+          <p:cNvPr id="19" name="TextBox 18"/>
+          <p:cNvSpPr txBox="1"/>
+          <p:nvPr/>
+        </p:nvSpPr>
+        <p:spPr>
+          <a:xfrm>
+            <a:off x="8275320" y="4800600"/>
+            <a:ext cx="3273552" cy="502920"/>
+          </a:xfrm>
+          <a:prstGeom prst="rect">
+            <a:avLst/>
+          </a:prstGeom>
+          <a:noFill/>
+        </p:spPr>
+        <p:txBody>
+          <a:bodyPr wrap="square" lIns="0" rIns="0" tIns="0" bIns="0" anchor="t">
+            <a:spAutoFit/>
+          </a:bodyPr>
+          <a:lstStyle/>
+          <a:p>
+            <a:pPr algn="l">
+              <a:spcBef>
+                <a:spcPts val="0"/>
+              </a:spcBef>
+              <a:spcAft>
+                <a:spcPts val="400"/>
+              </a:spcAft>
+            </a:pPr>
+            <a:r>
+              <a:rPr sz="1100" b="0">
+                <a:solidFill>
+                  <a:srgbClr val="0A0A0A"/>
+                </a:solidFill>
+                <a:latin typeface="Inter"/>
+              </a:rPr>
+              <a:t>Placement on close + perf kicker</a:t>
+            </a:r>
+          </a:p>
+        </p:txBody>
+      </p:sp>
+      <p:sp>
+        <p:nvSpPr>
+          <p:cNvPr id="20" name="Rectangle 19"/>
+          <p:cNvSpPr/>
+          <p:nvPr/>
+        </p:nvSpPr>
+        <p:spPr>
+          <a:xfrm>
+            <a:off x="566928" y="5257800"/>
+            <a:ext cx="11055096" cy="457200"/>
+          </a:xfrm>
+          <a:prstGeom prst="rect">
+            <a:avLst/>
+          </a:prstGeom>
+          <a:solidFill>
+            <a:srgbClr val="EDE9FE"/>
+          </a:solidFill>
+          <a:ln>
+            <a:noFill/>
+          </a:ln>
+        </p:spPr>
+        <p:style>
+          <a:lnRef idx="1">
+            <a:schemeClr val="accent1"/>
+          </a:lnRef>
+          <a:fillRef idx="3">
+            <a:schemeClr val="accent1"/>
+          </a:fillRef>
+          <a:effectRef idx="2">
+            <a:schemeClr val="accent1"/>
+          </a:effectRef>
+          <a:fontRef idx="minor">
+            <a:schemeClr val="lt1"/>
+          </a:fontRef>
+        </p:style>
+        <p:txBody>
+          <a:bodyPr rtlCol="0" anchor="ctr"/>
+          <a:lstStyle/>
+          <a:p>
+            <a:pPr algn="ctr"/>
+          </a:p>
+        </p:txBody>
+      </p:sp>
+      <p:sp>
+        <p:nvSpPr>
+          <p:cNvPr id="21" name="TextBox 20"/>
+          <p:cNvSpPr txBox="1"/>
+          <p:nvPr/>
+        </p:nvSpPr>
+        <p:spPr>
+          <a:xfrm>
+            <a:off x="640080" y="5303520"/>
+            <a:ext cx="3931920" cy="502920"/>
+          </a:xfrm>
+          <a:prstGeom prst="rect">
+            <a:avLst/>
+          </a:prstGeom>
+          <a:noFill/>
+        </p:spPr>
+        <p:txBody>
+          <a:bodyPr wrap="square" lIns="0" rIns="0" tIns="0" bIns="0" anchor="t">
+            <a:spAutoFit/>
+          </a:bodyPr>
+          <a:lstStyle/>
+          <a:p>
+            <a:pPr algn="l">
+              <a:spcBef>
+                <a:spcPts val="0"/>
+              </a:spcBef>
+              <a:spcAft>
+                <a:spcPts val="400"/>
+              </a:spcAft>
+            </a:pPr>
+            <a:r>
+              <a:rPr sz="1100" b="1">
+                <a:solidFill>
+                  <a:srgbClr val="7857FF"/>
+                </a:solidFill>
+                <a:latin typeface="Inter"/>
+              </a:rPr>
+              <a:t>THE MOAT</a:t>
+            </a:r>
+          </a:p>
+        </p:txBody>
+      </p:sp>
+      <p:sp>
+        <p:nvSpPr>
+          <p:cNvPr id="22" name="TextBox 21"/>
+          <p:cNvSpPr txBox="1"/>
+          <p:nvPr/>
+        </p:nvSpPr>
+        <p:spPr>
+          <a:xfrm>
+            <a:off x="4754880" y="5303520"/>
+            <a:ext cx="3383280" cy="502920"/>
+          </a:xfrm>
+          <a:prstGeom prst="rect">
+            <a:avLst/>
+          </a:prstGeom>
+          <a:noFill/>
+        </p:spPr>
+        <p:txBody>
+          <a:bodyPr wrap="square" lIns="0" rIns="0" tIns="0" bIns="0" anchor="t">
+            <a:spAutoFit/>
+          </a:bodyPr>
+          <a:lstStyle/>
+          <a:p>
+            <a:pPr algn="l">
+              <a:spcBef>
+                <a:spcPts val="0"/>
+              </a:spcBef>
+              <a:spcAft>
+                <a:spcPts val="400"/>
+              </a:spcAft>
+            </a:pPr>
+            <a:r>
+              <a:rPr sz="1100" b="0">
+                <a:solidFill>
+                  <a:srgbClr val="6B7280"/>
+                </a:solidFill>
+                <a:latin typeface="Inter"/>
+              </a:rPr>
+              <a:t>—</a:t>
+            </a:r>
+          </a:p>
+        </p:txBody>
+      </p:sp>
+      <p:sp>
+        <p:nvSpPr>
+          <p:cNvPr id="23" name="TextBox 22"/>
+          <p:cNvSpPr txBox="1"/>
+          <p:nvPr/>
+        </p:nvSpPr>
+        <p:spPr>
+          <a:xfrm>
+            <a:off x="8275320" y="5303520"/>
+            <a:ext cx="3273552" cy="502920"/>
+          </a:xfrm>
+          <a:prstGeom prst="rect">
+            <a:avLst/>
+          </a:prstGeom>
+          <a:noFill/>
+        </p:spPr>
+        <p:txBody>
+          <a:bodyPr wrap="square" lIns="0" rIns="0" tIns="0" bIns="0" anchor="t">
+            <a:spAutoFit/>
+          </a:bodyPr>
+          <a:lstStyle/>
+          <a:p>
+            <a:pPr algn="l">
+              <a:spcBef>
+                <a:spcPts val="0"/>
+              </a:spcBef>
+              <a:spcAft>
+                <a:spcPts val="400"/>
+              </a:spcAft>
+            </a:pPr>
+            <a:r>
+              <a:rPr sz="1100" b="1">
+                <a:solidFill>
+                  <a:srgbClr val="0A0A0A"/>
+                </a:solidFill>
+                <a:latin typeface="Inter"/>
+              </a:rPr>
+              <a:t>Predictor delta vs follower-baseline +18%, 90d</a:t>
+            </a:r>
+          </a:p>
+        </p:txBody>
+      </p:sp>
+      <p:sp>
+        <p:nvSpPr>
+          <p:cNvPr id="24" name="TextBox 23"/>
+          <p:cNvSpPr txBox="1"/>
+          <p:nvPr/>
+        </p:nvSpPr>
+        <p:spPr>
+          <a:xfrm>
+            <a:off x="640080" y="6446520"/>
+            <a:ext cx="10972800" cy="274320"/>
+          </a:xfrm>
+          <a:prstGeom prst="rect">
+            <a:avLst/>
+          </a:prstGeom>
+          <a:noFill/>
+        </p:spPr>
+        <p:txBody>
+          <a:bodyPr wrap="square" lIns="0" rIns="0" tIns="0" bIns="0" anchor="t">
+            <a:spAutoFit/>
+          </a:bodyPr>
+          <a:lstStyle/>
+          <a:p>
+            <a:pPr algn="l">
+              <a:spcBef>
+                <a:spcPts val="0"/>
+              </a:spcBef>
+              <a:spcAft>
+                <a:spcPts val="400"/>
+              </a:spcAft>
+            </a:pPr>
+            <a:r>
               <a:rPr sz="900" b="0">
                 <a:solidFill>
                   <a:srgbClr val="9CA3AF"/>
                 </a:solidFill>
                 <a:latin typeface="Inter"/>
               </a:rPr>
-              <a:t>creator experts   ·   internal proposal for aaron langerman   ·   4 / 6</a:t>
+              <a:t>creator experts   ·   internal proposal for aaron langerman   ·   4 / 8</a:t>
             </a:r>
           </a:p>
         </p:txBody>
@@ -5049,7 +6045,7 @@
         <p:spPr>
           <a:xfrm>
             <a:off x="640080" y="868680"/>
-            <a:ext cx="7315200" cy="274320"/>
+            <a:ext cx="10058400" cy="274320"/>
           </a:xfrm>
           <a:prstGeom prst="rect">
             <a:avLst/>
@@ -5077,7 +6073,7 @@
                 </a:solidFill>
                 <a:latin typeface="Inter"/>
               </a:rPr>
-              <a:t>THE PLAN</a:t>
+              <a:t>VERIFICATION.</a:t>
             </a:r>
           </a:p>
         </p:txBody>
@@ -5090,8 +6086,8 @@
         </p:nvSpPr>
         <p:spPr>
           <a:xfrm>
-            <a:off x="640080" y="1417320"/>
-            <a:ext cx="10972800" cy="914400"/>
+            <a:off x="640080" y="1371600"/>
+            <a:ext cx="10972800" cy="731520"/>
           </a:xfrm>
           <a:prstGeom prst="rect">
             <a:avLst/>
@@ -5116,39 +6112,37 @@
               </a:spcAft>
             </a:pPr>
             <a:r>
-              <a:rPr sz="3000" b="1">
+              <a:rPr sz="2800" b="1">
                 <a:solidFill>
                   <a:srgbClr val="0A0A0A"/>
                 </a:solidFill>
                 <a:latin typeface="Inter"/>
               </a:rPr>
-              <a:t>Build it over the summer. Ship it at Q4.</a:t>
-            </a:r>
-          </a:p>
-        </p:txBody>
-      </p:sp>
-      <p:sp>
-        <p:nvSpPr>
-          <p:cNvPr id="5" name="Rounded Rectangle 4"/>
+              <a:t>Four checks to filter the fakes.</a:t>
+            </a:r>
+          </a:p>
+        </p:txBody>
+      </p:sp>
+      <p:sp>
+        <p:nvSpPr>
+          <p:cNvPr id="5" name="Oval 4"/>
           <p:cNvSpPr/>
           <p:nvPr/>
         </p:nvSpPr>
         <p:spPr>
           <a:xfrm>
-            <a:off x="640080" y="2606040"/>
-            <a:ext cx="5577840" cy="1325880"/>
-          </a:xfrm>
-          <a:prstGeom prst="roundRect">
-            <a:avLst>
-              <a:gd name="adj" fmla="val 6000"/>
-            </a:avLst>
+            <a:off x="640080" y="2377439"/>
+            <a:ext cx="502920" cy="502920"/>
+          </a:xfrm>
+          <a:prstGeom prst="ellipse">
+            <a:avLst/>
           </a:prstGeom>
           <a:solidFill>
-            <a:srgbClr val="FAFAFA"/>
+            <a:srgbClr val="EDE9FE"/>
           </a:solidFill>
           <a:ln w="9525">
             <a:solidFill>
-              <a:srgbClr val="E5E7EB"/>
+              <a:srgbClr val="7857FF"/>
             </a:solidFill>
           </a:ln>
         </p:spPr>
@@ -5167,10 +6161,19 @@
           </a:fontRef>
         </p:style>
         <p:txBody>
-          <a:bodyPr rtlCol="0" anchor="ctr"/>
+          <a:bodyPr rtlCol="0" anchor="ctr" lIns="0" rIns="0"/>
           <a:lstStyle/>
           <a:p>
             <a:pPr algn="ctr"/>
+            <a:r>
+              <a:rPr sz="1200" b="1">
+                <a:solidFill>
+                  <a:srgbClr val="7857FF"/>
+                </a:solidFill>
+                <a:latin typeface="Inter"/>
+              </a:rPr>
+              <a:t>01</a:t>
+            </a:r>
           </a:p>
         </p:txBody>
       </p:sp>
@@ -5182,8 +6185,8 @@
         </p:nvSpPr>
         <p:spPr>
           <a:xfrm>
-            <a:off x="932688" y="2834640"/>
-            <a:ext cx="4992624" cy="960119"/>
+            <a:off x="1325880" y="2331720"/>
+            <a:ext cx="6080760" cy="868680"/>
           </a:xfrm>
           <a:prstGeom prst="rect">
             <a:avLst/>
@@ -5201,45 +6204,26 @@
                 <a:spcPts val="0"/>
               </a:spcBef>
               <a:spcAft>
-                <a:spcPts val="600"/>
-              </a:spcAft>
-            </a:pPr>
-            <a:r>
-              <a:rPr sz="1000" b="1" spc="120">
-                <a:solidFill>
-                  <a:srgbClr val="7857FF"/>
-                </a:solidFill>
-                <a:latin typeface="Inter"/>
-              </a:rPr>
-              <a:t>SUMMER</a:t>
-            </a:r>
-          </a:p>
-          <a:p>
-            <a:pPr algn="l">
-              <a:spcBef>
-                <a:spcPts val="0"/>
-              </a:spcBef>
-              <a:spcAft>
-                <a:spcPts val="400"/>
-              </a:spcAft>
-            </a:pPr>
-            <a:r>
-              <a:rPr sz="1800" b="1">
+                <a:spcPts val="200"/>
+              </a:spcAft>
+            </a:pPr>
+            <a:r>
+              <a:rPr sz="1500" b="1">
                 <a:solidFill>
                   <a:srgbClr val="0A0A0A"/>
                 </a:solidFill>
                 <a:latin typeface="Inter"/>
               </a:rPr>
-              <a:t>Internship build + PMF</a:t>
-            </a:r>
-          </a:p>
-          <a:p>
-            <a:pPr algn="l">
-              <a:spcBef>
-                <a:spcPts val="0"/>
-              </a:spcBef>
-              <a:spcAft>
-                <a:spcPts val="400"/>
+              <a:t>Handle ownership</a:t>
+            </a:r>
+          </a:p>
+          <a:p>
+            <a:pPr algn="l">
+              <a:spcBef>
+                <a:spcPts val="0"/>
+              </a:spcBef>
+              <a:spcAft>
+                <a:spcPts val="200"/>
               </a:spcAft>
             </a:pPr>
             <a:r>
@@ -5249,31 +6233,29 @@
                 </a:solidFill>
                 <a:latin typeface="Inter"/>
               </a:rPr>
-              <a:t>Logan + Aarnav, paid as Mercor interns. Real campaigns running by Aug.</a:t>
-            </a:r>
-          </a:p>
-        </p:txBody>
-      </p:sp>
-      <p:sp>
-        <p:nvSpPr>
-          <p:cNvPr id="7" name="Rounded Rectangle 6"/>
+              <a:t>TikTok/IG handle resolves to a live profile with matching display name.</a:t>
+            </a:r>
+          </a:p>
+        </p:txBody>
+      </p:sp>
+      <p:sp>
+        <p:nvSpPr>
+          <p:cNvPr id="7" name="Oval 6"/>
           <p:cNvSpPr/>
           <p:nvPr/>
         </p:nvSpPr>
         <p:spPr>
           <a:xfrm>
-            <a:off x="6492240" y="2606040"/>
-            <a:ext cx="5577840" cy="1325880"/>
-          </a:xfrm>
-          <a:prstGeom prst="roundRect">
-            <a:avLst>
-              <a:gd name="adj" fmla="val 6000"/>
-            </a:avLst>
+            <a:off x="640080" y="3246120"/>
+            <a:ext cx="502920" cy="502920"/>
+          </a:xfrm>
+          <a:prstGeom prst="ellipse">
+            <a:avLst/>
           </a:prstGeom>
           <a:solidFill>
             <a:srgbClr val="EDE9FE"/>
           </a:solidFill>
-          <a:ln w="12700">
+          <a:ln w="9525">
             <a:solidFill>
               <a:srgbClr val="7857FF"/>
             </a:solidFill>
@@ -5294,10 +6276,19 @@
           </a:fontRef>
         </p:style>
         <p:txBody>
-          <a:bodyPr rtlCol="0" anchor="ctr"/>
+          <a:bodyPr rtlCol="0" anchor="ctr" lIns="0" rIns="0"/>
           <a:lstStyle/>
           <a:p>
             <a:pPr algn="ctr"/>
+            <a:r>
+              <a:rPr sz="1200" b="1">
+                <a:solidFill>
+                  <a:srgbClr val="7857FF"/>
+                </a:solidFill>
+                <a:latin typeface="Inter"/>
+              </a:rPr>
+              <a:t>02</a:t>
+            </a:r>
           </a:p>
         </p:txBody>
       </p:sp>
@@ -5309,8 +6300,8 @@
         </p:nvSpPr>
         <p:spPr>
           <a:xfrm>
-            <a:off x="6784848" y="2834640"/>
-            <a:ext cx="4992624" cy="960119"/>
+            <a:off x="1325880" y="3200400"/>
+            <a:ext cx="6080760" cy="868680"/>
           </a:xfrm>
           <a:prstGeom prst="rect">
             <a:avLst/>
@@ -5328,69 +6319,104 @@
                 <a:spcPts val="0"/>
               </a:spcBef>
               <a:spcAft>
-                <a:spcPts val="600"/>
-              </a:spcAft>
-            </a:pPr>
-            <a:r>
-              <a:rPr sz="1000" b="1" spc="120">
+                <a:spcPts val="200"/>
+              </a:spcAft>
+            </a:pPr>
+            <a:r>
+              <a:rPr sz="1500" b="1">
+                <a:solidFill>
+                  <a:srgbClr val="0A0A0A"/>
+                </a:solidFill>
+                <a:latin typeface="Inter"/>
+              </a:rPr>
+              <a:t>Fingerprint</a:t>
+            </a:r>
+          </a:p>
+          <a:p>
+            <a:pPr algn="l">
+              <a:spcBef>
+                <a:spcPts val="0"/>
+              </a:spcBef>
+              <a:spcAft>
+                <a:spcPts val="200"/>
+              </a:spcAft>
+            </a:pPr>
+            <a:r>
+              <a:rPr sz="1100" b="0">
+                <a:solidFill>
+                  <a:srgbClr val="6B7280"/>
+                </a:solidFill>
+                <a:latin typeface="Inter"/>
+              </a:rPr>
+              <a:t>Recent post timestamps + caption style confirm consistent authorship.</a:t>
+            </a:r>
+          </a:p>
+        </p:txBody>
+      </p:sp>
+      <p:sp>
+        <p:nvSpPr>
+          <p:cNvPr id="9" name="Oval 8"/>
+          <p:cNvSpPr/>
+          <p:nvPr/>
+        </p:nvSpPr>
+        <p:spPr>
+          <a:xfrm>
+            <a:off x="640080" y="4114799"/>
+            <a:ext cx="502920" cy="502920"/>
+          </a:xfrm>
+          <a:prstGeom prst="ellipse">
+            <a:avLst/>
+          </a:prstGeom>
+          <a:solidFill>
+            <a:srgbClr val="EDE9FE"/>
+          </a:solidFill>
+          <a:ln w="9525">
+            <a:solidFill>
+              <a:srgbClr val="7857FF"/>
+            </a:solidFill>
+          </a:ln>
+        </p:spPr>
+        <p:style>
+          <a:lnRef idx="1">
+            <a:schemeClr val="accent1"/>
+          </a:lnRef>
+          <a:fillRef idx="3">
+            <a:schemeClr val="accent1"/>
+          </a:fillRef>
+          <a:effectRef idx="2">
+            <a:schemeClr val="accent1"/>
+          </a:effectRef>
+          <a:fontRef idx="minor">
+            <a:schemeClr val="lt1"/>
+          </a:fontRef>
+        </p:style>
+        <p:txBody>
+          <a:bodyPr rtlCol="0" anchor="ctr" lIns="0" rIns="0"/>
+          <a:lstStyle/>
+          <a:p>
+            <a:pPr algn="ctr"/>
+            <a:r>
+              <a:rPr sz="1200" b="1">
                 <a:solidFill>
                   <a:srgbClr val="7857FF"/>
                 </a:solidFill>
                 <a:latin typeface="Inter"/>
               </a:rPr>
-              <a:t>Q4</a:t>
-            </a:r>
-          </a:p>
-          <a:p>
-            <a:pPr algn="l">
-              <a:spcBef>
-                <a:spcPts val="0"/>
-              </a:spcBef>
-              <a:spcAft>
-                <a:spcPts val="400"/>
-              </a:spcAft>
-            </a:pPr>
-            <a:r>
-              <a:rPr sz="1800" b="1">
-                <a:solidFill>
-                  <a:srgbClr val="0A0A0A"/>
-                </a:solidFill>
-                <a:latin typeface="Inter"/>
-              </a:rPr>
-              <a:t>Deploy with Eng + Growth</a:t>
-            </a:r>
-          </a:p>
-          <a:p>
-            <a:pPr algn="l">
-              <a:spcBef>
-                <a:spcPts val="0"/>
-              </a:spcBef>
-              <a:spcAft>
-                <a:spcPts val="400"/>
-              </a:spcAft>
-            </a:pPr>
-            <a:r>
-              <a:rPr sz="1100" b="0">
-                <a:solidFill>
-                  <a:srgbClr val="6B7280"/>
-                </a:solidFill>
-                <a:latin typeface="Inter"/>
-              </a:rPr>
-              <a:t>Hand-off to Mercor's eng and growth teams. Domain row goes live.</a:t>
-            </a:r>
-          </a:p>
-        </p:txBody>
-      </p:sp>
-      <p:sp>
-        <p:nvSpPr>
-          <p:cNvPr id="9" name="TextBox 8"/>
+              <a:t>03</a:t>
+            </a:r>
+          </a:p>
+        </p:txBody>
+      </p:sp>
+      <p:sp>
+        <p:nvSpPr>
+          <p:cNvPr id="10" name="TextBox 9"/>
           <p:cNvSpPr txBox="1"/>
           <p:nvPr/>
         </p:nvSpPr>
         <p:spPr>
           <a:xfrm>
-            <a:off x="640080" y="4297680"/>
-            <a:ext cx="7315200" cy="274320"/>
+            <a:off x="1325880" y="4069079"/>
+            <a:ext cx="6080760" cy="868680"/>
           </a:xfrm>
           <a:prstGeom prst="rect">
             <a:avLst/>
@@ -5408,31 +6434,50 @@
                 <a:spcPts val="0"/>
               </a:spcBef>
               <a:spcAft>
-                <a:spcPts val="400"/>
-              </a:spcAft>
-            </a:pPr>
-            <a:r>
-              <a:rPr sz="1000" b="1" spc="120">
-                <a:solidFill>
-                  <a:srgbClr val="7857FF"/>
-                </a:solidFill>
-                <a:latin typeface="Inter"/>
-              </a:rPr>
-              <a:t>WHAT WE NEED FROM YOU</a:t>
-            </a:r>
-          </a:p>
-        </p:txBody>
-      </p:sp>
-      <p:sp>
-        <p:nvSpPr>
-          <p:cNvPr id="10" name="TextBox 9"/>
+                <a:spcPts val="200"/>
+              </a:spcAft>
+            </a:pPr>
+            <a:r>
+              <a:rPr sz="1500" b="1">
+                <a:solidFill>
+                  <a:srgbClr val="0A0A0A"/>
+                </a:solidFill>
+                <a:latin typeface="Inter"/>
+              </a:rPr>
+              <a:t>Niche claim</a:t>
+            </a:r>
+          </a:p>
+          <a:p>
+            <a:pPr algn="l">
+              <a:spcBef>
+                <a:spcPts val="0"/>
+              </a:spcBef>
+              <a:spcAft>
+                <a:spcPts val="200"/>
+              </a:spcAft>
+            </a:pPr>
+            <a:r>
+              <a:rPr sz="1100" b="0">
+                <a:solidFill>
+                  <a:srgbClr val="6B7280"/>
+                </a:solidFill>
+                <a:latin typeface="Inter"/>
+              </a:rPr>
+              <a:t>Self-declared tags vs last 30 posts. Manual review for v1.</a:t>
+            </a:r>
+          </a:p>
+        </p:txBody>
+      </p:sp>
+      <p:sp>
+        <p:nvSpPr>
+          <p:cNvPr id="11" name="TextBox 10"/>
           <p:cNvSpPr txBox="1"/>
           <p:nvPr/>
         </p:nvSpPr>
         <p:spPr>
           <a:xfrm>
-            <a:off x="640080" y="4846320"/>
-            <a:ext cx="502920" cy="457200"/>
+            <a:off x="1325880" y="4571999"/>
+            <a:ext cx="6080760" cy="274320"/>
           </a:xfrm>
           <a:prstGeom prst="rect">
             <a:avLst/>
@@ -5454,27 +6499,81 @@
               </a:spcAft>
             </a:pPr>
             <a:r>
-              <a:rPr sz="1400" b="1">
+              <a:rPr sz="800" b="1" spc="140">
                 <a:solidFill>
                   <a:srgbClr val="7857FF"/>
                 </a:solidFill>
                 <a:latin typeface="Inter"/>
               </a:rPr>
-              <a:t>01</a:t>
-            </a:r>
-          </a:p>
-        </p:txBody>
-      </p:sp>
-      <p:sp>
-        <p:nvSpPr>
-          <p:cNvPr id="11" name="TextBox 10"/>
+              <a:t>MANUAL REVIEW FOR V1</a:t>
+            </a:r>
+          </a:p>
+        </p:txBody>
+      </p:sp>
+      <p:sp>
+        <p:nvSpPr>
+          <p:cNvPr id="12" name="Oval 11"/>
+          <p:cNvSpPr/>
+          <p:nvPr/>
+        </p:nvSpPr>
+        <p:spPr>
+          <a:xfrm>
+            <a:off x="640080" y="4983479"/>
+            <a:ext cx="502920" cy="502920"/>
+          </a:xfrm>
+          <a:prstGeom prst="ellipse">
+            <a:avLst/>
+          </a:prstGeom>
+          <a:solidFill>
+            <a:srgbClr val="EDE9FE"/>
+          </a:solidFill>
+          <a:ln w="9525">
+            <a:solidFill>
+              <a:srgbClr val="7857FF"/>
+            </a:solidFill>
+          </a:ln>
+        </p:spPr>
+        <p:style>
+          <a:lnRef idx="1">
+            <a:schemeClr val="accent1"/>
+          </a:lnRef>
+          <a:fillRef idx="3">
+            <a:schemeClr val="accent1"/>
+          </a:fillRef>
+          <a:effectRef idx="2">
+            <a:schemeClr val="accent1"/>
+          </a:effectRef>
+          <a:fontRef idx="minor">
+            <a:schemeClr val="lt1"/>
+          </a:fontRef>
+        </p:style>
+        <p:txBody>
+          <a:bodyPr rtlCol="0" anchor="ctr" lIns="0" rIns="0"/>
+          <a:lstStyle/>
+          <a:p>
+            <a:pPr algn="ctr"/>
+            <a:r>
+              <a:rPr sz="1200" b="1">
+                <a:solidFill>
+                  <a:srgbClr val="7857FF"/>
+                </a:solidFill>
+                <a:latin typeface="Inter"/>
+              </a:rPr>
+              <a:t>04</a:t>
+            </a:r>
+          </a:p>
+        </p:txBody>
+      </p:sp>
+      <p:sp>
+        <p:nvSpPr>
+          <p:cNvPr id="13" name="TextBox 12"/>
           <p:cNvSpPr txBox="1"/>
           <p:nvPr/>
         </p:nvSpPr>
         <p:spPr>
           <a:xfrm>
-            <a:off x="1234440" y="4864607"/>
-            <a:ext cx="10332720" cy="457200"/>
+            <a:off x="1325880" y="4937759"/>
+            <a:ext cx="6080760" cy="868680"/>
           </a:xfrm>
           <a:prstGeom prst="rect">
             <a:avLst/>
@@ -5492,31 +6591,50 @@
                 <a:spcPts val="0"/>
               </a:spcBef>
               <a:spcAft>
-                <a:spcPts val="400"/>
-              </a:spcAft>
-            </a:pPr>
-            <a:r>
-              <a:rPr sz="1400" b="0">
+                <a:spcPts val="200"/>
+              </a:spcAft>
+            </a:pPr>
+            <a:r>
+              <a:rPr sz="1500" b="1">
                 <a:solidFill>
                   <a:srgbClr val="0A0A0A"/>
                 </a:solidFill>
                 <a:latin typeface="Inter"/>
               </a:rPr>
-              <a:t>Where does Creator Experts live inside Mercor?</a:t>
-            </a:r>
-          </a:p>
-        </p:txBody>
-      </p:sp>
-      <p:sp>
-        <p:nvSpPr>
-          <p:cNvPr id="12" name="TextBox 11"/>
+              <a:t>Audience truth</a:t>
+            </a:r>
+          </a:p>
+          <a:p>
+            <a:pPr algn="l">
+              <a:spcBef>
+                <a:spcPts val="0"/>
+              </a:spcBef>
+              <a:spcAft>
+                <a:spcPts val="200"/>
+              </a:spcAft>
+            </a:pPr>
+            <a:r>
+              <a:rPr sz="1100" b="0">
+                <a:solidFill>
+                  <a:srgbClr val="6B7280"/>
+                </a:solidFill>
+                <a:latin typeface="Inter"/>
+              </a:rPr>
+              <a:t>Sampled audience demographics check. Manual review for v1.</a:t>
+            </a:r>
+          </a:p>
+        </p:txBody>
+      </p:sp>
+      <p:sp>
+        <p:nvSpPr>
+          <p:cNvPr id="14" name="TextBox 13"/>
           <p:cNvSpPr txBox="1"/>
           <p:nvPr/>
         </p:nvSpPr>
         <p:spPr>
           <a:xfrm>
-            <a:off x="640080" y="5349240"/>
-            <a:ext cx="502920" cy="457200"/>
+            <a:off x="1325880" y="5440679"/>
+            <a:ext cx="6080760" cy="274320"/>
           </a:xfrm>
           <a:prstGeom prst="rect">
             <a:avLst/>
@@ -5538,27 +6656,74 @@
               </a:spcAft>
             </a:pPr>
             <a:r>
-              <a:rPr sz="1400" b="1">
+              <a:rPr sz="800" b="1" spc="140">
                 <a:solidFill>
                   <a:srgbClr val="7857FF"/>
                 </a:solidFill>
                 <a:latin typeface="Inter"/>
               </a:rPr>
-              <a:t>02</a:t>
-            </a:r>
-          </a:p>
-        </p:txBody>
-      </p:sp>
-      <p:sp>
-        <p:nvSpPr>
-          <p:cNvPr id="13" name="TextBox 12"/>
+              <a:t>MANUAL REVIEW FOR V1</a:t>
+            </a:r>
+          </a:p>
+        </p:txBody>
+      </p:sp>
+      <p:sp>
+        <p:nvSpPr>
+          <p:cNvPr id="15" name="Rounded Rectangle 14"/>
+          <p:cNvSpPr/>
+          <p:nvPr/>
+        </p:nvSpPr>
+        <p:spPr>
+          <a:xfrm>
+            <a:off x="7818120" y="2331720"/>
+            <a:ext cx="3730752" cy="1188720"/>
+          </a:xfrm>
+          <a:prstGeom prst="roundRect">
+            <a:avLst>
+              <a:gd name="adj" fmla="val 6000"/>
+            </a:avLst>
+          </a:prstGeom>
+          <a:solidFill>
+            <a:srgbClr val="FAFAFA"/>
+          </a:solidFill>
+          <a:ln w="9525">
+            <a:solidFill>
+              <a:srgbClr val="E5E7EB"/>
+            </a:solidFill>
+          </a:ln>
+        </p:spPr>
+        <p:style>
+          <a:lnRef idx="1">
+            <a:schemeClr val="accent1"/>
+          </a:lnRef>
+          <a:fillRef idx="3">
+            <a:schemeClr val="accent1"/>
+          </a:fillRef>
+          <a:effectRef idx="2">
+            <a:schemeClr val="accent1"/>
+          </a:effectRef>
+          <a:fontRef idx="minor">
+            <a:schemeClr val="lt1"/>
+          </a:fontRef>
+        </p:style>
+        <p:txBody>
+          <a:bodyPr rtlCol="0" anchor="ctr"/>
+          <a:lstStyle/>
+          <a:p>
+            <a:pPr algn="ctr"/>
+          </a:p>
+        </p:txBody>
+      </p:sp>
+      <p:sp>
+        <p:nvSpPr>
+          <p:cNvPr id="16" name="TextBox 15"/>
           <p:cNvSpPr txBox="1"/>
           <p:nvPr/>
         </p:nvSpPr>
         <p:spPr>
           <a:xfrm>
-            <a:off x="1234440" y="5367527"/>
-            <a:ext cx="10332720" cy="457200"/>
+            <a:off x="8019288" y="2478024"/>
+            <a:ext cx="3328416" cy="914400"/>
           </a:xfrm>
           <a:prstGeom prst="rect">
             <a:avLst/>
@@ -5576,31 +6741,116 @@
                 <a:spcPts val="0"/>
               </a:spcBef>
               <a:spcAft>
+                <a:spcPts val="200"/>
+              </a:spcAft>
+            </a:pPr>
+            <a:r>
+              <a:rPr sz="2200" b="1">
+                <a:solidFill>
+                  <a:srgbClr val="7857FF"/>
+                </a:solidFill>
+                <a:latin typeface="Inter"/>
+              </a:rPr>
+              <a:t>37.2%</a:t>
+            </a:r>
+          </a:p>
+          <a:p>
+            <a:pPr algn="l">
+              <a:spcBef>
+                <a:spcPts val="0"/>
+              </a:spcBef>
+              <a:spcAft>
+                <a:spcPts val="200"/>
+              </a:spcAft>
+            </a:pPr>
+            <a:r>
+              <a:rPr sz="1000" b="0">
+                <a:solidFill>
+                  <a:srgbClr val="0A0A0A"/>
+                </a:solidFill>
+                <a:latin typeface="Inter"/>
+              </a:rPr>
+              <a:t>of influencer followers are fake/inauthentic. ~$4.6B/yr brand waste.</a:t>
+            </a:r>
+          </a:p>
+          <a:p>
+            <a:pPr algn="l">
+              <a:spcBef>
+                <a:spcPts val="0"/>
+              </a:spcBef>
+              <a:spcAft>
                 <a:spcPts val="400"/>
               </a:spcAft>
             </a:pPr>
             <a:r>
-              <a:rPr sz="1400" b="0">
-                <a:solidFill>
-                  <a:srgbClr val="0A0A0A"/>
-                </a:solidFill>
-                <a:latin typeface="Inter"/>
-              </a:rPr>
-              <a:t>Hourly pricing, or per-post with a relevant-eyes bonus?</a:t>
-            </a:r>
-          </a:p>
-        </p:txBody>
-      </p:sp>
-      <p:sp>
-        <p:nvSpPr>
-          <p:cNvPr id="14" name="TextBox 13"/>
+              <a:rPr sz="800" b="0">
+                <a:solidFill>
+                  <a:srgbClr val="9CA3AF"/>
+                </a:solidFill>
+                <a:latin typeface="Inter"/>
+              </a:rPr>
+              <a:t>SociaVault 100K-account audit, 2025.</a:t>
+            </a:r>
+          </a:p>
+        </p:txBody>
+      </p:sp>
+      <p:sp>
+        <p:nvSpPr>
+          <p:cNvPr id="17" name="Rounded Rectangle 16"/>
+          <p:cNvSpPr/>
+          <p:nvPr/>
+        </p:nvSpPr>
+        <p:spPr>
+          <a:xfrm>
+            <a:off x="7818120" y="3685031"/>
+            <a:ext cx="3730752" cy="1188720"/>
+          </a:xfrm>
+          <a:prstGeom prst="roundRect">
+            <a:avLst>
+              <a:gd name="adj" fmla="val 6000"/>
+            </a:avLst>
+          </a:prstGeom>
+          <a:solidFill>
+            <a:srgbClr val="FAFAFA"/>
+          </a:solidFill>
+          <a:ln w="9525">
+            <a:solidFill>
+              <a:srgbClr val="E5E7EB"/>
+            </a:solidFill>
+          </a:ln>
+        </p:spPr>
+        <p:style>
+          <a:lnRef idx="1">
+            <a:schemeClr val="accent1"/>
+          </a:lnRef>
+          <a:fillRef idx="3">
+            <a:schemeClr val="accent1"/>
+          </a:fillRef>
+          <a:effectRef idx="2">
+            <a:schemeClr val="accent1"/>
+          </a:effectRef>
+          <a:fontRef idx="minor">
+            <a:schemeClr val="lt1"/>
+          </a:fontRef>
+        </p:style>
+        <p:txBody>
+          <a:bodyPr rtlCol="0" anchor="ctr"/>
+          <a:lstStyle/>
+          <a:p>
+            <a:pPr algn="ctr"/>
+          </a:p>
+        </p:txBody>
+      </p:sp>
+      <p:sp>
+        <p:nvSpPr>
+          <p:cNvPr id="18" name="TextBox 17"/>
           <p:cNvSpPr txBox="1"/>
           <p:nvPr/>
         </p:nvSpPr>
         <p:spPr>
           <a:xfrm>
-            <a:off x="640080" y="5852160"/>
-            <a:ext cx="502920" cy="457200"/>
+            <a:off x="8019288" y="3831335"/>
+            <a:ext cx="3328416" cy="914400"/>
           </a:xfrm>
           <a:prstGeom prst="rect">
             <a:avLst/>
@@ -5618,31 +6868,116 @@
                 <a:spcPts val="0"/>
               </a:spcBef>
               <a:spcAft>
+                <a:spcPts val="200"/>
+              </a:spcAft>
+            </a:pPr>
+            <a:r>
+              <a:rPr sz="2200" b="1">
+                <a:solidFill>
+                  <a:srgbClr val="7857FF"/>
+                </a:solidFill>
+                <a:latin typeface="Inter"/>
+              </a:rPr>
+              <a:t>55%</a:t>
+            </a:r>
+          </a:p>
+          <a:p>
+            <a:pPr algn="l">
+              <a:spcBef>
+                <a:spcPts val="0"/>
+              </a:spcBef>
+              <a:spcAft>
+                <a:spcPts val="200"/>
+              </a:spcAft>
+            </a:pPr>
+            <a:r>
+              <a:rPr sz="1000" b="0">
+                <a:solidFill>
+                  <a:srgbClr val="0A0A0A"/>
+                </a:solidFill>
+                <a:latin typeface="Inter"/>
+              </a:rPr>
+              <a:t>of Instagram influencers have engaged in fraudulent activity.</a:t>
+            </a:r>
+          </a:p>
+          <a:p>
+            <a:pPr algn="l">
+              <a:spcBef>
+                <a:spcPts val="0"/>
+              </a:spcBef>
+              <a:spcAft>
                 <a:spcPts val="400"/>
               </a:spcAft>
             </a:pPr>
             <a:r>
-              <a:rPr sz="1400" b="1">
-                <a:solidFill>
-                  <a:srgbClr val="7857FF"/>
-                </a:solidFill>
-                <a:latin typeface="Inter"/>
-              </a:rPr>
-              <a:t>03</a:t>
-            </a:r>
-          </a:p>
-        </p:txBody>
-      </p:sp>
-      <p:sp>
-        <p:nvSpPr>
-          <p:cNvPr id="15" name="TextBox 14"/>
+              <a:rPr sz="800" b="0">
+                <a:solidFill>
+                  <a:srgbClr val="9CA3AF"/>
+                </a:solidFill>
+                <a:latin typeface="Inter"/>
+              </a:rPr>
+              <a:t>HypeAuditor State of Influencer Marketing 2024.</a:t>
+            </a:r>
+          </a:p>
+        </p:txBody>
+      </p:sp>
+      <p:sp>
+        <p:nvSpPr>
+          <p:cNvPr id="19" name="Rounded Rectangle 18"/>
+          <p:cNvSpPr/>
+          <p:nvPr/>
+        </p:nvSpPr>
+        <p:spPr>
+          <a:xfrm>
+            <a:off x="7818120" y="5038344"/>
+            <a:ext cx="3730752" cy="1188720"/>
+          </a:xfrm>
+          <a:prstGeom prst="roundRect">
+            <a:avLst>
+              <a:gd name="adj" fmla="val 6000"/>
+            </a:avLst>
+          </a:prstGeom>
+          <a:solidFill>
+            <a:srgbClr val="FAFAFA"/>
+          </a:solidFill>
+          <a:ln w="9525">
+            <a:solidFill>
+              <a:srgbClr val="E5E7EB"/>
+            </a:solidFill>
+          </a:ln>
+        </p:spPr>
+        <p:style>
+          <a:lnRef idx="1">
+            <a:schemeClr val="accent1"/>
+          </a:lnRef>
+          <a:fillRef idx="3">
+            <a:schemeClr val="accent1"/>
+          </a:fillRef>
+          <a:effectRef idx="2">
+            <a:schemeClr val="accent1"/>
+          </a:effectRef>
+          <a:fontRef idx="minor">
+            <a:schemeClr val="lt1"/>
+          </a:fontRef>
+        </p:style>
+        <p:txBody>
+          <a:bodyPr rtlCol="0" anchor="ctr"/>
+          <a:lstStyle/>
+          <a:p>
+            <a:pPr algn="ctr"/>
+          </a:p>
+        </p:txBody>
+      </p:sp>
+      <p:sp>
+        <p:nvSpPr>
+          <p:cNvPr id="20" name="TextBox 19"/>
           <p:cNvSpPr txBox="1"/>
           <p:nvPr/>
         </p:nvSpPr>
         <p:spPr>
           <a:xfrm>
-            <a:off x="1234440" y="5870448"/>
-            <a:ext cx="10332720" cy="457200"/>
+            <a:off x="8019288" y="5184648"/>
+            <a:ext cx="3328416" cy="914400"/>
           </a:xfrm>
           <a:prstGeom prst="rect">
             <a:avLst/>
@@ -5660,24 +6995,62 @@
                 <a:spcPts val="0"/>
               </a:spcBef>
               <a:spcAft>
+                <a:spcPts val="200"/>
+              </a:spcAft>
+            </a:pPr>
+            <a:r>
+              <a:rPr sz="2200" b="1">
+                <a:solidFill>
+                  <a:srgbClr val="7857FF"/>
+                </a:solidFill>
+                <a:latin typeface="Inter"/>
+              </a:rPr>
+              <a:t>$53,088</a:t>
+            </a:r>
+          </a:p>
+          <a:p>
+            <a:pPr algn="l">
+              <a:spcBef>
+                <a:spcPts val="0"/>
+              </a:spcBef>
+              <a:spcAft>
+                <a:spcPts val="200"/>
+              </a:spcAft>
+            </a:pPr>
+            <a:r>
+              <a:rPr sz="1000" b="0">
+                <a:solidFill>
+                  <a:srgbClr val="0A0A0A"/>
+                </a:solidFill>
+                <a:latin typeface="Inter"/>
+              </a:rPr>
+              <a:t>FTC max civil penalty per violation (Final Rule, eff. 2024-10-21).</a:t>
+            </a:r>
+          </a:p>
+          <a:p>
+            <a:pPr algn="l">
+              <a:spcBef>
+                <a:spcPts val="0"/>
+              </a:spcBef>
+              <a:spcAft>
                 <a:spcPts val="400"/>
               </a:spcAft>
             </a:pPr>
             <a:r>
-              <a:rPr sz="1400" b="0">
-                <a:solidFill>
-                  <a:srgbClr val="0A0A0A"/>
-                </a:solidFill>
-                <a:latin typeface="Inter"/>
-              </a:rPr>
-              <a:t>Who handles brand-side sales — Mercor's team, or ours during the pilot?</a:t>
-            </a:r>
-          </a:p>
-        </p:txBody>
-      </p:sp>
-      <p:sp>
-        <p:nvSpPr>
-          <p:cNvPr id="16" name="TextBox 15"/>
+              <a:rPr sz="800" b="0">
+                <a:solidFill>
+                  <a:srgbClr val="9CA3AF"/>
+                </a:solidFill>
+                <a:latin typeface="Inter"/>
+              </a:rPr>
+              <a:t>Federal Register, 2024.</a:t>
+            </a:r>
+          </a:p>
+        </p:txBody>
+      </p:sp>
+      <p:sp>
+        <p:nvSpPr>
+          <p:cNvPr id="21" name="TextBox 20"/>
           <p:cNvSpPr txBox="1"/>
           <p:nvPr/>
         </p:nvSpPr>
@@ -5712,7 +7085,7 @@
                 </a:solidFill>
                 <a:latin typeface="Inter"/>
               </a:rPr>
-              <a:t>creator experts   ·   internal proposal for aaron langerman   ·   5 / 6</a:t>
+              <a:t>creator experts   ·   internal proposal for aaron langerman   ·   5 / 8</a:t>
             </a:r>
           </a:p>
         </p:txBody>
@@ -5776,7 +7149,7 @@
         <p:spPr>
           <a:xfrm>
             <a:off x="640080" y="868680"/>
-            <a:ext cx="7315200" cy="274320"/>
+            <a:ext cx="10058400" cy="274320"/>
           </a:xfrm>
           <a:prstGeom prst="rect">
             <a:avLst/>
@@ -5804,7 +7177,7 @@
                 </a:solidFill>
                 <a:latin typeface="Inter"/>
               </a:rPr>
-              <a:t>NOW → LIVE DEMO</a:t>
+              <a:t>DAY-1 REVENUE.</a:t>
             </a:r>
           </a:p>
         </p:txBody>
@@ -5817,8 +7190,8 @@
         </p:nvSpPr>
         <p:spPr>
           <a:xfrm>
-            <a:off x="640080" y="1417320"/>
-            <a:ext cx="10972800" cy="2103120"/>
+            <a:off x="640080" y="1371600"/>
+            <a:ext cx="10972800" cy="822960"/>
           </a:xfrm>
           <a:prstGeom prst="rect">
             <a:avLst/>
@@ -5843,87 +7216,30 @@
               </a:spcAft>
             </a:pPr>
             <a:r>
-              <a:rPr sz="4200" b="1">
+              <a:rPr sz="2800" b="1">
                 <a:solidFill>
                   <a:srgbClr val="0A0A0A"/>
                 </a:solidFill>
                 <a:latin typeface="Inter"/>
               </a:rPr>
-              <a:t>The demo's the rest of the pitch.</a:t>
-            </a:r>
-          </a:p>
-        </p:txBody>
-      </p:sp>
-      <p:sp>
-        <p:nvSpPr>
-          <p:cNvPr id="5" name="TextBox 4"/>
-          <p:cNvSpPr txBox="1"/>
-          <p:nvPr/>
-        </p:nvSpPr>
-        <p:spPr>
-          <a:xfrm>
-            <a:off x="640080" y="4023360"/>
-            <a:ext cx="10972800" cy="1280160"/>
-          </a:xfrm>
-          <a:prstGeom prst="rect">
-            <a:avLst/>
-          </a:prstGeom>
-          <a:noFill/>
-        </p:spPr>
-        <p:txBody>
-          <a:bodyPr wrap="square" lIns="0" rIns="0" tIns="0" bIns="0" anchor="t">
-            <a:spAutoFit/>
-          </a:bodyPr>
-          <a:lstStyle/>
-          <a:p>
-            <a:pPr>
-              <a:spcAft>
-                <a:spcPts val="1000"/>
-              </a:spcAft>
-            </a:pPr>
-            <a:r>
-              <a:rPr sz="1500" b="0">
-                <a:solidFill>
-                  <a:srgbClr val="0A0A0A"/>
-                </a:solidFill>
-                <a:latin typeface="Inter"/>
-              </a:rPr>
-              <a:t>Logan as a creator — real 22.7K TikTok account, applying inside Mercor's stepper.</a:t>
-            </a:r>
-          </a:p>
-          <a:p>
-            <a:pPr>
-              <a:spcAft>
-                <a:spcPts val="1000"/>
-              </a:spcAft>
-            </a:pPr>
-            <a:r>
-              <a:rPr sz="1500" b="0">
-                <a:solidFill>
-                  <a:srgbClr val="0A0A0A"/>
-                </a:solidFill>
-                <a:latin typeface="Inter"/>
-              </a:rPr>
-              <a:t>Aaron as Mercor admin — RAG cites real posts back by URL, outreach drafts in line.</a:t>
-            </a:r>
-          </a:p>
-        </p:txBody>
-      </p:sp>
-      <p:sp>
-        <p:nvSpPr>
-          <p:cNvPr id="6" name="Rounded Rectangle 5"/>
+              <a:t>Three revenue lines. One signed deal.</a:t>
+            </a:r>
+          </a:p>
+        </p:txBody>
+      </p:sp>
+      <p:sp>
+        <p:nvSpPr>
+          <p:cNvPr id="5" name="Oval 4"/>
           <p:cNvSpPr/>
           <p:nvPr/>
         </p:nvSpPr>
         <p:spPr>
           <a:xfrm>
-            <a:off x="640080" y="5669280"/>
-            <a:ext cx="10972800" cy="594360"/>
-          </a:xfrm>
-          <a:prstGeom prst="roundRect">
-            <a:avLst>
-              <a:gd name="adj" fmla="val 40000"/>
-            </a:avLst>
+            <a:off x="640080" y="2560320"/>
+            <a:ext cx="411480" cy="411480"/>
+          </a:xfrm>
+          <a:prstGeom prst="ellipse">
+            <a:avLst/>
           </a:prstGeom>
           <a:solidFill>
             <a:srgbClr val="7857FF"/>
@@ -5952,27 +7268,27 @@
           <a:p>
             <a:pPr algn="ctr"/>
             <a:r>
-              <a:rPr sz="1500" b="1">
+              <a:rPr sz="1400" b="1">
                 <a:solidFill>
                   <a:srgbClr val="FFFFFF"/>
                 </a:solidFill>
                 <a:latin typeface="Inter"/>
               </a:rPr>
-              <a:t>Live: musing-maxwell-84ed29.vercel.app</a:t>
-            </a:r>
-          </a:p>
-        </p:txBody>
-      </p:sp>
-      <p:sp>
-        <p:nvSpPr>
-          <p:cNvPr id="7" name="TextBox 6"/>
+              <a:t>a</a:t>
+            </a:r>
+          </a:p>
+        </p:txBody>
+      </p:sp>
+      <p:sp>
+        <p:nvSpPr>
+          <p:cNvPr id="6" name="TextBox 5"/>
           <p:cNvSpPr txBox="1"/>
           <p:nvPr/>
         </p:nvSpPr>
         <p:spPr>
           <a:xfrm>
-            <a:off x="640080" y="6446520"/>
-            <a:ext cx="10972800" cy="274320"/>
+            <a:off x="1234440" y="2514600"/>
+            <a:ext cx="7315200" cy="960120"/>
           </a:xfrm>
           <a:prstGeom prst="rect">
             <a:avLst/>
@@ -5990,6 +7306,44 @@
                 <a:spcPts val="0"/>
               </a:spcBef>
               <a:spcAft>
+                <a:spcPts val="200"/>
+              </a:spcAft>
+            </a:pPr>
+            <a:r>
+              <a:rPr sz="1500" b="1">
+                <a:solidFill>
+                  <a:srgbClr val="0A0A0A"/>
+                </a:solidFill>
+                <a:latin typeface="Inter"/>
+              </a:rPr>
+              <a:t>Placement fee on close</a:t>
+            </a:r>
+          </a:p>
+          <a:p>
+            <a:pPr algn="l">
+              <a:spcBef>
+                <a:spcPts val="0"/>
+              </a:spcBef>
+              <a:spcAft>
+                <a:spcPts val="200"/>
+              </a:spcAft>
+            </a:pPr>
+            <a:r>
+              <a:rPr sz="1100" b="0">
+                <a:solidFill>
+                  <a:srgbClr val="6B7280"/>
+                </a:solidFill>
+                <a:latin typeface="Inter"/>
+              </a:rPr>
+              <a:t>20% × $850 base contract.</a:t>
+            </a:r>
+          </a:p>
+          <a:p>
+            <a:pPr algn="l">
+              <a:spcBef>
+                <a:spcPts val="0"/>
+              </a:spcBef>
+              <a:spcAft>
                 <a:spcPts val="400"/>
               </a:spcAft>
             </a:pPr>
@@ -6000,7 +7354,1611 @@
                 </a:solidFill>
                 <a:latin typeface="Inter"/>
               </a:rPr>
-              <a:t>creator experts   ·   internal proposal for aaron langerman   ·   6 / 6</a:t>
+              <a:t>Headhunter contingent benchmark.</a:t>
+            </a:r>
+          </a:p>
+        </p:txBody>
+      </p:sp>
+      <p:sp>
+        <p:nvSpPr>
+          <p:cNvPr id="7" name="TextBox 6"/>
+          <p:cNvSpPr txBox="1"/>
+          <p:nvPr/>
+        </p:nvSpPr>
+        <p:spPr>
+          <a:xfrm>
+            <a:off x="8778240" y="2606040"/>
+            <a:ext cx="2788920" cy="640080"/>
+          </a:xfrm>
+          <a:prstGeom prst="rect">
+            <a:avLst/>
+          </a:prstGeom>
+          <a:noFill/>
+        </p:spPr>
+        <p:txBody>
+          <a:bodyPr wrap="square" lIns="0" rIns="0" tIns="0" bIns="0" anchor="t">
+            <a:spAutoFit/>
+          </a:bodyPr>
+          <a:lstStyle/>
+          <a:p>
+            <a:pPr algn="r">
+              <a:spcBef>
+                <a:spcPts val="0"/>
+              </a:spcBef>
+              <a:spcAft>
+                <a:spcPts val="400"/>
+              </a:spcAft>
+            </a:pPr>
+            <a:r>
+              <a:rPr sz="2200" b="1">
+                <a:solidFill>
+                  <a:srgbClr val="7857FF"/>
+                </a:solidFill>
+                <a:latin typeface="Inter"/>
+              </a:rPr>
+              <a:t>$170</a:t>
+            </a:r>
+          </a:p>
+        </p:txBody>
+      </p:sp>
+      <p:sp>
+        <p:nvSpPr>
+          <p:cNvPr id="8" name="Oval 7"/>
+          <p:cNvSpPr/>
+          <p:nvPr/>
+        </p:nvSpPr>
+        <p:spPr>
+          <a:xfrm>
+            <a:off x="640080" y="3520440"/>
+            <a:ext cx="411480" cy="411480"/>
+          </a:xfrm>
+          <a:prstGeom prst="ellipse">
+            <a:avLst/>
+          </a:prstGeom>
+          <a:solidFill>
+            <a:srgbClr val="7857FF"/>
+          </a:solidFill>
+          <a:ln>
+            <a:noFill/>
+          </a:ln>
+        </p:spPr>
+        <p:style>
+          <a:lnRef idx="1">
+            <a:schemeClr val="accent1"/>
+          </a:lnRef>
+          <a:fillRef idx="3">
+            <a:schemeClr val="accent1"/>
+          </a:fillRef>
+          <a:effectRef idx="2">
+            <a:schemeClr val="accent1"/>
+          </a:effectRef>
+          <a:fontRef idx="minor">
+            <a:schemeClr val="lt1"/>
+          </a:fontRef>
+        </p:style>
+        <p:txBody>
+          <a:bodyPr rtlCol="0" anchor="ctr" lIns="0" rIns="0"/>
+          <a:lstStyle/>
+          <a:p>
+            <a:pPr algn="ctr"/>
+            <a:r>
+              <a:rPr sz="1400" b="1">
+                <a:solidFill>
+                  <a:srgbClr val="FFFFFF"/>
+                </a:solidFill>
+                <a:latin typeface="Inter"/>
+              </a:rPr>
+              <a:t>b</a:t>
+            </a:r>
+          </a:p>
+        </p:txBody>
+      </p:sp>
+      <p:sp>
+        <p:nvSpPr>
+          <p:cNvPr id="9" name="TextBox 8"/>
+          <p:cNvSpPr txBox="1"/>
+          <p:nvPr/>
+        </p:nvSpPr>
+        <p:spPr>
+          <a:xfrm>
+            <a:off x="1234440" y="3474720"/>
+            <a:ext cx="7315200" cy="960120"/>
+          </a:xfrm>
+          <a:prstGeom prst="rect">
+            <a:avLst/>
+          </a:prstGeom>
+          <a:noFill/>
+        </p:spPr>
+        <p:txBody>
+          <a:bodyPr wrap="square" lIns="0" rIns="0" tIns="0" bIns="0" anchor="t">
+            <a:spAutoFit/>
+          </a:bodyPr>
+          <a:lstStyle/>
+          <a:p>
+            <a:pPr algn="l">
+              <a:spcBef>
+                <a:spcPts val="0"/>
+              </a:spcBef>
+              <a:spcAft>
+                <a:spcPts val="200"/>
+              </a:spcAft>
+            </a:pPr>
+            <a:r>
+              <a:rPr sz="1500" b="1">
+                <a:solidFill>
+                  <a:srgbClr val="0A0A0A"/>
+                </a:solidFill>
+                <a:latin typeface="Inter"/>
+              </a:rPr>
+              <a:t>Performance kicker (per-post)</a:t>
+            </a:r>
+          </a:p>
+          <a:p>
+            <a:pPr algn="l">
+              <a:spcBef>
+                <a:spcPts val="0"/>
+              </a:spcBef>
+              <a:spcAft>
+                <a:spcPts val="200"/>
+              </a:spcAft>
+            </a:pPr>
+            <a:r>
+              <a:rPr sz="1100" b="0">
+                <a:solidFill>
+                  <a:srgbClr val="6B7280"/>
+                </a:solidFill>
+                <a:latin typeface="Inter"/>
+              </a:rPr>
+              <a:t>5% of view-bonus pool.</a:t>
+            </a:r>
+          </a:p>
+          <a:p>
+            <a:pPr algn="l">
+              <a:spcBef>
+                <a:spcPts val="0"/>
+              </a:spcBef>
+              <a:spcAft>
+                <a:spcPts val="400"/>
+              </a:spcAft>
+            </a:pPr>
+            <a:r>
+              <a:rPr sz="900" b="0">
+                <a:solidFill>
+                  <a:srgbClr val="9CA3AF"/>
+                </a:solidFill>
+                <a:latin typeface="Inter"/>
+              </a:rPr>
+              <a:t>Lumanu pattern.</a:t>
+            </a:r>
+          </a:p>
+        </p:txBody>
+      </p:sp>
+      <p:sp>
+        <p:nvSpPr>
+          <p:cNvPr id="10" name="TextBox 9"/>
+          <p:cNvSpPr txBox="1"/>
+          <p:nvPr/>
+        </p:nvSpPr>
+        <p:spPr>
+          <a:xfrm>
+            <a:off x="8778240" y="3566160"/>
+            <a:ext cx="2788920" cy="640080"/>
+          </a:xfrm>
+          <a:prstGeom prst="rect">
+            <a:avLst/>
+          </a:prstGeom>
+          <a:noFill/>
+        </p:spPr>
+        <p:txBody>
+          <a:bodyPr wrap="square" lIns="0" rIns="0" tIns="0" bIns="0" anchor="t">
+            <a:spAutoFit/>
+          </a:bodyPr>
+          <a:lstStyle/>
+          <a:p>
+            <a:pPr algn="r">
+              <a:spcBef>
+                <a:spcPts val="0"/>
+              </a:spcBef>
+              <a:spcAft>
+                <a:spcPts val="400"/>
+              </a:spcAft>
+            </a:pPr>
+            <a:r>
+              <a:rPr sz="2200" b="1">
+                <a:solidFill>
+                  <a:srgbClr val="7857FF"/>
+                </a:solidFill>
+                <a:latin typeface="Inter"/>
+              </a:rPr>
+              <a:t>$0–$50</a:t>
+            </a:r>
+          </a:p>
+        </p:txBody>
+      </p:sp>
+      <p:sp>
+        <p:nvSpPr>
+          <p:cNvPr id="11" name="Oval 10"/>
+          <p:cNvSpPr/>
+          <p:nvPr/>
+        </p:nvSpPr>
+        <p:spPr>
+          <a:xfrm>
+            <a:off x="640080" y="4480560"/>
+            <a:ext cx="411480" cy="411480"/>
+          </a:xfrm>
+          <a:prstGeom prst="ellipse">
+            <a:avLst/>
+          </a:prstGeom>
+          <a:solidFill>
+            <a:srgbClr val="7857FF"/>
+          </a:solidFill>
+          <a:ln>
+            <a:noFill/>
+          </a:ln>
+        </p:spPr>
+        <p:style>
+          <a:lnRef idx="1">
+            <a:schemeClr val="accent1"/>
+          </a:lnRef>
+          <a:fillRef idx="3">
+            <a:schemeClr val="accent1"/>
+          </a:fillRef>
+          <a:effectRef idx="2">
+            <a:schemeClr val="accent1"/>
+          </a:effectRef>
+          <a:fontRef idx="minor">
+            <a:schemeClr val="lt1"/>
+          </a:fontRef>
+        </p:style>
+        <p:txBody>
+          <a:bodyPr rtlCol="0" anchor="ctr" lIns="0" rIns="0"/>
+          <a:lstStyle/>
+          <a:p>
+            <a:pPr algn="ctr"/>
+            <a:r>
+              <a:rPr sz="1400" b="1">
+                <a:solidFill>
+                  <a:srgbClr val="FFFFFF"/>
+                </a:solidFill>
+                <a:latin typeface="Inter"/>
+              </a:rPr>
+              <a:t>c</a:t>
+            </a:r>
+          </a:p>
+        </p:txBody>
+      </p:sp>
+      <p:sp>
+        <p:nvSpPr>
+          <p:cNvPr id="12" name="TextBox 11"/>
+          <p:cNvSpPr txBox="1"/>
+          <p:nvPr/>
+        </p:nvSpPr>
+        <p:spPr>
+          <a:xfrm>
+            <a:off x="1234440" y="4434840"/>
+            <a:ext cx="7315200" cy="960120"/>
+          </a:xfrm>
+          <a:prstGeom prst="rect">
+            <a:avLst/>
+          </a:prstGeom>
+          <a:noFill/>
+        </p:spPr>
+        <p:txBody>
+          <a:bodyPr wrap="square" lIns="0" rIns="0" tIns="0" bIns="0" anchor="t">
+            <a:spAutoFit/>
+          </a:bodyPr>
+          <a:lstStyle/>
+          <a:p>
+            <a:pPr algn="l">
+              <a:spcBef>
+                <a:spcPts val="0"/>
+              </a:spcBef>
+              <a:spcAft>
+                <a:spcPts val="200"/>
+              </a:spcAft>
+            </a:pPr>
+            <a:r>
+              <a:rPr sz="1500" b="1">
+                <a:solidFill>
+                  <a:srgbClr val="0A0A0A"/>
+                </a:solidFill>
+                <a:latin typeface="Inter"/>
+              </a:rPr>
+              <a:t>RL data licensing</a:t>
+            </a:r>
+          </a:p>
+          <a:p>
+            <a:pPr algn="l">
+              <a:spcBef>
+                <a:spcPts val="0"/>
+              </a:spcBef>
+              <a:spcAft>
+                <a:spcPts val="200"/>
+              </a:spcAft>
+            </a:pPr>
+            <a:r>
+              <a:rPr sz="1100" b="0">
+                <a:solidFill>
+                  <a:srgbClr val="6B7280"/>
+                </a:solidFill>
+                <a:latin typeface="Inter"/>
+              </a:rPr>
+              <a:t>Outcome data + rubric scores feed Mercor's existing human-data market for RL environments.</a:t>
+            </a:r>
+          </a:p>
+          <a:p>
+            <a:pPr algn="l">
+              <a:spcBef>
+                <a:spcPts val="0"/>
+              </a:spcBef>
+              <a:spcAft>
+                <a:spcPts val="400"/>
+              </a:spcAft>
+            </a:pPr>
+            <a:r>
+              <a:rPr sz="900" b="0">
+                <a:solidFill>
+                  <a:srgbClr val="9CA3AF"/>
+                </a:solidFill>
+                <a:latin typeface="Inter"/>
+              </a:rPr>
+              <a:t>Illustrative — flagged in deck.</a:t>
+            </a:r>
+          </a:p>
+        </p:txBody>
+      </p:sp>
+      <p:sp>
+        <p:nvSpPr>
+          <p:cNvPr id="13" name="TextBox 12"/>
+          <p:cNvSpPr txBox="1"/>
+          <p:nvPr/>
+        </p:nvSpPr>
+        <p:spPr>
+          <a:xfrm>
+            <a:off x="8778240" y="4526280"/>
+            <a:ext cx="2788920" cy="640080"/>
+          </a:xfrm>
+          <a:prstGeom prst="rect">
+            <a:avLst/>
+          </a:prstGeom>
+          <a:noFill/>
+        </p:spPr>
+        <p:txBody>
+          <a:bodyPr wrap="square" lIns="0" rIns="0" tIns="0" bIns="0" anchor="t">
+            <a:spAutoFit/>
+          </a:bodyPr>
+          <a:lstStyle/>
+          <a:p>
+            <a:pPr algn="r">
+              <a:spcBef>
+                <a:spcPts val="0"/>
+              </a:spcBef>
+              <a:spcAft>
+                <a:spcPts val="400"/>
+              </a:spcAft>
+            </a:pPr>
+            <a:r>
+              <a:rPr sz="2200" b="1">
+                <a:solidFill>
+                  <a:srgbClr val="7857FF"/>
+                </a:solidFill>
+                <a:latin typeface="Inter"/>
+              </a:rPr>
+              <a:t>Per task</a:t>
+            </a:r>
+          </a:p>
+        </p:txBody>
+      </p:sp>
+      <p:sp>
+        <p:nvSpPr>
+          <p:cNvPr id="14" name="Rounded Rectangle 13"/>
+          <p:cNvSpPr/>
+          <p:nvPr/>
+        </p:nvSpPr>
+        <p:spPr>
+          <a:xfrm>
+            <a:off x="640080" y="5486400"/>
+            <a:ext cx="10908792" cy="822960"/>
+          </a:xfrm>
+          <a:prstGeom prst="roundRect">
+            <a:avLst>
+              <a:gd name="adj" fmla="val 6000"/>
+            </a:avLst>
+          </a:prstGeom>
+          <a:solidFill>
+            <a:srgbClr val="EDE9FE"/>
+          </a:solidFill>
+          <a:ln w="12700">
+            <a:solidFill>
+              <a:srgbClr val="7857FF"/>
+            </a:solidFill>
+          </a:ln>
+        </p:spPr>
+        <p:style>
+          <a:lnRef idx="1">
+            <a:schemeClr val="accent1"/>
+          </a:lnRef>
+          <a:fillRef idx="3">
+            <a:schemeClr val="accent1"/>
+          </a:fillRef>
+          <a:effectRef idx="2">
+            <a:schemeClr val="accent1"/>
+          </a:effectRef>
+          <a:fontRef idx="minor">
+            <a:schemeClr val="lt1"/>
+          </a:fontRef>
+        </p:style>
+        <p:txBody>
+          <a:bodyPr rtlCol="0" anchor="ctr"/>
+          <a:lstStyle/>
+          <a:p>
+            <a:pPr algn="ctr"/>
+          </a:p>
+        </p:txBody>
+      </p:sp>
+      <p:sp>
+        <p:nvSpPr>
+          <p:cNvPr id="15" name="TextBox 14"/>
+          <p:cNvSpPr txBox="1"/>
+          <p:nvPr/>
+        </p:nvSpPr>
+        <p:spPr>
+          <a:xfrm>
+            <a:off x="868680" y="5650992"/>
+            <a:ext cx="10515600" cy="548640"/>
+          </a:xfrm>
+          <a:prstGeom prst="rect">
+            <a:avLst/>
+          </a:prstGeom>
+          <a:noFill/>
+        </p:spPr>
+        <p:txBody>
+          <a:bodyPr wrap="square" lIns="0" rIns="0" tIns="0" bIns="0" anchor="ctr">
+            <a:spAutoFit/>
+          </a:bodyPr>
+          <a:lstStyle/>
+          <a:p>
+            <a:pPr algn="l">
+              <a:spcBef>
+                <a:spcPts val="0"/>
+              </a:spcBef>
+              <a:spcAft>
+                <a:spcPts val="400"/>
+              </a:spcAft>
+            </a:pPr>
+            <a:r>
+              <a:rPr sz="1300" b="1">
+                <a:solidFill>
+                  <a:srgbClr val="0A0A0A"/>
+                </a:solidFill>
+                <a:latin typeface="Inter"/>
+              </a:rPr>
+              <a:t>Logan × Celsius signed: $170 placement + $0–$50 perf kicker + per-task RL revenue when this becomes a Mercor world.</a:t>
+            </a:r>
+          </a:p>
+        </p:txBody>
+      </p:sp>
+      <p:sp>
+        <p:nvSpPr>
+          <p:cNvPr id="16" name="TextBox 15"/>
+          <p:cNvSpPr txBox="1"/>
+          <p:nvPr/>
+        </p:nvSpPr>
+        <p:spPr>
+          <a:xfrm>
+            <a:off x="640080" y="6446520"/>
+            <a:ext cx="10972800" cy="274320"/>
+          </a:xfrm>
+          <a:prstGeom prst="rect">
+            <a:avLst/>
+          </a:prstGeom>
+          <a:noFill/>
+        </p:spPr>
+        <p:txBody>
+          <a:bodyPr wrap="square" lIns="0" rIns="0" tIns="0" bIns="0" anchor="t">
+            <a:spAutoFit/>
+          </a:bodyPr>
+          <a:lstStyle/>
+          <a:p>
+            <a:pPr algn="l">
+              <a:spcBef>
+                <a:spcPts val="0"/>
+              </a:spcBef>
+              <a:spcAft>
+                <a:spcPts val="400"/>
+              </a:spcAft>
+            </a:pPr>
+            <a:r>
+              <a:rPr sz="900" b="0">
+                <a:solidFill>
+                  <a:srgbClr val="9CA3AF"/>
+                </a:solidFill>
+                <a:latin typeface="Inter"/>
+              </a:rPr>
+              <a:t>creator experts   ·   internal proposal for aaron langerman   ·   6 / 8</a:t>
+            </a:r>
+          </a:p>
+        </p:txBody>
+      </p:sp>
+    </p:spTree>
+  </p:cSld>
+  <p:clrMapOvr>
+    <a:masterClrMapping/>
+  </p:clrMapOvr>
+</p:sld>
+</file>
+
+<file path=ppt/slides/slide7.xml><?xml version="1.0" encoding="utf-8"?>
+<p:sld xmlns:a="http://schemas.openxmlformats.org/drawingml/2006/main" xmlns:p="http://schemas.openxmlformats.org/presentationml/2006/main" xmlns:r="http://schemas.openxmlformats.org/officeDocument/2006/relationships">
+  <p:cSld>
+    <p:bg>
+      <p:bgPr>
+        <a:solidFill>
+          <a:srgbClr val="FFFFFF"/>
+        </a:solidFill>
+        <a:effectLst/>
+      </p:bgPr>
+    </p:bg>
+    <p:spTree>
+      <p:nvGrpSpPr>
+        <p:cNvPr id="1" name=""/>
+        <p:cNvGrpSpPr/>
+        <p:nvPr/>
+      </p:nvGrpSpPr>
+      <p:grpSpPr/>
+      <p:pic>
+        <p:nvPicPr>
+          <p:cNvPr id="2" name="Picture 1" descr="mercor-logo.png"/>
+          <p:cNvPicPr>
+            <a:picLocks noChangeAspect="1"/>
+          </p:cNvPicPr>
+          <p:nvPr/>
+        </p:nvPicPr>
+        <p:blipFill>
+          <a:blip r:embed="rId2"/>
+          <a:stretch>
+            <a:fillRect/>
+          </a:stretch>
+        </p:blipFill>
+        <p:spPr>
+          <a:xfrm>
+            <a:off x="11231575" y="320040"/>
+            <a:ext cx="320040" cy="320040"/>
+          </a:xfrm>
+          <a:prstGeom prst="rect">
+            <a:avLst/>
+          </a:prstGeom>
+        </p:spPr>
+      </p:pic>
+      <p:sp>
+        <p:nvSpPr>
+          <p:cNvPr id="3" name="TextBox 2"/>
+          <p:cNvSpPr txBox="1"/>
+          <p:nvPr/>
+        </p:nvSpPr>
+        <p:spPr>
+          <a:xfrm>
+            <a:off x="640080" y="868680"/>
+            <a:ext cx="10058400" cy="274320"/>
+          </a:xfrm>
+          <a:prstGeom prst="rect">
+            <a:avLst/>
+          </a:prstGeom>
+          <a:noFill/>
+        </p:spPr>
+        <p:txBody>
+          <a:bodyPr wrap="square" lIns="0" rIns="0" tIns="0" bIns="0" anchor="t">
+            <a:spAutoFit/>
+          </a:bodyPr>
+          <a:lstStyle/>
+          <a:p>
+            <a:pPr algn="l">
+              <a:spcBef>
+                <a:spcPts val="0"/>
+              </a:spcBef>
+              <a:spcAft>
+                <a:spcPts val="400"/>
+              </a:spcAft>
+            </a:pPr>
+            <a:r>
+              <a:rPr sz="1000" b="1" spc="120">
+                <a:solidFill>
+                  <a:srgbClr val="7857FF"/>
+                </a:solidFill>
+                <a:latin typeface="Inter"/>
+              </a:rPr>
+              <a:t>PROVE BY AUGUST.</a:t>
+            </a:r>
+          </a:p>
+        </p:txBody>
+      </p:sp>
+      <p:sp>
+        <p:nvSpPr>
+          <p:cNvPr id="4" name="TextBox 3"/>
+          <p:cNvSpPr txBox="1"/>
+          <p:nvPr/>
+        </p:nvSpPr>
+        <p:spPr>
+          <a:xfrm>
+            <a:off x="640080" y="1371600"/>
+            <a:ext cx="10972800" cy="822960"/>
+          </a:xfrm>
+          <a:prstGeom prst="rect">
+            <a:avLst/>
+          </a:prstGeom>
+          <a:noFill/>
+        </p:spPr>
+        <p:txBody>
+          <a:bodyPr wrap="square" lIns="0" rIns="0" tIns="0" bIns="0" anchor="t">
+            <a:spAutoFit/>
+          </a:bodyPr>
+          <a:lstStyle/>
+          <a:p>
+            <a:pPr algn="l">
+              <a:lnSpc>
+                <a:spcPct val="105000"/>
+              </a:lnSpc>
+              <a:spcBef>
+                <a:spcPts val="0"/>
+              </a:spcBef>
+              <a:spcAft>
+                <a:spcPts val="400"/>
+              </a:spcAft>
+            </a:pPr>
+            <a:r>
+              <a:rPr sz="2800" b="1">
+                <a:solidFill>
+                  <a:srgbClr val="0A0A0A"/>
+                </a:solidFill>
+                <a:latin typeface="Inter"/>
+              </a:rPr>
+              <a:t>Four proof points. Falsifiable. By August.</a:t>
+            </a:r>
+          </a:p>
+        </p:txBody>
+      </p:sp>
+      <p:sp>
+        <p:nvSpPr>
+          <p:cNvPr id="5" name="Rounded Rectangle 4"/>
+          <p:cNvSpPr/>
+          <p:nvPr/>
+        </p:nvSpPr>
+        <p:spPr>
+          <a:xfrm>
+            <a:off x="640080" y="2423160"/>
+            <a:ext cx="5440680" cy="1234440"/>
+          </a:xfrm>
+          <a:prstGeom prst="roundRect">
+            <a:avLst>
+              <a:gd name="adj" fmla="val 6000"/>
+            </a:avLst>
+          </a:prstGeom>
+          <a:solidFill>
+            <a:srgbClr val="FAFAFA"/>
+          </a:solidFill>
+          <a:ln w="9525">
+            <a:solidFill>
+              <a:srgbClr val="E5E7EB"/>
+            </a:solidFill>
+          </a:ln>
+        </p:spPr>
+        <p:style>
+          <a:lnRef idx="1">
+            <a:schemeClr val="accent1"/>
+          </a:lnRef>
+          <a:fillRef idx="3">
+            <a:schemeClr val="accent1"/>
+          </a:fillRef>
+          <a:effectRef idx="2">
+            <a:schemeClr val="accent1"/>
+          </a:effectRef>
+          <a:fontRef idx="minor">
+            <a:schemeClr val="lt1"/>
+          </a:fontRef>
+        </p:style>
+        <p:txBody>
+          <a:bodyPr rtlCol="0" anchor="ctr"/>
+          <a:lstStyle/>
+          <a:p>
+            <a:pPr algn="ctr"/>
+          </a:p>
+        </p:txBody>
+      </p:sp>
+      <p:sp>
+        <p:nvSpPr>
+          <p:cNvPr id="6" name="TextBox 5"/>
+          <p:cNvSpPr txBox="1"/>
+          <p:nvPr/>
+        </p:nvSpPr>
+        <p:spPr>
+          <a:xfrm>
+            <a:off x="914400" y="2606040"/>
+            <a:ext cx="4892040" cy="914400"/>
+          </a:xfrm>
+          <a:prstGeom prst="rect">
+            <a:avLst/>
+          </a:prstGeom>
+          <a:noFill/>
+        </p:spPr>
+        <p:txBody>
+          <a:bodyPr wrap="square" lIns="0" rIns="0" tIns="0" bIns="0" anchor="t">
+            <a:spAutoFit/>
+          </a:bodyPr>
+          <a:lstStyle/>
+          <a:p>
+            <a:pPr algn="l">
+              <a:spcBef>
+                <a:spcPts val="0"/>
+              </a:spcBef>
+              <a:spcAft>
+                <a:spcPts val="400"/>
+              </a:spcAft>
+            </a:pPr>
+            <a:r>
+              <a:rPr sz="1000" b="1" spc="120">
+                <a:solidFill>
+                  <a:srgbClr val="7857FF"/>
+                </a:solidFill>
+                <a:latin typeface="Inter"/>
+              </a:rPr>
+              <a:t>01</a:t>
+            </a:r>
+          </a:p>
+          <a:p>
+            <a:pPr algn="l">
+              <a:spcBef>
+                <a:spcPts val="0"/>
+              </a:spcBef>
+              <a:spcAft>
+                <a:spcPts val="400"/>
+              </a:spcAft>
+            </a:pPr>
+            <a:r>
+              <a:rPr sz="1500" b="1">
+                <a:solidFill>
+                  <a:srgbClr val="0A0A0A"/>
+                </a:solidFill>
+                <a:latin typeface="Inter"/>
+              </a:rPr>
+              <a:t>Workflow pain real</a:t>
+            </a:r>
+          </a:p>
+          <a:p>
+            <a:pPr algn="l">
+              <a:spcBef>
+                <a:spcPts val="0"/>
+              </a:spcBef>
+              <a:spcAft>
+                <a:spcPts val="400"/>
+              </a:spcAft>
+            </a:pPr>
+            <a:r>
+              <a:rPr sz="1100" b="0">
+                <a:solidFill>
+                  <a:srgbClr val="6B7280"/>
+                </a:solidFill>
+                <a:latin typeface="Inter"/>
+              </a:rPr>
+              <a:t>10 brand interviews. Quantify per-creator review time.</a:t>
+            </a:r>
+          </a:p>
+        </p:txBody>
+      </p:sp>
+      <p:sp>
+        <p:nvSpPr>
+          <p:cNvPr id="7" name="Rounded Rectangle 6"/>
+          <p:cNvSpPr/>
+          <p:nvPr/>
+        </p:nvSpPr>
+        <p:spPr>
+          <a:xfrm>
+            <a:off x="6309360" y="2423160"/>
+            <a:ext cx="5440680" cy="1234440"/>
+          </a:xfrm>
+          <a:prstGeom prst="roundRect">
+            <a:avLst>
+              <a:gd name="adj" fmla="val 6000"/>
+            </a:avLst>
+          </a:prstGeom>
+          <a:solidFill>
+            <a:srgbClr val="FAFAFA"/>
+          </a:solidFill>
+          <a:ln w="9525">
+            <a:solidFill>
+              <a:srgbClr val="E5E7EB"/>
+            </a:solidFill>
+          </a:ln>
+        </p:spPr>
+        <p:style>
+          <a:lnRef idx="1">
+            <a:schemeClr val="accent1"/>
+          </a:lnRef>
+          <a:fillRef idx="3">
+            <a:schemeClr val="accent1"/>
+          </a:fillRef>
+          <a:effectRef idx="2">
+            <a:schemeClr val="accent1"/>
+          </a:effectRef>
+          <a:fontRef idx="minor">
+            <a:schemeClr val="lt1"/>
+          </a:fontRef>
+        </p:style>
+        <p:txBody>
+          <a:bodyPr rtlCol="0" anchor="ctr"/>
+          <a:lstStyle/>
+          <a:p>
+            <a:pPr algn="ctr"/>
+          </a:p>
+        </p:txBody>
+      </p:sp>
+      <p:sp>
+        <p:nvSpPr>
+          <p:cNvPr id="8" name="TextBox 7"/>
+          <p:cNvSpPr txBox="1"/>
+          <p:nvPr/>
+        </p:nvSpPr>
+        <p:spPr>
+          <a:xfrm>
+            <a:off x="6583680" y="2606040"/>
+            <a:ext cx="4892040" cy="914400"/>
+          </a:xfrm>
+          <a:prstGeom prst="rect">
+            <a:avLst/>
+          </a:prstGeom>
+          <a:noFill/>
+        </p:spPr>
+        <p:txBody>
+          <a:bodyPr wrap="square" lIns="0" rIns="0" tIns="0" bIns="0" anchor="t">
+            <a:spAutoFit/>
+          </a:bodyPr>
+          <a:lstStyle/>
+          <a:p>
+            <a:pPr algn="l">
+              <a:spcBef>
+                <a:spcPts val="0"/>
+              </a:spcBef>
+              <a:spcAft>
+                <a:spcPts val="400"/>
+              </a:spcAft>
+            </a:pPr>
+            <a:r>
+              <a:rPr sz="1000" b="1" spc="120">
+                <a:solidFill>
+                  <a:srgbClr val="7857FF"/>
+                </a:solidFill>
+                <a:latin typeface="Inter"/>
+              </a:rPr>
+              <a:t>02</a:t>
+            </a:r>
+          </a:p>
+          <a:p>
+            <a:pPr algn="l">
+              <a:spcBef>
+                <a:spcPts val="0"/>
+              </a:spcBef>
+              <a:spcAft>
+                <a:spcPts val="400"/>
+              </a:spcAft>
+            </a:pPr>
+            <a:r>
+              <a:rPr sz="1500" b="1">
+                <a:solidFill>
+                  <a:srgbClr val="0A0A0A"/>
+                </a:solidFill>
+                <a:latin typeface="Inter"/>
+              </a:rPr>
+              <a:t>Verification works</a:t>
+            </a:r>
+          </a:p>
+          <a:p>
+            <a:pPr algn="l">
+              <a:spcBef>
+                <a:spcPts val="0"/>
+              </a:spcBef>
+              <a:spcAft>
+                <a:spcPts val="400"/>
+              </a:spcAft>
+            </a:pPr>
+            <a:r>
+              <a:rPr sz="1100" b="0">
+                <a:solidFill>
+                  <a:srgbClr val="6B7280"/>
+                </a:solidFill>
+                <a:latin typeface="Inter"/>
+              </a:rPr>
+              <a:t>1,000 creators screened. Catch rate vs ground truth.</a:t>
+            </a:r>
+          </a:p>
+        </p:txBody>
+      </p:sp>
+      <p:sp>
+        <p:nvSpPr>
+          <p:cNvPr id="9" name="Rounded Rectangle 8"/>
+          <p:cNvSpPr/>
+          <p:nvPr/>
+        </p:nvSpPr>
+        <p:spPr>
+          <a:xfrm>
+            <a:off x="640080" y="3886200"/>
+            <a:ext cx="5440680" cy="1234440"/>
+          </a:xfrm>
+          <a:prstGeom prst="roundRect">
+            <a:avLst>
+              <a:gd name="adj" fmla="val 6000"/>
+            </a:avLst>
+          </a:prstGeom>
+          <a:solidFill>
+            <a:srgbClr val="FAFAFA"/>
+          </a:solidFill>
+          <a:ln w="9525">
+            <a:solidFill>
+              <a:srgbClr val="E5E7EB"/>
+            </a:solidFill>
+          </a:ln>
+        </p:spPr>
+        <p:style>
+          <a:lnRef idx="1">
+            <a:schemeClr val="accent1"/>
+          </a:lnRef>
+          <a:fillRef idx="3">
+            <a:schemeClr val="accent1"/>
+          </a:fillRef>
+          <a:effectRef idx="2">
+            <a:schemeClr val="accent1"/>
+          </a:effectRef>
+          <a:fontRef idx="minor">
+            <a:schemeClr val="lt1"/>
+          </a:fontRef>
+        </p:style>
+        <p:txBody>
+          <a:bodyPr rtlCol="0" anchor="ctr"/>
+          <a:lstStyle/>
+          <a:p>
+            <a:pPr algn="ctr"/>
+          </a:p>
+        </p:txBody>
+      </p:sp>
+      <p:sp>
+        <p:nvSpPr>
+          <p:cNvPr id="10" name="TextBox 9"/>
+          <p:cNvSpPr txBox="1"/>
+          <p:nvPr/>
+        </p:nvSpPr>
+        <p:spPr>
+          <a:xfrm>
+            <a:off x="914400" y="4069080"/>
+            <a:ext cx="4892040" cy="914400"/>
+          </a:xfrm>
+          <a:prstGeom prst="rect">
+            <a:avLst/>
+          </a:prstGeom>
+          <a:noFill/>
+        </p:spPr>
+        <p:txBody>
+          <a:bodyPr wrap="square" lIns="0" rIns="0" tIns="0" bIns="0" anchor="t">
+            <a:spAutoFit/>
+          </a:bodyPr>
+          <a:lstStyle/>
+          <a:p>
+            <a:pPr algn="l">
+              <a:spcBef>
+                <a:spcPts val="0"/>
+              </a:spcBef>
+              <a:spcAft>
+                <a:spcPts val="400"/>
+              </a:spcAft>
+            </a:pPr>
+            <a:r>
+              <a:rPr sz="1000" b="1" spc="120">
+                <a:solidFill>
+                  <a:srgbClr val="7857FF"/>
+                </a:solidFill>
+                <a:latin typeface="Inter"/>
+              </a:rPr>
+              <a:t>03</a:t>
+            </a:r>
+          </a:p>
+          <a:p>
+            <a:pPr algn="l">
+              <a:spcBef>
+                <a:spcPts val="0"/>
+              </a:spcBef>
+              <a:spcAft>
+                <a:spcPts val="400"/>
+              </a:spcAft>
+            </a:pPr>
+            <a:r>
+              <a:rPr sz="1500" b="1">
+                <a:solidFill>
+                  <a:srgbClr val="0A0A0A"/>
+                </a:solidFill>
+                <a:latin typeface="Inter"/>
+              </a:rPr>
+              <a:t>Quality scoring beats baseline</a:t>
+            </a:r>
+          </a:p>
+          <a:p>
+            <a:pPr algn="l">
+              <a:spcBef>
+                <a:spcPts val="0"/>
+              </a:spcBef>
+              <a:spcAft>
+                <a:spcPts val="400"/>
+              </a:spcAft>
+            </a:pPr>
+            <a:r>
+              <a:rPr sz="1100" b="0">
+                <a:solidFill>
+                  <a:srgbClr val="6B7280"/>
+                </a:solidFill>
+                <a:latin typeface="Inter"/>
+              </a:rPr>
+              <a:t>Mercor model vs follower-count, on 5 brands.</a:t>
+            </a:r>
+          </a:p>
+        </p:txBody>
+      </p:sp>
+      <p:sp>
+        <p:nvSpPr>
+          <p:cNvPr id="11" name="Rounded Rectangle 10"/>
+          <p:cNvSpPr/>
+          <p:nvPr/>
+        </p:nvSpPr>
+        <p:spPr>
+          <a:xfrm>
+            <a:off x="6309360" y="3886200"/>
+            <a:ext cx="5440680" cy="1234440"/>
+          </a:xfrm>
+          <a:prstGeom prst="roundRect">
+            <a:avLst>
+              <a:gd name="adj" fmla="val 6000"/>
+            </a:avLst>
+          </a:prstGeom>
+          <a:solidFill>
+            <a:srgbClr val="FAFAFA"/>
+          </a:solidFill>
+          <a:ln w="9525">
+            <a:solidFill>
+              <a:srgbClr val="E5E7EB"/>
+            </a:solidFill>
+          </a:ln>
+        </p:spPr>
+        <p:style>
+          <a:lnRef idx="1">
+            <a:schemeClr val="accent1"/>
+          </a:lnRef>
+          <a:fillRef idx="3">
+            <a:schemeClr val="accent1"/>
+          </a:fillRef>
+          <a:effectRef idx="2">
+            <a:schemeClr val="accent1"/>
+          </a:effectRef>
+          <a:fontRef idx="minor">
+            <a:schemeClr val="lt1"/>
+          </a:fontRef>
+        </p:style>
+        <p:txBody>
+          <a:bodyPr rtlCol="0" anchor="ctr"/>
+          <a:lstStyle/>
+          <a:p>
+            <a:pPr algn="ctr"/>
+          </a:p>
+        </p:txBody>
+      </p:sp>
+      <p:sp>
+        <p:nvSpPr>
+          <p:cNvPr id="12" name="TextBox 11"/>
+          <p:cNvSpPr txBox="1"/>
+          <p:nvPr/>
+        </p:nvSpPr>
+        <p:spPr>
+          <a:xfrm>
+            <a:off x="6583680" y="4069080"/>
+            <a:ext cx="4892040" cy="914400"/>
+          </a:xfrm>
+          <a:prstGeom prst="rect">
+            <a:avLst/>
+          </a:prstGeom>
+          <a:noFill/>
+        </p:spPr>
+        <p:txBody>
+          <a:bodyPr wrap="square" lIns="0" rIns="0" tIns="0" bIns="0" anchor="t">
+            <a:spAutoFit/>
+          </a:bodyPr>
+          <a:lstStyle/>
+          <a:p>
+            <a:pPr algn="l">
+              <a:spcBef>
+                <a:spcPts val="0"/>
+              </a:spcBef>
+              <a:spcAft>
+                <a:spcPts val="400"/>
+              </a:spcAft>
+            </a:pPr>
+            <a:r>
+              <a:rPr sz="1000" b="1" spc="120">
+                <a:solidFill>
+                  <a:srgbClr val="7857FF"/>
+                </a:solidFill>
+                <a:latin typeface="Inter"/>
+              </a:rPr>
+              <a:t>04</a:t>
+            </a:r>
+          </a:p>
+          <a:p>
+            <a:pPr algn="l">
+              <a:spcBef>
+                <a:spcPts val="0"/>
+              </a:spcBef>
+              <a:spcAft>
+                <a:spcPts val="400"/>
+              </a:spcAft>
+            </a:pPr>
+            <a:r>
+              <a:rPr sz="1500" b="1">
+                <a:solidFill>
+                  <a:srgbClr val="0A0A0A"/>
+                </a:solidFill>
+                <a:latin typeface="Inter"/>
+              </a:rPr>
+              <a:t>Outcome prediction holds</a:t>
+            </a:r>
+          </a:p>
+          <a:p>
+            <a:pPr algn="l">
+              <a:spcBef>
+                <a:spcPts val="0"/>
+              </a:spcBef>
+              <a:spcAft>
+                <a:spcPts val="400"/>
+              </a:spcAft>
+            </a:pPr>
+            <a:r>
+              <a:rPr sz="1100" b="0">
+                <a:solidFill>
+                  <a:srgbClr val="6B7280"/>
+                </a:solidFill>
+                <a:latin typeface="Inter"/>
+              </a:rPr>
+              <a:t>Predicted vs actual on 10 finished campaigns.</a:t>
+            </a:r>
+          </a:p>
+        </p:txBody>
+      </p:sp>
+      <p:sp>
+        <p:nvSpPr>
+          <p:cNvPr id="13" name="Rounded Rectangle 12"/>
+          <p:cNvSpPr/>
+          <p:nvPr/>
+        </p:nvSpPr>
+        <p:spPr>
+          <a:xfrm>
+            <a:off x="640080" y="5166360"/>
+            <a:ext cx="10908792" cy="777240"/>
+          </a:xfrm>
+          <a:prstGeom prst="roundRect">
+            <a:avLst>
+              <a:gd name="adj" fmla="val 6000"/>
+            </a:avLst>
+          </a:prstGeom>
+          <a:solidFill>
+            <a:srgbClr val="EDE9FE"/>
+          </a:solidFill>
+          <a:ln w="12700">
+            <a:solidFill>
+              <a:srgbClr val="7857FF"/>
+            </a:solidFill>
+          </a:ln>
+        </p:spPr>
+        <p:style>
+          <a:lnRef idx="1">
+            <a:schemeClr val="accent1"/>
+          </a:lnRef>
+          <a:fillRef idx="3">
+            <a:schemeClr val="accent1"/>
+          </a:fillRef>
+          <a:effectRef idx="2">
+            <a:schemeClr val="accent1"/>
+          </a:effectRef>
+          <a:fontRef idx="minor">
+            <a:schemeClr val="lt1"/>
+          </a:fontRef>
+        </p:style>
+        <p:txBody>
+          <a:bodyPr rtlCol="0" anchor="ctr"/>
+          <a:lstStyle/>
+          <a:p>
+            <a:pPr algn="ctr"/>
+          </a:p>
+        </p:txBody>
+      </p:sp>
+      <p:sp>
+        <p:nvSpPr>
+          <p:cNvPr id="14" name="TextBox 13"/>
+          <p:cNvSpPr txBox="1"/>
+          <p:nvPr/>
+        </p:nvSpPr>
+        <p:spPr>
+          <a:xfrm>
+            <a:off x="868680" y="5312664"/>
+            <a:ext cx="10515600" cy="502920"/>
+          </a:xfrm>
+          <a:prstGeom prst="rect">
+            <a:avLst/>
+          </a:prstGeom>
+          <a:noFill/>
+        </p:spPr>
+        <p:txBody>
+          <a:bodyPr wrap="square" lIns="0" rIns="0" tIns="0" bIns="0" anchor="ctr">
+            <a:spAutoFit/>
+          </a:bodyPr>
+          <a:lstStyle/>
+          <a:p>
+            <a:pPr algn="l">
+              <a:spcBef>
+                <a:spcPts val="0"/>
+              </a:spcBef>
+              <a:spcAft>
+                <a:spcPts val="200"/>
+              </a:spcAft>
+            </a:pPr>
+            <a:r>
+              <a:rPr sz="1500" b="1">
+                <a:solidFill>
+                  <a:srgbClr val="0A0A0A"/>
+                </a:solidFill>
+                <a:latin typeface="Inter"/>
+              </a:rPr>
+              <a:t>4 of 4 → strategic adjacency. 2 of 4 → kill it.</a:t>
+            </a:r>
+          </a:p>
+          <a:p>
+            <a:pPr algn="l">
+              <a:spcBef>
+                <a:spcPts val="0"/>
+              </a:spcBef>
+              <a:spcAft>
+                <a:spcPts val="400"/>
+              </a:spcAft>
+            </a:pPr>
+            <a:r>
+              <a:rPr sz="1100" b="0">
+                <a:solidFill>
+                  <a:srgbClr val="6B7280"/>
+                </a:solidFill>
+                <a:latin typeface="Inter"/>
+              </a:rPr>
+              <a:t>Paid like a headhunter. Placement on signed deals.</a:t>
+            </a:r>
+          </a:p>
+        </p:txBody>
+      </p:sp>
+      <p:sp>
+        <p:nvSpPr>
+          <p:cNvPr id="15" name="TextBox 14"/>
+          <p:cNvSpPr txBox="1"/>
+          <p:nvPr/>
+        </p:nvSpPr>
+        <p:spPr>
+          <a:xfrm>
+            <a:off x="640080" y="6446520"/>
+            <a:ext cx="10972800" cy="274320"/>
+          </a:xfrm>
+          <a:prstGeom prst="rect">
+            <a:avLst/>
+          </a:prstGeom>
+          <a:noFill/>
+        </p:spPr>
+        <p:txBody>
+          <a:bodyPr wrap="square" lIns="0" rIns="0" tIns="0" bIns="0" anchor="t">
+            <a:spAutoFit/>
+          </a:bodyPr>
+          <a:lstStyle/>
+          <a:p>
+            <a:pPr algn="l">
+              <a:spcBef>
+                <a:spcPts val="0"/>
+              </a:spcBef>
+              <a:spcAft>
+                <a:spcPts val="400"/>
+              </a:spcAft>
+            </a:pPr>
+            <a:r>
+              <a:rPr sz="900" b="0">
+                <a:solidFill>
+                  <a:srgbClr val="9CA3AF"/>
+                </a:solidFill>
+                <a:latin typeface="Inter"/>
+              </a:rPr>
+              <a:t>creator experts   ·   internal proposal for aaron langerman   ·   7 / 8</a:t>
+            </a:r>
+          </a:p>
+        </p:txBody>
+      </p:sp>
+    </p:spTree>
+  </p:cSld>
+  <p:clrMapOvr>
+    <a:masterClrMapping/>
+  </p:clrMapOvr>
+</p:sld>
+</file>
+
+<file path=ppt/slides/slide8.xml><?xml version="1.0" encoding="utf-8"?>
+<p:sld xmlns:a="http://schemas.openxmlformats.org/drawingml/2006/main" xmlns:p="http://schemas.openxmlformats.org/presentationml/2006/main" xmlns:r="http://schemas.openxmlformats.org/officeDocument/2006/relationships">
+  <p:cSld>
+    <p:bg>
+      <p:bgPr>
+        <a:solidFill>
+          <a:srgbClr val="FFFFFF"/>
+        </a:solidFill>
+        <a:effectLst/>
+      </p:bgPr>
+    </p:bg>
+    <p:spTree>
+      <p:nvGrpSpPr>
+        <p:cNvPr id="1" name=""/>
+        <p:cNvGrpSpPr/>
+        <p:nvPr/>
+      </p:nvGrpSpPr>
+      <p:grpSpPr/>
+      <p:pic>
+        <p:nvPicPr>
+          <p:cNvPr id="2" name="Picture 1" descr="mercor-logo.png"/>
+          <p:cNvPicPr>
+            <a:picLocks noChangeAspect="1"/>
+          </p:cNvPicPr>
+          <p:nvPr/>
+        </p:nvPicPr>
+        <p:blipFill>
+          <a:blip r:embed="rId2"/>
+          <a:stretch>
+            <a:fillRect/>
+          </a:stretch>
+        </p:blipFill>
+        <p:spPr>
+          <a:xfrm>
+            <a:off x="11231575" y="320040"/>
+            <a:ext cx="320040" cy="320040"/>
+          </a:xfrm>
+          <a:prstGeom prst="rect">
+            <a:avLst/>
+          </a:prstGeom>
+        </p:spPr>
+      </p:pic>
+      <p:sp>
+        <p:nvSpPr>
+          <p:cNvPr id="3" name="TextBox 2"/>
+          <p:cNvSpPr txBox="1"/>
+          <p:nvPr/>
+        </p:nvSpPr>
+        <p:spPr>
+          <a:xfrm>
+            <a:off x="640080" y="868680"/>
+            <a:ext cx="10058400" cy="274320"/>
+          </a:xfrm>
+          <a:prstGeom prst="rect">
+            <a:avLst/>
+          </a:prstGeom>
+          <a:noFill/>
+        </p:spPr>
+        <p:txBody>
+          <a:bodyPr wrap="square" lIns="0" rIns="0" tIns="0" bIns="0" anchor="t">
+            <a:spAutoFit/>
+          </a:bodyPr>
+          <a:lstStyle/>
+          <a:p>
+            <a:pPr algn="l">
+              <a:spcBef>
+                <a:spcPts val="0"/>
+              </a:spcBef>
+              <a:spcAft>
+                <a:spcPts val="400"/>
+              </a:spcAft>
+            </a:pPr>
+            <a:r>
+              <a:rPr sz="1000" b="1" spc="120">
+                <a:solidFill>
+                  <a:srgbClr val="7857FF"/>
+                </a:solidFill>
+                <a:latin typeface="Inter"/>
+              </a:rPr>
+              <a:t>NOW → LIVE DEMO</a:t>
+            </a:r>
+          </a:p>
+        </p:txBody>
+      </p:sp>
+      <p:sp>
+        <p:nvSpPr>
+          <p:cNvPr id="4" name="TextBox 3"/>
+          <p:cNvSpPr txBox="1"/>
+          <p:nvPr/>
+        </p:nvSpPr>
+        <p:spPr>
+          <a:xfrm>
+            <a:off x="640080" y="1417320"/>
+            <a:ext cx="10972800" cy="2103120"/>
+          </a:xfrm>
+          <a:prstGeom prst="rect">
+            <a:avLst/>
+          </a:prstGeom>
+          <a:noFill/>
+        </p:spPr>
+        <p:txBody>
+          <a:bodyPr wrap="square" lIns="0" rIns="0" tIns="0" bIns="0" anchor="t">
+            <a:spAutoFit/>
+          </a:bodyPr>
+          <a:lstStyle/>
+          <a:p>
+            <a:pPr algn="l">
+              <a:lnSpc>
+                <a:spcPct val="105000"/>
+              </a:lnSpc>
+              <a:spcBef>
+                <a:spcPts val="0"/>
+              </a:spcBef>
+              <a:spcAft>
+                <a:spcPts val="400"/>
+              </a:spcAft>
+            </a:pPr>
+            <a:r>
+              <a:rPr sz="4200" b="1">
+                <a:solidFill>
+                  <a:srgbClr val="0A0A0A"/>
+                </a:solidFill>
+                <a:latin typeface="Inter"/>
+              </a:rPr>
+              <a:t>The demo's the rest of the pitch.</a:t>
+            </a:r>
+          </a:p>
+        </p:txBody>
+      </p:sp>
+      <p:sp>
+        <p:nvSpPr>
+          <p:cNvPr id="5" name="TextBox 4"/>
+          <p:cNvSpPr txBox="1"/>
+          <p:nvPr/>
+        </p:nvSpPr>
+        <p:spPr>
+          <a:xfrm>
+            <a:off x="640080" y="4023360"/>
+            <a:ext cx="10972800" cy="1280160"/>
+          </a:xfrm>
+          <a:prstGeom prst="rect">
+            <a:avLst/>
+          </a:prstGeom>
+          <a:noFill/>
+        </p:spPr>
+        <p:txBody>
+          <a:bodyPr wrap="square" lIns="0" rIns="0" tIns="0" bIns="0" anchor="t">
+            <a:spAutoFit/>
+          </a:bodyPr>
+          <a:lstStyle/>
+          <a:p>
+            <a:pPr>
+              <a:spcAft>
+                <a:spcPts val="1000"/>
+              </a:spcAft>
+            </a:pPr>
+            <a:r>
+              <a:rPr sz="1500" b="0">
+                <a:solidFill>
+                  <a:srgbClr val="0A0A0A"/>
+                </a:solidFill>
+                <a:latin typeface="Inter"/>
+              </a:rPr>
+              <a:t>Logan as a creator — real 22.7K TikTok account, applying inside Mercor's stepper.</a:t>
+            </a:r>
+          </a:p>
+          <a:p>
+            <a:pPr>
+              <a:spcAft>
+                <a:spcPts val="1000"/>
+              </a:spcAft>
+            </a:pPr>
+            <a:r>
+              <a:rPr sz="1500" b="0">
+                <a:solidFill>
+                  <a:srgbClr val="0A0A0A"/>
+                </a:solidFill>
+                <a:latin typeface="Inter"/>
+              </a:rPr>
+              <a:t>Aaron as Mercor admin — RAG cites real posts back by URL, outreach drafts in line.</a:t>
+            </a:r>
+          </a:p>
+        </p:txBody>
+      </p:sp>
+      <p:sp>
+        <p:nvSpPr>
+          <p:cNvPr id="6" name="Rounded Rectangle 5"/>
+          <p:cNvSpPr/>
+          <p:nvPr/>
+        </p:nvSpPr>
+        <p:spPr>
+          <a:xfrm>
+            <a:off x="640080" y="5669280"/>
+            <a:ext cx="10972800" cy="594360"/>
+          </a:xfrm>
+          <a:prstGeom prst="roundRect">
+            <a:avLst>
+              <a:gd name="adj" fmla="val 40000"/>
+            </a:avLst>
+          </a:prstGeom>
+          <a:solidFill>
+            <a:srgbClr val="7857FF"/>
+          </a:solidFill>
+          <a:ln>
+            <a:noFill/>
+          </a:ln>
+        </p:spPr>
+        <p:style>
+          <a:lnRef idx="1">
+            <a:schemeClr val="accent1"/>
+          </a:lnRef>
+          <a:fillRef idx="3">
+            <a:schemeClr val="accent1"/>
+          </a:fillRef>
+          <a:effectRef idx="2">
+            <a:schemeClr val="accent1"/>
+          </a:effectRef>
+          <a:fontRef idx="minor">
+            <a:schemeClr val="lt1"/>
+          </a:fontRef>
+        </p:style>
+        <p:txBody>
+          <a:bodyPr rtlCol="0" anchor="ctr" lIns="0" rIns="0"/>
+          <a:lstStyle/>
+          <a:p>
+            <a:pPr algn="ctr"/>
+            <a:r>
+              <a:rPr sz="1500" b="1">
+                <a:solidFill>
+                  <a:srgbClr val="FFFFFF"/>
+                </a:solidFill>
+                <a:latin typeface="Inter"/>
+              </a:rPr>
+              <a:t>Live: musing-maxwell-84ed29.vercel.app</a:t>
+            </a:r>
+          </a:p>
+        </p:txBody>
+      </p:sp>
+      <p:sp>
+        <p:nvSpPr>
+          <p:cNvPr id="7" name="TextBox 6"/>
+          <p:cNvSpPr txBox="1"/>
+          <p:nvPr/>
+        </p:nvSpPr>
+        <p:spPr>
+          <a:xfrm>
+            <a:off x="640080" y="6446520"/>
+            <a:ext cx="10972800" cy="274320"/>
+          </a:xfrm>
+          <a:prstGeom prst="rect">
+            <a:avLst/>
+          </a:prstGeom>
+          <a:noFill/>
+        </p:spPr>
+        <p:txBody>
+          <a:bodyPr wrap="square" lIns="0" rIns="0" tIns="0" bIns="0" anchor="t">
+            <a:spAutoFit/>
+          </a:bodyPr>
+          <a:lstStyle/>
+          <a:p>
+            <a:pPr algn="l">
+              <a:spcBef>
+                <a:spcPts val="0"/>
+              </a:spcBef>
+              <a:spcAft>
+                <a:spcPts val="400"/>
+              </a:spcAft>
+            </a:pPr>
+            <a:r>
+              <a:rPr sz="900" b="0">
+                <a:solidFill>
+                  <a:srgbClr val="9CA3AF"/>
+                </a:solidFill>
+                <a:latin typeface="Inter"/>
+              </a:rPr>
+              <a:t>creator experts   ·   internal proposal for aaron langerman   ·   8 / 8</a:t>
             </a:r>
           </a:p>
         </p:txBody>

--- a/docs/pitch/Mercor-Creators-Domain.pptx
+++ b/docs/pitch/Mercor-Creators-Domain.pptx
@@ -4814,7 +4814,7 @@
                 </a:solidFill>
                 <a:latin typeface="Inter"/>
               </a:rPr>
-              <a:t>Surface signals are getting noisier.</a:t>
+              <a:t>AI slop has flooded the feed.</a:t>
             </a:r>
           </a:p>
           <a:p>
@@ -4833,7 +4833,7 @@
                 </a:solidFill>
                 <a:latin typeface="Inter"/>
               </a:rPr>
-              <a:t>Only 26% of consumers prefer AI-generated creator content today, down from 60% in 2023 (Billion Dollar Boy Muse Two, 2025-11-20).</a:t>
+              <a:t>Only 26% of consumers prefer AI-generated creator content today, down from 60% in 2023 (Billion Dollar Boy Muse Two, 2025-11-20). Brands need a way to filter slop from real signal.</a:t>
             </a:r>
           </a:p>
         </p:txBody>
